--- a/Revelacao-de-Essencia-Flavia-Pereira-Muccelin.pptx
+++ b/Revelacao-de-Essencia-Flavia-Pereira-Muccelin.pptx
@@ -3683,7 +3683,7 @@
       </p:sp>
       <p:sp>
         <p:nvSpPr>
-          <p:cNvPr id="7" name="Rectangle 6"/>
+          <p:cNvPr id="7" name="Rounded Rectangle 6"/>
           <p:cNvSpPr/>
           <p:nvPr/>
         </p:nvSpPr>
@@ -3692,8 +3692,10 @@
             <a:off x="1536192" y="7790688"/>
             <a:ext cx="18288" cy="1188720"/>
           </a:xfrm>
-          <a:prstGeom prst="rect">
-            <a:avLst/>
+          <a:prstGeom prst="roundRect">
+            <a:avLst>
+              <a:gd name="adj" fmla="val 50000"/>
+            </a:avLst>
           </a:prstGeom>
           <a:solidFill>
             <a:srgbClr val="2E2E2A"/>
@@ -3800,7 +3802,7 @@
       </p:sp>
       <p:sp>
         <p:nvSpPr>
-          <p:cNvPr id="9" name="Rectangle 8"/>
+          <p:cNvPr id="9" name="Rounded Rectangle 8"/>
           <p:cNvSpPr/>
           <p:nvPr/>
         </p:nvSpPr>
@@ -3809,8 +3811,10 @@
             <a:off x="6309360" y="7790688"/>
             <a:ext cx="18288" cy="1188720"/>
           </a:xfrm>
-          <a:prstGeom prst="rect">
-            <a:avLst/>
+          <a:prstGeom prst="roundRect">
+            <a:avLst>
+              <a:gd name="adj" fmla="val 50000"/>
+            </a:avLst>
           </a:prstGeom>
           <a:solidFill>
             <a:srgbClr val="2E2E2A"/>
@@ -4029,14 +4033,16 @@
             <a:off x="11064240" y="3063240"/>
             <a:ext cx="5943600" cy="4206240"/>
           </a:xfrm>
-          <a:prstGeom prst="rect">
-            <a:avLst/>
+          <a:prstGeom prst="roundRect">
+            <a:avLst>
+              <a:gd name="adj" fmla="val 7826"/>
+            </a:avLst>
           </a:prstGeom>
         </p:spPr>
       </p:pic>
       <p:sp>
         <p:nvSpPr>
-          <p:cNvPr id="5" name="Rectangle 4"/>
+          <p:cNvPr id="5" name="Rounded Rectangle 4"/>
           <p:cNvSpPr/>
           <p:nvPr/>
         </p:nvSpPr>
@@ -4045,8 +4051,10 @@
             <a:off x="1280160" y="3063240"/>
             <a:ext cx="4526280" cy="2011680"/>
           </a:xfrm>
-          <a:prstGeom prst="rect">
-            <a:avLst/>
+          <a:prstGeom prst="roundRect">
+            <a:avLst>
+              <a:gd name="adj" fmla="val 10909"/>
+            </a:avLst>
           </a:prstGeom>
           <a:solidFill>
             <a:srgbClr val="E5E4DF"/>
@@ -4080,7 +4088,7 @@
       </p:sp>
       <p:sp>
         <p:nvSpPr>
-          <p:cNvPr id="6" name="Rectangle 5"/>
+          <p:cNvPr id="6" name="Rounded Rectangle 5"/>
           <p:cNvSpPr/>
           <p:nvPr/>
         </p:nvSpPr>
@@ -4089,8 +4097,10 @@
             <a:off x="1291133" y="3074213"/>
             <a:ext cx="4504334" cy="1989734"/>
           </a:xfrm>
-          <a:prstGeom prst="rect">
-            <a:avLst/>
+          <a:prstGeom prst="roundRect">
+            <a:avLst>
+              <a:gd name="adj" fmla="val 10477"/>
+            </a:avLst>
           </a:prstGeom>
           <a:solidFill>
             <a:srgbClr val="FFFFFF"/>
@@ -4124,17 +4134,19 @@
       </p:sp>
       <p:sp>
         <p:nvSpPr>
-          <p:cNvPr id="7" name="Rectangle 6"/>
+          <p:cNvPr id="7" name="Rounded Rectangle 6"/>
           <p:cNvSpPr/>
           <p:nvPr/>
         </p:nvSpPr>
         <p:spPr>
           <a:xfrm>
-            <a:off x="1280160" y="3063240"/>
-            <a:ext cx="4526280" cy="73152"/>
-          </a:xfrm>
-          <a:prstGeom prst="rect">
-            <a:avLst/>
+            <a:off x="2971800" y="3264408"/>
+            <a:ext cx="1143000" cy="73152"/>
+          </a:xfrm>
+          <a:prstGeom prst="roundRect">
+            <a:avLst>
+              <a:gd name="adj" fmla="val 50000"/>
+            </a:avLst>
           </a:prstGeom>
           <a:solidFill>
             <a:srgbClr val="2E2E2A"/>
@@ -4246,7 +4258,7 @@
       </p:sp>
       <p:sp>
         <p:nvSpPr>
-          <p:cNvPr id="10" name="Rectangle 9"/>
+          <p:cNvPr id="10" name="Rounded Rectangle 9"/>
           <p:cNvSpPr/>
           <p:nvPr/>
         </p:nvSpPr>
@@ -4255,8 +4267,10 @@
             <a:off x="6080760" y="3063240"/>
             <a:ext cx="4526280" cy="2011680"/>
           </a:xfrm>
-          <a:prstGeom prst="rect">
-            <a:avLst/>
+          <a:prstGeom prst="roundRect">
+            <a:avLst>
+              <a:gd name="adj" fmla="val 10909"/>
+            </a:avLst>
           </a:prstGeom>
           <a:solidFill>
             <a:srgbClr val="E5E4DF"/>
@@ -4290,7 +4304,7 @@
       </p:sp>
       <p:sp>
         <p:nvSpPr>
-          <p:cNvPr id="11" name="Rectangle 10"/>
+          <p:cNvPr id="11" name="Rounded Rectangle 10"/>
           <p:cNvSpPr/>
           <p:nvPr/>
         </p:nvSpPr>
@@ -4299,8 +4313,10 @@
             <a:off x="6091733" y="3074213"/>
             <a:ext cx="4504334" cy="1989734"/>
           </a:xfrm>
-          <a:prstGeom prst="rect">
-            <a:avLst/>
+          <a:prstGeom prst="roundRect">
+            <a:avLst>
+              <a:gd name="adj" fmla="val 10477"/>
+            </a:avLst>
           </a:prstGeom>
           <a:solidFill>
             <a:srgbClr val="EDEDDD"/>
@@ -4334,17 +4350,19 @@
       </p:sp>
       <p:sp>
         <p:nvSpPr>
-          <p:cNvPr id="12" name="Rectangle 11"/>
+          <p:cNvPr id="12" name="Rounded Rectangle 11"/>
           <p:cNvSpPr/>
           <p:nvPr/>
         </p:nvSpPr>
         <p:spPr>
           <a:xfrm>
-            <a:off x="6080760" y="3063240"/>
-            <a:ext cx="4526280" cy="73152"/>
-          </a:xfrm>
-          <a:prstGeom prst="rect">
-            <a:avLst/>
+            <a:off x="7772400" y="3264408"/>
+            <a:ext cx="1143000" cy="73152"/>
+          </a:xfrm>
+          <a:prstGeom prst="roundRect">
+            <a:avLst>
+              <a:gd name="adj" fmla="val 50000"/>
+            </a:avLst>
           </a:prstGeom>
           <a:solidFill>
             <a:srgbClr val="2E2E2A"/>
@@ -4456,7 +4474,7 @@
       </p:sp>
       <p:sp>
         <p:nvSpPr>
-          <p:cNvPr id="15" name="Rectangle 14"/>
+          <p:cNvPr id="15" name="Rounded Rectangle 14"/>
           <p:cNvSpPr/>
           <p:nvPr/>
         </p:nvSpPr>
@@ -4465,8 +4483,10 @@
             <a:off x="1280160" y="5257800"/>
             <a:ext cx="4526280" cy="2011680"/>
           </a:xfrm>
-          <a:prstGeom prst="rect">
-            <a:avLst/>
+          <a:prstGeom prst="roundRect">
+            <a:avLst>
+              <a:gd name="adj" fmla="val 10909"/>
+            </a:avLst>
           </a:prstGeom>
           <a:solidFill>
             <a:srgbClr val="E5E4DF"/>
@@ -4500,7 +4520,7 @@
       </p:sp>
       <p:sp>
         <p:nvSpPr>
-          <p:cNvPr id="16" name="Rectangle 15"/>
+          <p:cNvPr id="16" name="Rounded Rectangle 15"/>
           <p:cNvSpPr/>
           <p:nvPr/>
         </p:nvSpPr>
@@ -4509,8 +4529,10 @@
             <a:off x="1291133" y="5268773"/>
             <a:ext cx="4504334" cy="1989734"/>
           </a:xfrm>
-          <a:prstGeom prst="rect">
-            <a:avLst/>
+          <a:prstGeom prst="roundRect">
+            <a:avLst>
+              <a:gd name="adj" fmla="val 10477"/>
+            </a:avLst>
           </a:prstGeom>
           <a:solidFill>
             <a:srgbClr val="FFFFFF"/>
@@ -4544,17 +4566,19 @@
       </p:sp>
       <p:sp>
         <p:nvSpPr>
-          <p:cNvPr id="17" name="Rectangle 16"/>
+          <p:cNvPr id="17" name="Rounded Rectangle 16"/>
           <p:cNvSpPr/>
           <p:nvPr/>
         </p:nvSpPr>
         <p:spPr>
           <a:xfrm>
-            <a:off x="1280160" y="5257800"/>
-            <a:ext cx="4526280" cy="73152"/>
-          </a:xfrm>
-          <a:prstGeom prst="rect">
-            <a:avLst/>
+            <a:off x="2971800" y="5458968"/>
+            <a:ext cx="1143000" cy="73152"/>
+          </a:xfrm>
+          <a:prstGeom prst="roundRect">
+            <a:avLst>
+              <a:gd name="adj" fmla="val 50000"/>
+            </a:avLst>
           </a:prstGeom>
           <a:solidFill>
             <a:srgbClr val="2E2E2A"/>
@@ -4666,7 +4690,7 @@
       </p:sp>
       <p:sp>
         <p:nvSpPr>
-          <p:cNvPr id="20" name="Rectangle 19"/>
+          <p:cNvPr id="20" name="Rounded Rectangle 19"/>
           <p:cNvSpPr/>
           <p:nvPr/>
         </p:nvSpPr>
@@ -4675,8 +4699,10 @@
             <a:off x="6080760" y="5257800"/>
             <a:ext cx="4526280" cy="2011680"/>
           </a:xfrm>
-          <a:prstGeom prst="rect">
-            <a:avLst/>
+          <a:prstGeom prst="roundRect">
+            <a:avLst>
+              <a:gd name="adj" fmla="val 10909"/>
+            </a:avLst>
           </a:prstGeom>
           <a:solidFill>
             <a:srgbClr val="E5E4DF"/>
@@ -4710,7 +4736,7 @@
       </p:sp>
       <p:sp>
         <p:nvSpPr>
-          <p:cNvPr id="21" name="Rectangle 20"/>
+          <p:cNvPr id="21" name="Rounded Rectangle 20"/>
           <p:cNvSpPr/>
           <p:nvPr/>
         </p:nvSpPr>
@@ -4719,8 +4745,10 @@
             <a:off x="6091733" y="5268773"/>
             <a:ext cx="4504334" cy="1989734"/>
           </a:xfrm>
-          <a:prstGeom prst="rect">
-            <a:avLst/>
+          <a:prstGeom prst="roundRect">
+            <a:avLst>
+              <a:gd name="adj" fmla="val 10477"/>
+            </a:avLst>
           </a:prstGeom>
           <a:solidFill>
             <a:srgbClr val="EDEDDD"/>
@@ -4754,17 +4782,19 @@
       </p:sp>
       <p:sp>
         <p:nvSpPr>
-          <p:cNvPr id="22" name="Rectangle 21"/>
+          <p:cNvPr id="22" name="Rounded Rectangle 21"/>
           <p:cNvSpPr/>
           <p:nvPr/>
         </p:nvSpPr>
         <p:spPr>
           <a:xfrm>
-            <a:off x="6080760" y="5257800"/>
-            <a:ext cx="4526280" cy="73152"/>
-          </a:xfrm>
-          <a:prstGeom prst="rect">
-            <a:avLst/>
+            <a:off x="7772400" y="5458968"/>
+            <a:ext cx="1143000" cy="73152"/>
+          </a:xfrm>
+          <a:prstGeom prst="roundRect">
+            <a:avLst>
+              <a:gd name="adj" fmla="val 50000"/>
+            </a:avLst>
           </a:prstGeom>
           <a:solidFill>
             <a:srgbClr val="2E2E2A"/>
@@ -4876,7 +4906,7 @@
       </p:sp>
       <p:sp>
         <p:nvSpPr>
-          <p:cNvPr id="25" name="Rectangle 24"/>
+          <p:cNvPr id="25" name="Rounded Rectangle 24"/>
           <p:cNvSpPr/>
           <p:nvPr/>
         </p:nvSpPr>
@@ -4885,8 +4915,10 @@
             <a:off x="1280160" y="7498080"/>
             <a:ext cx="15727680" cy="1280160"/>
           </a:xfrm>
-          <a:prstGeom prst="rect">
-            <a:avLst/>
+          <a:prstGeom prst="roundRect">
+            <a:avLst>
+              <a:gd name="adj" fmla="val 17142"/>
+            </a:avLst>
           </a:prstGeom>
           <a:solidFill>
             <a:srgbClr val="E5E4DF"/>
@@ -5144,7 +5176,7 @@
       </p:sp>
       <p:sp>
         <p:nvSpPr>
-          <p:cNvPr id="4" name="Rectangle 3"/>
+          <p:cNvPr id="4" name="Rounded Rectangle 3"/>
           <p:cNvSpPr/>
           <p:nvPr/>
         </p:nvSpPr>
@@ -5153,8 +5185,10 @@
             <a:off x="1280160" y="3749040"/>
             <a:ext cx="2377440" cy="2377440"/>
           </a:xfrm>
-          <a:prstGeom prst="rect">
-            <a:avLst/>
+          <a:prstGeom prst="roundRect">
+            <a:avLst>
+              <a:gd name="adj" fmla="val 9230"/>
+            </a:avLst>
           </a:prstGeom>
           <a:solidFill>
             <a:srgbClr val="E5E4DF"/>
@@ -5188,7 +5222,7 @@
       </p:sp>
       <p:sp>
         <p:nvSpPr>
-          <p:cNvPr id="5" name="Rectangle 4"/>
+          <p:cNvPr id="5" name="Rounded Rectangle 4"/>
           <p:cNvSpPr/>
           <p:nvPr/>
         </p:nvSpPr>
@@ -5197,8 +5231,10 @@
             <a:off x="1291133" y="3760013"/>
             <a:ext cx="2355494" cy="2355494"/>
           </a:xfrm>
-          <a:prstGeom prst="rect">
-            <a:avLst/>
+          <a:prstGeom prst="roundRect">
+            <a:avLst>
+              <a:gd name="adj" fmla="val 8850"/>
+            </a:avLst>
           </a:prstGeom>
           <a:solidFill>
             <a:srgbClr val="FFFFFF"/>
@@ -5232,17 +5268,19 @@
       </p:sp>
       <p:sp>
         <p:nvSpPr>
-          <p:cNvPr id="6" name="Rectangle 5"/>
+          <p:cNvPr id="6" name="Rounded Rectangle 5"/>
           <p:cNvSpPr/>
           <p:nvPr/>
         </p:nvSpPr>
         <p:spPr>
           <a:xfrm>
-            <a:off x="1280160" y="3749040"/>
-            <a:ext cx="2377440" cy="73152"/>
-          </a:xfrm>
-          <a:prstGeom prst="rect">
-            <a:avLst/>
+            <a:off x="2064715" y="3950208"/>
+            <a:ext cx="808330" cy="73152"/>
+          </a:xfrm>
+          <a:prstGeom prst="roundRect">
+            <a:avLst>
+              <a:gd name="adj" fmla="val 50000"/>
+            </a:avLst>
           </a:prstGeom>
           <a:solidFill>
             <a:srgbClr val="2E2E2A"/>
@@ -5331,16 +5369,16 @@
       </p:sp>
       <p:sp>
         <p:nvSpPr>
-          <p:cNvPr id="8" name="Rectangle 7"/>
+          <p:cNvPr id="8" name="Oval 7"/>
           <p:cNvSpPr/>
           <p:nvPr/>
         </p:nvSpPr>
         <p:spPr>
           <a:xfrm>
-            <a:off x="3749040" y="4910328"/>
-            <a:ext cx="219456" cy="45720"/>
-          </a:xfrm>
-          <a:prstGeom prst="rect">
+            <a:off x="3785616" y="4855464"/>
+            <a:ext cx="146304" cy="146304"/>
+          </a:xfrm>
+          <a:prstGeom prst="ellipse">
             <a:avLst/>
           </a:prstGeom>
           <a:solidFill>
@@ -5375,7 +5413,7 @@
       </p:sp>
       <p:sp>
         <p:nvSpPr>
-          <p:cNvPr id="9" name="Rectangle 8"/>
+          <p:cNvPr id="9" name="Rounded Rectangle 8"/>
           <p:cNvSpPr/>
           <p:nvPr/>
         </p:nvSpPr>
@@ -5384,8 +5422,10 @@
             <a:off x="4059936" y="3749040"/>
             <a:ext cx="2377440" cy="2377440"/>
           </a:xfrm>
-          <a:prstGeom prst="rect">
-            <a:avLst/>
+          <a:prstGeom prst="roundRect">
+            <a:avLst>
+              <a:gd name="adj" fmla="val 9230"/>
+            </a:avLst>
           </a:prstGeom>
           <a:solidFill>
             <a:srgbClr val="E5E4DF"/>
@@ -5419,7 +5459,7 @@
       </p:sp>
       <p:sp>
         <p:nvSpPr>
-          <p:cNvPr id="10" name="Rectangle 9"/>
+          <p:cNvPr id="10" name="Rounded Rectangle 9"/>
           <p:cNvSpPr/>
           <p:nvPr/>
         </p:nvSpPr>
@@ -5428,8 +5468,10 @@
             <a:off x="4070909" y="3760013"/>
             <a:ext cx="2355494" cy="2355494"/>
           </a:xfrm>
-          <a:prstGeom prst="rect">
-            <a:avLst/>
+          <a:prstGeom prst="roundRect">
+            <a:avLst>
+              <a:gd name="adj" fmla="val 8850"/>
+            </a:avLst>
           </a:prstGeom>
           <a:solidFill>
             <a:srgbClr val="EDEDDD"/>
@@ -5463,17 +5505,19 @@
       </p:sp>
       <p:sp>
         <p:nvSpPr>
-          <p:cNvPr id="11" name="Rectangle 10"/>
+          <p:cNvPr id="11" name="Rounded Rectangle 10"/>
           <p:cNvSpPr/>
           <p:nvPr/>
         </p:nvSpPr>
         <p:spPr>
           <a:xfrm>
-            <a:off x="4059936" y="3749040"/>
-            <a:ext cx="2377440" cy="73152"/>
-          </a:xfrm>
-          <a:prstGeom prst="rect">
-            <a:avLst/>
+            <a:off x="4844491" y="3950208"/>
+            <a:ext cx="808330" cy="73152"/>
+          </a:xfrm>
+          <a:prstGeom prst="roundRect">
+            <a:avLst>
+              <a:gd name="adj" fmla="val 50000"/>
+            </a:avLst>
           </a:prstGeom>
           <a:solidFill>
             <a:srgbClr val="2E2E2A"/>
@@ -5562,16 +5606,16 @@
       </p:sp>
       <p:sp>
         <p:nvSpPr>
-          <p:cNvPr id="13" name="Rectangle 12"/>
+          <p:cNvPr id="13" name="Oval 12"/>
           <p:cNvSpPr/>
           <p:nvPr/>
         </p:nvSpPr>
         <p:spPr>
           <a:xfrm>
-            <a:off x="6528816" y="4910328"/>
-            <a:ext cx="219456" cy="45720"/>
-          </a:xfrm>
-          <a:prstGeom prst="rect">
+            <a:off x="6565392" y="4855464"/>
+            <a:ext cx="146304" cy="146304"/>
+          </a:xfrm>
+          <a:prstGeom prst="ellipse">
             <a:avLst/>
           </a:prstGeom>
           <a:solidFill>
@@ -5606,7 +5650,7 @@
       </p:sp>
       <p:sp>
         <p:nvSpPr>
-          <p:cNvPr id="14" name="Rectangle 13"/>
+          <p:cNvPr id="14" name="Rounded Rectangle 13"/>
           <p:cNvSpPr/>
           <p:nvPr/>
         </p:nvSpPr>
@@ -5615,8 +5659,10 @@
             <a:off x="6839712" y="3749040"/>
             <a:ext cx="2377440" cy="2377440"/>
           </a:xfrm>
-          <a:prstGeom prst="rect">
-            <a:avLst/>
+          <a:prstGeom prst="roundRect">
+            <a:avLst>
+              <a:gd name="adj" fmla="val 9230"/>
+            </a:avLst>
           </a:prstGeom>
           <a:solidFill>
             <a:srgbClr val="E5E4DF"/>
@@ -5650,7 +5696,7 @@
       </p:sp>
       <p:sp>
         <p:nvSpPr>
-          <p:cNvPr id="15" name="Rectangle 14"/>
+          <p:cNvPr id="15" name="Rounded Rectangle 14"/>
           <p:cNvSpPr/>
           <p:nvPr/>
         </p:nvSpPr>
@@ -5659,8 +5705,10 @@
             <a:off x="6850685" y="3760013"/>
             <a:ext cx="2355494" cy="2355494"/>
           </a:xfrm>
-          <a:prstGeom prst="rect">
-            <a:avLst/>
+          <a:prstGeom prst="roundRect">
+            <a:avLst>
+              <a:gd name="adj" fmla="val 8850"/>
+            </a:avLst>
           </a:prstGeom>
           <a:solidFill>
             <a:srgbClr val="FFFFFF"/>
@@ -5694,17 +5742,19 @@
       </p:sp>
       <p:sp>
         <p:nvSpPr>
-          <p:cNvPr id="16" name="Rectangle 15"/>
+          <p:cNvPr id="16" name="Rounded Rectangle 15"/>
           <p:cNvSpPr/>
           <p:nvPr/>
         </p:nvSpPr>
         <p:spPr>
           <a:xfrm>
-            <a:off x="6839712" y="3749040"/>
-            <a:ext cx="2377440" cy="73152"/>
-          </a:xfrm>
-          <a:prstGeom prst="rect">
-            <a:avLst/>
+            <a:off x="7624267" y="3950208"/>
+            <a:ext cx="808330" cy="73152"/>
+          </a:xfrm>
+          <a:prstGeom prst="roundRect">
+            <a:avLst>
+              <a:gd name="adj" fmla="val 50000"/>
+            </a:avLst>
           </a:prstGeom>
           <a:solidFill>
             <a:srgbClr val="2E2E2A"/>
@@ -5793,16 +5843,16 @@
       </p:sp>
       <p:sp>
         <p:nvSpPr>
-          <p:cNvPr id="18" name="Rectangle 17"/>
+          <p:cNvPr id="18" name="Oval 17"/>
           <p:cNvSpPr/>
           <p:nvPr/>
         </p:nvSpPr>
         <p:spPr>
           <a:xfrm>
-            <a:off x="9308592" y="4910328"/>
-            <a:ext cx="219456" cy="45720"/>
-          </a:xfrm>
-          <a:prstGeom prst="rect">
+            <a:off x="9345168" y="4855464"/>
+            <a:ext cx="146304" cy="146304"/>
+          </a:xfrm>
+          <a:prstGeom prst="ellipse">
             <a:avLst/>
           </a:prstGeom>
           <a:solidFill>
@@ -5837,7 +5887,7 @@
       </p:sp>
       <p:sp>
         <p:nvSpPr>
-          <p:cNvPr id="19" name="Rectangle 18"/>
+          <p:cNvPr id="19" name="Rounded Rectangle 18"/>
           <p:cNvSpPr/>
           <p:nvPr/>
         </p:nvSpPr>
@@ -5846,8 +5896,10 @@
             <a:off x="9619488" y="3749040"/>
             <a:ext cx="2377440" cy="2377440"/>
           </a:xfrm>
-          <a:prstGeom prst="rect">
-            <a:avLst/>
+          <a:prstGeom prst="roundRect">
+            <a:avLst>
+              <a:gd name="adj" fmla="val 9230"/>
+            </a:avLst>
           </a:prstGeom>
           <a:solidFill>
             <a:srgbClr val="E5E4DF"/>
@@ -5881,7 +5933,7 @@
       </p:sp>
       <p:sp>
         <p:nvSpPr>
-          <p:cNvPr id="20" name="Rectangle 19"/>
+          <p:cNvPr id="20" name="Rounded Rectangle 19"/>
           <p:cNvSpPr/>
           <p:nvPr/>
         </p:nvSpPr>
@@ -5890,8 +5942,10 @@
             <a:off x="9630461" y="3760013"/>
             <a:ext cx="2355494" cy="2355494"/>
           </a:xfrm>
-          <a:prstGeom prst="rect">
-            <a:avLst/>
+          <a:prstGeom prst="roundRect">
+            <a:avLst>
+              <a:gd name="adj" fmla="val 8850"/>
+            </a:avLst>
           </a:prstGeom>
           <a:solidFill>
             <a:srgbClr val="EDEDDD"/>
@@ -5925,17 +5979,19 @@
       </p:sp>
       <p:sp>
         <p:nvSpPr>
-          <p:cNvPr id="21" name="Rectangle 20"/>
+          <p:cNvPr id="21" name="Rounded Rectangle 20"/>
           <p:cNvSpPr/>
           <p:nvPr/>
         </p:nvSpPr>
         <p:spPr>
           <a:xfrm>
-            <a:off x="9619488" y="3749040"/>
-            <a:ext cx="2377440" cy="73152"/>
-          </a:xfrm>
-          <a:prstGeom prst="rect">
-            <a:avLst/>
+            <a:off x="10404043" y="3950208"/>
+            <a:ext cx="808330" cy="73152"/>
+          </a:xfrm>
+          <a:prstGeom prst="roundRect">
+            <a:avLst>
+              <a:gd name="adj" fmla="val 50000"/>
+            </a:avLst>
           </a:prstGeom>
           <a:solidFill>
             <a:srgbClr val="2E2E2A"/>
@@ -6024,16 +6080,16 @@
       </p:sp>
       <p:sp>
         <p:nvSpPr>
-          <p:cNvPr id="23" name="Rectangle 22"/>
+          <p:cNvPr id="23" name="Oval 22"/>
           <p:cNvSpPr/>
           <p:nvPr/>
         </p:nvSpPr>
         <p:spPr>
           <a:xfrm>
-            <a:off x="12088368" y="4910328"/>
-            <a:ext cx="219456" cy="45720"/>
-          </a:xfrm>
-          <a:prstGeom prst="rect">
+            <a:off x="12124944" y="4855464"/>
+            <a:ext cx="146304" cy="146304"/>
+          </a:xfrm>
+          <a:prstGeom prst="ellipse">
             <a:avLst/>
           </a:prstGeom>
           <a:solidFill>
@@ -6068,7 +6124,7 @@
       </p:sp>
       <p:sp>
         <p:nvSpPr>
-          <p:cNvPr id="24" name="Rectangle 23"/>
+          <p:cNvPr id="24" name="Rounded Rectangle 23"/>
           <p:cNvSpPr/>
           <p:nvPr/>
         </p:nvSpPr>
@@ -6077,8 +6133,10 @@
             <a:off x="12399264" y="3749040"/>
             <a:ext cx="2377440" cy="2377440"/>
           </a:xfrm>
-          <a:prstGeom prst="rect">
-            <a:avLst/>
+          <a:prstGeom prst="roundRect">
+            <a:avLst>
+              <a:gd name="adj" fmla="val 9230"/>
+            </a:avLst>
           </a:prstGeom>
           <a:solidFill>
             <a:srgbClr val="E5E4DF"/>
@@ -6112,7 +6170,7 @@
       </p:sp>
       <p:sp>
         <p:nvSpPr>
-          <p:cNvPr id="25" name="Rectangle 24"/>
+          <p:cNvPr id="25" name="Rounded Rectangle 24"/>
           <p:cNvSpPr/>
           <p:nvPr/>
         </p:nvSpPr>
@@ -6121,8 +6179,10 @@
             <a:off x="12410237" y="3760013"/>
             <a:ext cx="2355494" cy="2355494"/>
           </a:xfrm>
-          <a:prstGeom prst="rect">
-            <a:avLst/>
+          <a:prstGeom prst="roundRect">
+            <a:avLst>
+              <a:gd name="adj" fmla="val 8850"/>
+            </a:avLst>
           </a:prstGeom>
           <a:solidFill>
             <a:srgbClr val="FFFFFF"/>
@@ -6156,17 +6216,19 @@
       </p:sp>
       <p:sp>
         <p:nvSpPr>
-          <p:cNvPr id="26" name="Rectangle 25"/>
+          <p:cNvPr id="26" name="Rounded Rectangle 25"/>
           <p:cNvSpPr/>
           <p:nvPr/>
         </p:nvSpPr>
         <p:spPr>
           <a:xfrm>
-            <a:off x="12399264" y="3749040"/>
-            <a:ext cx="2377440" cy="73152"/>
-          </a:xfrm>
-          <a:prstGeom prst="rect">
-            <a:avLst/>
+            <a:off x="13183819" y="3950208"/>
+            <a:ext cx="808330" cy="73152"/>
+          </a:xfrm>
+          <a:prstGeom prst="roundRect">
+            <a:avLst>
+              <a:gd name="adj" fmla="val 50000"/>
+            </a:avLst>
           </a:prstGeom>
           <a:solidFill>
             <a:srgbClr val="2E2E2A"/>
@@ -6239,16 +6301,16 @@
       </p:sp>
       <p:sp>
         <p:nvSpPr>
-          <p:cNvPr id="28" name="Rectangle 27"/>
+          <p:cNvPr id="28" name="Oval 27"/>
           <p:cNvSpPr/>
           <p:nvPr/>
         </p:nvSpPr>
         <p:spPr>
           <a:xfrm>
-            <a:off x="14868144" y="4910328"/>
-            <a:ext cx="219456" cy="45720"/>
-          </a:xfrm>
-          <a:prstGeom prst="rect">
+            <a:off x="14904720" y="4855464"/>
+            <a:ext cx="146304" cy="146304"/>
+          </a:xfrm>
+          <a:prstGeom prst="ellipse">
             <a:avLst/>
           </a:prstGeom>
           <a:solidFill>
@@ -6283,7 +6345,7 @@
       </p:sp>
       <p:sp>
         <p:nvSpPr>
-          <p:cNvPr id="29" name="Rectangle 28"/>
+          <p:cNvPr id="29" name="Rounded Rectangle 28"/>
           <p:cNvSpPr/>
           <p:nvPr/>
         </p:nvSpPr>
@@ -6292,8 +6354,10 @@
             <a:off x="15179040" y="3749040"/>
             <a:ext cx="2377440" cy="2377440"/>
           </a:xfrm>
-          <a:prstGeom prst="rect">
-            <a:avLst/>
+          <a:prstGeom prst="roundRect">
+            <a:avLst>
+              <a:gd name="adj" fmla="val 9230"/>
+            </a:avLst>
           </a:prstGeom>
           <a:solidFill>
             <a:srgbClr val="2E2E2A"/>
@@ -6382,7 +6446,7 @@
       </p:sp>
       <p:sp>
         <p:nvSpPr>
-          <p:cNvPr id="31" name="Rectangle 30"/>
+          <p:cNvPr id="31" name="Rounded Rectangle 30"/>
           <p:cNvSpPr/>
           <p:nvPr/>
         </p:nvSpPr>
@@ -6391,8 +6455,10 @@
             <a:off x="1280160" y="6949440"/>
             <a:ext cx="15727680" cy="1371600"/>
           </a:xfrm>
-          <a:prstGeom prst="rect">
-            <a:avLst/>
+          <a:prstGeom prst="roundRect">
+            <a:avLst>
+              <a:gd name="adj" fmla="val 16000"/>
+            </a:avLst>
           </a:prstGeom>
           <a:solidFill>
             <a:srgbClr val="E5E4DF"/>
@@ -6698,7 +6764,7 @@
       </p:sp>
       <p:sp>
         <p:nvSpPr>
-          <p:cNvPr id="6" name="Rectangle 5"/>
+          <p:cNvPr id="6" name="Rounded Rectangle 5"/>
           <p:cNvSpPr/>
           <p:nvPr/>
         </p:nvSpPr>
@@ -6707,8 +6773,10 @@
             <a:off x="1536192" y="3520440"/>
             <a:ext cx="1691640" cy="73152"/>
           </a:xfrm>
-          <a:prstGeom prst="rect">
-            <a:avLst/>
+          <a:prstGeom prst="roundRect">
+            <a:avLst>
+              <a:gd name="adj" fmla="val 50000"/>
+            </a:avLst>
           </a:prstGeom>
           <a:solidFill>
             <a:srgbClr val="2E2E2A"/>
@@ -7038,7 +7106,7 @@
       </p:sp>
       <p:sp>
         <p:nvSpPr>
-          <p:cNvPr id="5" name="Rectangle 4"/>
+          <p:cNvPr id="5" name="Rounded Rectangle 4"/>
           <p:cNvSpPr/>
           <p:nvPr/>
         </p:nvSpPr>
@@ -7047,8 +7115,10 @@
             <a:off x="1280160" y="4617720"/>
             <a:ext cx="1463040" cy="64008"/>
           </a:xfrm>
-          <a:prstGeom prst="rect">
-            <a:avLst/>
+          <a:prstGeom prst="roundRect">
+            <a:avLst>
+              <a:gd name="adj" fmla="val 50000"/>
+            </a:avLst>
           </a:prstGeom>
           <a:solidFill>
             <a:srgbClr val="2E2E2A"/>
@@ -7100,14 +7170,16 @@
             <a:off x="9692640" y="1691640"/>
             <a:ext cx="7315200" cy="6949440"/>
           </a:xfrm>
-          <a:prstGeom prst="rect">
-            <a:avLst/>
+          <a:prstGeom prst="roundRect">
+            <a:avLst>
+              <a:gd name="adj" fmla="val 4736"/>
+            </a:avLst>
           </a:prstGeom>
         </p:spPr>
       </p:pic>
       <p:sp>
         <p:nvSpPr>
-          <p:cNvPr id="7" name="Rectangle 6"/>
+          <p:cNvPr id="7" name="Rounded Rectangle 6"/>
           <p:cNvSpPr/>
           <p:nvPr/>
         </p:nvSpPr>
@@ -7116,8 +7188,10 @@
             <a:off x="1280160" y="5120640"/>
             <a:ext cx="7863840" cy="3520440"/>
           </a:xfrm>
-          <a:prstGeom prst="rect">
-            <a:avLst/>
+          <a:prstGeom prst="roundRect">
+            <a:avLst>
+              <a:gd name="adj" fmla="val 6233"/>
+            </a:avLst>
           </a:prstGeom>
           <a:solidFill>
             <a:srgbClr val="E5E4DF"/>
@@ -7151,7 +7225,7 @@
       </p:sp>
       <p:sp>
         <p:nvSpPr>
-          <p:cNvPr id="8" name="Rectangle 7"/>
+          <p:cNvPr id="8" name="Rounded Rectangle 7"/>
           <p:cNvSpPr/>
           <p:nvPr/>
         </p:nvSpPr>
@@ -7160,8 +7234,10 @@
             <a:off x="1291133" y="5131613"/>
             <a:ext cx="7841894" cy="3498494"/>
           </a:xfrm>
-          <a:prstGeom prst="rect">
-            <a:avLst/>
+          <a:prstGeom prst="roundRect">
+            <a:avLst>
+              <a:gd name="adj" fmla="val 5959"/>
+            </a:avLst>
           </a:prstGeom>
           <a:solidFill>
             <a:srgbClr val="FFFFFF"/>
@@ -7195,17 +7271,19 @@
       </p:sp>
       <p:sp>
         <p:nvSpPr>
-          <p:cNvPr id="9" name="Rectangle 8"/>
+          <p:cNvPr id="9" name="Rounded Rectangle 8"/>
           <p:cNvSpPr/>
           <p:nvPr/>
         </p:nvSpPr>
         <p:spPr>
           <a:xfrm>
-            <a:off x="1280160" y="5120640"/>
-            <a:ext cx="82296" cy="3520440"/>
-          </a:xfrm>
-          <a:prstGeom prst="rect">
-            <a:avLst/>
+            <a:off x="1291133" y="5340096"/>
+            <a:ext cx="91440" cy="3081528"/>
+          </a:xfrm>
+          <a:prstGeom prst="roundRect">
+            <a:avLst>
+              <a:gd name="adj" fmla="val 50000"/>
+            </a:avLst>
           </a:prstGeom>
           <a:solidFill>
             <a:srgbClr val="2E2E2A"/>
@@ -7520,14 +7598,16 @@
             <a:off x="12435840" y="3063240"/>
             <a:ext cx="4572000" cy="5623560"/>
           </a:xfrm>
-          <a:prstGeom prst="rect">
-            <a:avLst/>
+          <a:prstGeom prst="roundRect">
+            <a:avLst>
+              <a:gd name="adj" fmla="val 7199"/>
+            </a:avLst>
           </a:prstGeom>
         </p:spPr>
       </p:pic>
       <p:sp>
         <p:nvSpPr>
-          <p:cNvPr id="5" name="Rectangle 4"/>
+          <p:cNvPr id="5" name="Rounded Rectangle 4"/>
           <p:cNvSpPr/>
           <p:nvPr/>
         </p:nvSpPr>
@@ -7536,8 +7616,10 @@
             <a:off x="1280160" y="3063240"/>
             <a:ext cx="3749040" cy="2651760"/>
           </a:xfrm>
-          <a:prstGeom prst="rect">
-            <a:avLst/>
+          <a:prstGeom prst="roundRect">
+            <a:avLst>
+              <a:gd name="adj" fmla="val 8275"/>
+            </a:avLst>
           </a:prstGeom>
           <a:solidFill>
             <a:srgbClr val="E5E4DF"/>
@@ -7571,7 +7653,7 @@
       </p:sp>
       <p:sp>
         <p:nvSpPr>
-          <p:cNvPr id="6" name="Rectangle 5"/>
+          <p:cNvPr id="6" name="Rounded Rectangle 5"/>
           <p:cNvSpPr/>
           <p:nvPr/>
         </p:nvSpPr>
@@ -7580,8 +7662,10 @@
             <a:off x="1291133" y="3074213"/>
             <a:ext cx="3727094" cy="2629814"/>
           </a:xfrm>
-          <a:prstGeom prst="rect">
-            <a:avLst/>
+          <a:prstGeom prst="roundRect">
+            <a:avLst>
+              <a:gd name="adj" fmla="val 7927"/>
+            </a:avLst>
           </a:prstGeom>
           <a:solidFill>
             <a:srgbClr val="FFFFFF"/>
@@ -7615,17 +7699,19 @@
       </p:sp>
       <p:sp>
         <p:nvSpPr>
-          <p:cNvPr id="7" name="Rectangle 6"/>
+          <p:cNvPr id="7" name="Rounded Rectangle 6"/>
           <p:cNvSpPr/>
           <p:nvPr/>
         </p:nvSpPr>
         <p:spPr>
           <a:xfrm>
-            <a:off x="1280160" y="3063240"/>
-            <a:ext cx="3749040" cy="73152"/>
-          </a:xfrm>
-          <a:prstGeom prst="rect">
-            <a:avLst/>
+            <a:off x="2583180" y="3264408"/>
+            <a:ext cx="1143000" cy="73152"/>
+          </a:xfrm>
+          <a:prstGeom prst="roundRect">
+            <a:avLst>
+              <a:gd name="adj" fmla="val 50000"/>
+            </a:avLst>
           </a:prstGeom>
           <a:solidFill>
             <a:srgbClr val="2E2E2A"/>
@@ -7737,7 +7823,7 @@
       </p:sp>
       <p:sp>
         <p:nvSpPr>
-          <p:cNvPr id="10" name="Rectangle 9"/>
+          <p:cNvPr id="10" name="Rounded Rectangle 9"/>
           <p:cNvSpPr/>
           <p:nvPr/>
         </p:nvSpPr>
@@ -7746,8 +7832,10 @@
             <a:off x="8229600" y="3063240"/>
             <a:ext cx="3749040" cy="2651760"/>
           </a:xfrm>
-          <a:prstGeom prst="rect">
-            <a:avLst/>
+          <a:prstGeom prst="roundRect">
+            <a:avLst>
+              <a:gd name="adj" fmla="val 8275"/>
+            </a:avLst>
           </a:prstGeom>
           <a:solidFill>
             <a:srgbClr val="E5E4DF"/>
@@ -7781,7 +7869,7 @@
       </p:sp>
       <p:sp>
         <p:nvSpPr>
-          <p:cNvPr id="11" name="Rectangle 10"/>
+          <p:cNvPr id="11" name="Rounded Rectangle 10"/>
           <p:cNvSpPr/>
           <p:nvPr/>
         </p:nvSpPr>
@@ -7790,8 +7878,10 @@
             <a:off x="8240573" y="3074213"/>
             <a:ext cx="3727094" cy="2629814"/>
           </a:xfrm>
-          <a:prstGeom prst="rect">
-            <a:avLst/>
+          <a:prstGeom prst="roundRect">
+            <a:avLst>
+              <a:gd name="adj" fmla="val 7927"/>
+            </a:avLst>
           </a:prstGeom>
           <a:solidFill>
             <a:srgbClr val="EDEDDD"/>
@@ -7825,17 +7915,19 @@
       </p:sp>
       <p:sp>
         <p:nvSpPr>
-          <p:cNvPr id="12" name="Rectangle 11"/>
+          <p:cNvPr id="12" name="Rounded Rectangle 11"/>
           <p:cNvSpPr/>
           <p:nvPr/>
         </p:nvSpPr>
         <p:spPr>
           <a:xfrm>
-            <a:off x="8229600" y="3063240"/>
-            <a:ext cx="3749040" cy="73152"/>
-          </a:xfrm>
-          <a:prstGeom prst="rect">
-            <a:avLst/>
+            <a:off x="9532620" y="3264408"/>
+            <a:ext cx="1143000" cy="73152"/>
+          </a:xfrm>
+          <a:prstGeom prst="roundRect">
+            <a:avLst>
+              <a:gd name="adj" fmla="val 50000"/>
+            </a:avLst>
           </a:prstGeom>
           <a:solidFill>
             <a:srgbClr val="2E2E2A"/>
@@ -7947,7 +8039,7 @@
       </p:sp>
       <p:sp>
         <p:nvSpPr>
-          <p:cNvPr id="15" name="Rectangle 14"/>
+          <p:cNvPr id="15" name="Rounded Rectangle 14"/>
           <p:cNvSpPr/>
           <p:nvPr/>
         </p:nvSpPr>
@@ -7956,8 +8048,10 @@
             <a:off x="1280160" y="6035040"/>
             <a:ext cx="3749040" cy="2651760"/>
           </a:xfrm>
-          <a:prstGeom prst="rect">
-            <a:avLst/>
+          <a:prstGeom prst="roundRect">
+            <a:avLst>
+              <a:gd name="adj" fmla="val 8275"/>
+            </a:avLst>
           </a:prstGeom>
           <a:solidFill>
             <a:srgbClr val="E5E4DF"/>
@@ -7991,7 +8085,7 @@
       </p:sp>
       <p:sp>
         <p:nvSpPr>
-          <p:cNvPr id="16" name="Rectangle 15"/>
+          <p:cNvPr id="16" name="Rounded Rectangle 15"/>
           <p:cNvSpPr/>
           <p:nvPr/>
         </p:nvSpPr>
@@ -8000,8 +8094,10 @@
             <a:off x="1291133" y="6046013"/>
             <a:ext cx="3727094" cy="2629814"/>
           </a:xfrm>
-          <a:prstGeom prst="rect">
-            <a:avLst/>
+          <a:prstGeom prst="roundRect">
+            <a:avLst>
+              <a:gd name="adj" fmla="val 7927"/>
+            </a:avLst>
           </a:prstGeom>
           <a:solidFill>
             <a:srgbClr val="FFFFFF"/>
@@ -8035,17 +8131,19 @@
       </p:sp>
       <p:sp>
         <p:nvSpPr>
-          <p:cNvPr id="17" name="Rectangle 16"/>
+          <p:cNvPr id="17" name="Rounded Rectangle 16"/>
           <p:cNvSpPr/>
           <p:nvPr/>
         </p:nvSpPr>
         <p:spPr>
           <a:xfrm>
-            <a:off x="1280160" y="6035040"/>
-            <a:ext cx="3749040" cy="73152"/>
-          </a:xfrm>
-          <a:prstGeom prst="rect">
-            <a:avLst/>
+            <a:off x="2583180" y="6236208"/>
+            <a:ext cx="1143000" cy="73152"/>
+          </a:xfrm>
+          <a:prstGeom prst="roundRect">
+            <a:avLst>
+              <a:gd name="adj" fmla="val 50000"/>
+            </a:avLst>
           </a:prstGeom>
           <a:solidFill>
             <a:srgbClr val="2E2E2A"/>
@@ -8157,7 +8255,7 @@
       </p:sp>
       <p:sp>
         <p:nvSpPr>
-          <p:cNvPr id="20" name="Rectangle 19"/>
+          <p:cNvPr id="20" name="Rounded Rectangle 19"/>
           <p:cNvSpPr/>
           <p:nvPr/>
         </p:nvSpPr>
@@ -8166,8 +8264,10 @@
             <a:off x="8229600" y="6035040"/>
             <a:ext cx="3749040" cy="2651760"/>
           </a:xfrm>
-          <a:prstGeom prst="rect">
-            <a:avLst/>
+          <a:prstGeom prst="roundRect">
+            <a:avLst>
+              <a:gd name="adj" fmla="val 8275"/>
+            </a:avLst>
           </a:prstGeom>
           <a:solidFill>
             <a:srgbClr val="E5E4DF"/>
@@ -8201,7 +8301,7 @@
       </p:sp>
       <p:sp>
         <p:nvSpPr>
-          <p:cNvPr id="21" name="Rectangle 20"/>
+          <p:cNvPr id="21" name="Rounded Rectangle 20"/>
           <p:cNvSpPr/>
           <p:nvPr/>
         </p:nvSpPr>
@@ -8210,8 +8310,10 @@
             <a:off x="8240573" y="6046013"/>
             <a:ext cx="3727094" cy="2629814"/>
           </a:xfrm>
-          <a:prstGeom prst="rect">
-            <a:avLst/>
+          <a:prstGeom prst="roundRect">
+            <a:avLst>
+              <a:gd name="adj" fmla="val 7927"/>
+            </a:avLst>
           </a:prstGeom>
           <a:solidFill>
             <a:srgbClr val="EDEDDD"/>
@@ -8245,17 +8347,19 @@
       </p:sp>
       <p:sp>
         <p:nvSpPr>
-          <p:cNvPr id="22" name="Rectangle 21"/>
+          <p:cNvPr id="22" name="Rounded Rectangle 21"/>
           <p:cNvSpPr/>
           <p:nvPr/>
         </p:nvSpPr>
         <p:spPr>
           <a:xfrm>
-            <a:off x="8229600" y="6035040"/>
-            <a:ext cx="3749040" cy="73152"/>
-          </a:xfrm>
-          <a:prstGeom prst="rect">
-            <a:avLst/>
+            <a:off x="9532620" y="6236208"/>
+            <a:ext cx="1143000" cy="73152"/>
+          </a:xfrm>
+          <a:prstGeom prst="roundRect">
+            <a:avLst>
+              <a:gd name="adj" fmla="val 50000"/>
+            </a:avLst>
           </a:prstGeom>
           <a:solidFill>
             <a:srgbClr val="2E2E2A"/>
@@ -8367,16 +8471,16 @@
       </p:sp>
       <p:sp>
         <p:nvSpPr>
-          <p:cNvPr id="25" name="Rectangle 24"/>
+          <p:cNvPr id="25" name="Oval 24"/>
           <p:cNvSpPr/>
           <p:nvPr/>
         </p:nvSpPr>
         <p:spPr>
           <a:xfrm>
-            <a:off x="5394960" y="4434840"/>
-            <a:ext cx="2468880" cy="2651760"/>
-          </a:xfrm>
-          <a:prstGeom prst="rect">
+            <a:off x="5230368" y="4480560"/>
+            <a:ext cx="2788920" cy="2788920"/>
+          </a:xfrm>
+          <a:prstGeom prst="ellipse">
             <a:avLst/>
           </a:prstGeom>
           <a:solidFill>
@@ -8417,8 +8521,8 @@
         </p:nvSpPr>
         <p:spPr>
           <a:xfrm>
-            <a:off x="5486400" y="4434840"/>
-            <a:ext cx="2286000" cy="2651760"/>
+            <a:off x="5321808" y="4480560"/>
+            <a:ext cx="2606040" cy="2788920"/>
           </a:xfrm>
           <a:prstGeom prst="rect">
             <a:avLst/>
@@ -8756,14 +8860,16 @@
             <a:off x="1280160" y="5166360"/>
             <a:ext cx="15727680" cy="2423160"/>
           </a:xfrm>
-          <a:prstGeom prst="rect">
-            <a:avLst/>
+          <a:prstGeom prst="roundRect">
+            <a:avLst>
+              <a:gd name="adj" fmla="val 13584"/>
+            </a:avLst>
           </a:prstGeom>
         </p:spPr>
       </p:pic>
       <p:sp>
         <p:nvSpPr>
-          <p:cNvPr id="6" name="Rectangle 5"/>
+          <p:cNvPr id="6" name="Rounded Rectangle 5"/>
           <p:cNvSpPr/>
           <p:nvPr/>
         </p:nvSpPr>
@@ -8772,8 +8878,10 @@
             <a:off x="1280160" y="7818120"/>
             <a:ext cx="15727680" cy="1234440"/>
           </a:xfrm>
-          <a:prstGeom prst="rect">
-            <a:avLst/>
+          <a:prstGeom prst="roundRect">
+            <a:avLst>
+              <a:gd name="adj" fmla="val 17777"/>
+            </a:avLst>
           </a:prstGeom>
           <a:solidFill>
             <a:srgbClr val="E5E4DF"/>
@@ -8807,7 +8915,7 @@
       </p:sp>
       <p:sp>
         <p:nvSpPr>
-          <p:cNvPr id="7" name="Rectangle 6"/>
+          <p:cNvPr id="7" name="Rounded Rectangle 6"/>
           <p:cNvSpPr/>
           <p:nvPr/>
         </p:nvSpPr>
@@ -8816,8 +8924,10 @@
             <a:off x="1291133" y="7829093"/>
             <a:ext cx="15705734" cy="1212494"/>
           </a:xfrm>
-          <a:prstGeom prst="rect">
-            <a:avLst/>
+          <a:prstGeom prst="roundRect">
+            <a:avLst>
+              <a:gd name="adj" fmla="val 17194"/>
+            </a:avLst>
           </a:prstGeom>
           <a:solidFill>
             <a:srgbClr val="EDEDDD"/>
@@ -8851,17 +8961,19 @@
       </p:sp>
       <p:sp>
         <p:nvSpPr>
-          <p:cNvPr id="8" name="Rectangle 7"/>
+          <p:cNvPr id="8" name="Rounded Rectangle 7"/>
           <p:cNvSpPr/>
           <p:nvPr/>
         </p:nvSpPr>
         <p:spPr>
           <a:xfrm>
-            <a:off x="1280160" y="7818120"/>
-            <a:ext cx="82296" cy="1234440"/>
-          </a:xfrm>
-          <a:prstGeom prst="rect">
-            <a:avLst/>
+            <a:off x="1291133" y="8037576"/>
+            <a:ext cx="91440" cy="795528"/>
+          </a:xfrm>
+          <a:prstGeom prst="roundRect">
+            <a:avLst>
+              <a:gd name="adj" fmla="val 50000"/>
+            </a:avLst>
           </a:prstGeom>
           <a:solidFill>
             <a:srgbClr val="2E2E2A"/>
@@ -9119,7 +9231,7 @@
       </p:sp>
       <p:sp>
         <p:nvSpPr>
-          <p:cNvPr id="4" name="Rectangle 3"/>
+          <p:cNvPr id="4" name="Rounded Rectangle 3"/>
           <p:cNvSpPr/>
           <p:nvPr/>
         </p:nvSpPr>
@@ -9128,8 +9240,10 @@
             <a:off x="1280160" y="3063240"/>
             <a:ext cx="4526280" cy="2331720"/>
           </a:xfrm>
-          <a:prstGeom prst="rect">
-            <a:avLst/>
+          <a:prstGeom prst="roundRect">
+            <a:avLst>
+              <a:gd name="adj" fmla="val 9411"/>
+            </a:avLst>
           </a:prstGeom>
           <a:solidFill>
             <a:srgbClr val="E5E4DF"/>
@@ -9163,7 +9277,7 @@
       </p:sp>
       <p:sp>
         <p:nvSpPr>
-          <p:cNvPr id="5" name="Rectangle 4"/>
+          <p:cNvPr id="5" name="Rounded Rectangle 4"/>
           <p:cNvSpPr/>
           <p:nvPr/>
         </p:nvSpPr>
@@ -9172,8 +9286,10 @@
             <a:off x="1291133" y="3074213"/>
             <a:ext cx="4504334" cy="2309774"/>
           </a:xfrm>
-          <a:prstGeom prst="rect">
-            <a:avLst/>
+          <a:prstGeom prst="roundRect">
+            <a:avLst>
+              <a:gd name="adj" fmla="val 9026"/>
+            </a:avLst>
           </a:prstGeom>
           <a:solidFill>
             <a:srgbClr val="FFFFFF"/>
@@ -9207,17 +9323,19 @@
       </p:sp>
       <p:sp>
         <p:nvSpPr>
-          <p:cNvPr id="6" name="Rectangle 5"/>
+          <p:cNvPr id="6" name="Rounded Rectangle 5"/>
           <p:cNvSpPr/>
           <p:nvPr/>
         </p:nvSpPr>
         <p:spPr>
           <a:xfrm>
-            <a:off x="1280160" y="3063240"/>
-            <a:ext cx="4526280" cy="73152"/>
-          </a:xfrm>
-          <a:prstGeom prst="rect">
-            <a:avLst/>
+            <a:off x="2971800" y="3264408"/>
+            <a:ext cx="1143000" cy="73152"/>
+          </a:xfrm>
+          <a:prstGeom prst="roundRect">
+            <a:avLst>
+              <a:gd name="adj" fmla="val 50000"/>
+            </a:avLst>
           </a:prstGeom>
           <a:solidFill>
             <a:srgbClr val="2E2E2A"/>
@@ -9329,7 +9447,7 @@
       </p:sp>
       <p:sp>
         <p:nvSpPr>
-          <p:cNvPr id="9" name="Rectangle 8"/>
+          <p:cNvPr id="9" name="Rounded Rectangle 8"/>
           <p:cNvSpPr/>
           <p:nvPr/>
         </p:nvSpPr>
@@ -9338,8 +9456,10 @@
             <a:off x="12481560" y="3063240"/>
             <a:ext cx="4526280" cy="2331720"/>
           </a:xfrm>
-          <a:prstGeom prst="rect">
-            <a:avLst/>
+          <a:prstGeom prst="roundRect">
+            <a:avLst>
+              <a:gd name="adj" fmla="val 9411"/>
+            </a:avLst>
           </a:prstGeom>
           <a:solidFill>
             <a:srgbClr val="E5E4DF"/>
@@ -9373,7 +9493,7 @@
       </p:sp>
       <p:sp>
         <p:nvSpPr>
-          <p:cNvPr id="10" name="Rectangle 9"/>
+          <p:cNvPr id="10" name="Rounded Rectangle 9"/>
           <p:cNvSpPr/>
           <p:nvPr/>
         </p:nvSpPr>
@@ -9382,8 +9502,10 @@
             <a:off x="12492533" y="3074213"/>
             <a:ext cx="4504334" cy="2309774"/>
           </a:xfrm>
-          <a:prstGeom prst="rect">
-            <a:avLst/>
+          <a:prstGeom prst="roundRect">
+            <a:avLst>
+              <a:gd name="adj" fmla="val 9026"/>
+            </a:avLst>
           </a:prstGeom>
           <a:solidFill>
             <a:srgbClr val="EDEDDD"/>
@@ -9417,17 +9539,19 @@
       </p:sp>
       <p:sp>
         <p:nvSpPr>
-          <p:cNvPr id="11" name="Rectangle 10"/>
+          <p:cNvPr id="11" name="Rounded Rectangle 10"/>
           <p:cNvSpPr/>
           <p:nvPr/>
         </p:nvSpPr>
         <p:spPr>
           <a:xfrm>
-            <a:off x="12481560" y="3063240"/>
-            <a:ext cx="4526280" cy="73152"/>
-          </a:xfrm>
-          <a:prstGeom prst="rect">
-            <a:avLst/>
+            <a:off x="14173200" y="3264408"/>
+            <a:ext cx="1143000" cy="73152"/>
+          </a:xfrm>
+          <a:prstGeom prst="roundRect">
+            <a:avLst>
+              <a:gd name="adj" fmla="val 50000"/>
+            </a:avLst>
           </a:prstGeom>
           <a:solidFill>
             <a:srgbClr val="2E2E2A"/>
@@ -9539,7 +9663,7 @@
       </p:sp>
       <p:sp>
         <p:nvSpPr>
-          <p:cNvPr id="14" name="Rectangle 13"/>
+          <p:cNvPr id="14" name="Rounded Rectangle 13"/>
           <p:cNvSpPr/>
           <p:nvPr/>
         </p:nvSpPr>
@@ -9548,8 +9672,10 @@
             <a:off x="1280160" y="5669280"/>
             <a:ext cx="4526280" cy="2331720"/>
           </a:xfrm>
-          <a:prstGeom prst="rect">
-            <a:avLst/>
+          <a:prstGeom prst="roundRect">
+            <a:avLst>
+              <a:gd name="adj" fmla="val 9411"/>
+            </a:avLst>
           </a:prstGeom>
           <a:solidFill>
             <a:srgbClr val="E5E4DF"/>
@@ -9583,7 +9709,7 @@
       </p:sp>
       <p:sp>
         <p:nvSpPr>
-          <p:cNvPr id="15" name="Rectangle 14"/>
+          <p:cNvPr id="15" name="Rounded Rectangle 14"/>
           <p:cNvSpPr/>
           <p:nvPr/>
         </p:nvSpPr>
@@ -9592,8 +9718,10 @@
             <a:off x="1291133" y="5680253"/>
             <a:ext cx="4504334" cy="2309774"/>
           </a:xfrm>
-          <a:prstGeom prst="rect">
-            <a:avLst/>
+          <a:prstGeom prst="roundRect">
+            <a:avLst>
+              <a:gd name="adj" fmla="val 9026"/>
+            </a:avLst>
           </a:prstGeom>
           <a:solidFill>
             <a:srgbClr val="FFFFFF"/>
@@ -9627,17 +9755,19 @@
       </p:sp>
       <p:sp>
         <p:nvSpPr>
-          <p:cNvPr id="16" name="Rectangle 15"/>
+          <p:cNvPr id="16" name="Rounded Rectangle 15"/>
           <p:cNvSpPr/>
           <p:nvPr/>
         </p:nvSpPr>
         <p:spPr>
           <a:xfrm>
-            <a:off x="1280160" y="5669280"/>
-            <a:ext cx="4526280" cy="73152"/>
-          </a:xfrm>
-          <a:prstGeom prst="rect">
-            <a:avLst/>
+            <a:off x="2971800" y="5870448"/>
+            <a:ext cx="1143000" cy="73152"/>
+          </a:xfrm>
+          <a:prstGeom prst="roundRect">
+            <a:avLst>
+              <a:gd name="adj" fmla="val 50000"/>
+            </a:avLst>
           </a:prstGeom>
           <a:solidFill>
             <a:srgbClr val="2E2E2A"/>
@@ -9749,7 +9879,7 @@
       </p:sp>
       <p:sp>
         <p:nvSpPr>
-          <p:cNvPr id="19" name="Rectangle 18"/>
+          <p:cNvPr id="19" name="Rounded Rectangle 18"/>
           <p:cNvSpPr/>
           <p:nvPr/>
         </p:nvSpPr>
@@ -9758,8 +9888,10 @@
             <a:off x="12481560" y="5669280"/>
             <a:ext cx="4526280" cy="2331720"/>
           </a:xfrm>
-          <a:prstGeom prst="rect">
-            <a:avLst/>
+          <a:prstGeom prst="roundRect">
+            <a:avLst>
+              <a:gd name="adj" fmla="val 9411"/>
+            </a:avLst>
           </a:prstGeom>
           <a:solidFill>
             <a:srgbClr val="E5E4DF"/>
@@ -9793,7 +9925,7 @@
       </p:sp>
       <p:sp>
         <p:nvSpPr>
-          <p:cNvPr id="20" name="Rectangle 19"/>
+          <p:cNvPr id="20" name="Rounded Rectangle 19"/>
           <p:cNvSpPr/>
           <p:nvPr/>
         </p:nvSpPr>
@@ -9802,8 +9934,10 @@
             <a:off x="12492533" y="5680253"/>
             <a:ext cx="4504334" cy="2309774"/>
           </a:xfrm>
-          <a:prstGeom prst="rect">
-            <a:avLst/>
+          <a:prstGeom prst="roundRect">
+            <a:avLst>
+              <a:gd name="adj" fmla="val 9026"/>
+            </a:avLst>
           </a:prstGeom>
           <a:solidFill>
             <a:srgbClr val="EDEDDD"/>
@@ -9837,17 +9971,19 @@
       </p:sp>
       <p:sp>
         <p:nvSpPr>
-          <p:cNvPr id="21" name="Rectangle 20"/>
+          <p:cNvPr id="21" name="Rounded Rectangle 20"/>
           <p:cNvSpPr/>
           <p:nvPr/>
         </p:nvSpPr>
         <p:spPr>
           <a:xfrm>
-            <a:off x="12481560" y="5669280"/>
-            <a:ext cx="4526280" cy="73152"/>
-          </a:xfrm>
-          <a:prstGeom prst="rect">
-            <a:avLst/>
+            <a:off x="14173200" y="5870448"/>
+            <a:ext cx="1143000" cy="73152"/>
+          </a:xfrm>
+          <a:prstGeom prst="roundRect">
+            <a:avLst>
+              <a:gd name="adj" fmla="val 50000"/>
+            </a:avLst>
           </a:prstGeom>
           <a:solidFill>
             <a:srgbClr val="2E2E2A"/>
@@ -9959,16 +10095,16 @@
       </p:sp>
       <p:sp>
         <p:nvSpPr>
-          <p:cNvPr id="24" name="Rectangle 23"/>
+          <p:cNvPr id="24" name="Oval 23"/>
           <p:cNvSpPr/>
           <p:nvPr/>
         </p:nvSpPr>
         <p:spPr>
           <a:xfrm>
-            <a:off x="6720840" y="3931920"/>
-            <a:ext cx="4846320" cy="3246120"/>
-          </a:xfrm>
-          <a:prstGeom prst="rect">
+            <a:off x="7178040" y="3611880"/>
+            <a:ext cx="3931920" cy="3931920"/>
+          </a:xfrm>
+          <a:prstGeom prst="ellipse">
             <a:avLst/>
           </a:prstGeom>
           <a:solidFill>
@@ -10009,8 +10145,8 @@
         </p:nvSpPr>
         <p:spPr>
           <a:xfrm>
-            <a:off x="6903720" y="3931920"/>
-            <a:ext cx="4480560" cy="3246120"/>
+            <a:off x="7360920" y="3611880"/>
+            <a:ext cx="3566160" cy="3931920"/>
           </a:xfrm>
           <a:prstGeom prst="rect">
             <a:avLst/>
@@ -10029,7 +10165,7 @@
               </a:lnSpc>
             </a:pPr>
             <a:r>
-              <a:rPr sz="2600" b="1" i="0">
+              <a:rPr sz="2400" b="1" i="0">
                 <a:solidFill>
                   <a:srgbClr val="FFFFFF"/>
                 </a:solidFill>
@@ -10042,17 +10178,19 @@
       </p:sp>
       <p:sp>
         <p:nvSpPr>
-          <p:cNvPr id="26" name="Rectangle 25"/>
+          <p:cNvPr id="26" name="Rounded Rectangle 25"/>
           <p:cNvSpPr/>
           <p:nvPr/>
         </p:nvSpPr>
         <p:spPr>
           <a:xfrm>
             <a:off x="5806440" y="4206240"/>
-            <a:ext cx="914400" cy="36576"/>
-          </a:xfrm>
-          <a:prstGeom prst="rect">
-            <a:avLst/>
+            <a:ext cx="1463040" cy="45720"/>
+          </a:xfrm>
+          <a:prstGeom prst="roundRect">
+            <a:avLst>
+              <a:gd name="adj" fmla="val 50000"/>
+            </a:avLst>
           </a:prstGeom>
           <a:solidFill>
             <a:srgbClr val="DCDBD5"/>
@@ -10086,17 +10224,19 @@
       </p:sp>
       <p:sp>
         <p:nvSpPr>
-          <p:cNvPr id="27" name="Rectangle 26"/>
+          <p:cNvPr id="27" name="Rounded Rectangle 26"/>
           <p:cNvSpPr/>
           <p:nvPr/>
         </p:nvSpPr>
         <p:spPr>
           <a:xfrm>
-            <a:off x="11567160" y="4206240"/>
-            <a:ext cx="914400" cy="36576"/>
-          </a:xfrm>
-          <a:prstGeom prst="rect">
-            <a:avLst/>
+            <a:off x="11018520" y="4206240"/>
+            <a:ext cx="1463040" cy="45720"/>
+          </a:xfrm>
+          <a:prstGeom prst="roundRect">
+            <a:avLst>
+              <a:gd name="adj" fmla="val 50000"/>
+            </a:avLst>
           </a:prstGeom>
           <a:solidFill>
             <a:srgbClr val="DCDBD5"/>
@@ -10130,17 +10270,19 @@
       </p:sp>
       <p:sp>
         <p:nvSpPr>
-          <p:cNvPr id="28" name="Rectangle 27"/>
+          <p:cNvPr id="28" name="Rounded Rectangle 27"/>
           <p:cNvSpPr/>
           <p:nvPr/>
         </p:nvSpPr>
         <p:spPr>
           <a:xfrm>
             <a:off x="5806440" y="6812280"/>
-            <a:ext cx="914400" cy="36576"/>
-          </a:xfrm>
-          <a:prstGeom prst="rect">
-            <a:avLst/>
+            <a:ext cx="1463040" cy="45720"/>
+          </a:xfrm>
+          <a:prstGeom prst="roundRect">
+            <a:avLst>
+              <a:gd name="adj" fmla="val 50000"/>
+            </a:avLst>
           </a:prstGeom>
           <a:solidFill>
             <a:srgbClr val="DCDBD5"/>
@@ -10174,17 +10316,19 @@
       </p:sp>
       <p:sp>
         <p:nvSpPr>
-          <p:cNvPr id="29" name="Rectangle 28"/>
+          <p:cNvPr id="29" name="Rounded Rectangle 28"/>
           <p:cNvSpPr/>
           <p:nvPr/>
         </p:nvSpPr>
         <p:spPr>
           <a:xfrm>
-            <a:off x="11567160" y="6812280"/>
-            <a:ext cx="914400" cy="36576"/>
-          </a:xfrm>
-          <a:prstGeom prst="rect">
-            <a:avLst/>
+            <a:off x="11018520" y="6812280"/>
+            <a:ext cx="1463040" cy="45720"/>
+          </a:xfrm>
+          <a:prstGeom prst="roundRect">
+            <a:avLst>
+              <a:gd name="adj" fmla="val 50000"/>
+            </a:avLst>
           </a:prstGeom>
           <a:solidFill>
             <a:srgbClr val="DCDBD5"/>
@@ -10218,7 +10362,7 @@
       </p:sp>
       <p:sp>
         <p:nvSpPr>
-          <p:cNvPr id="30" name="Rectangle 29"/>
+          <p:cNvPr id="30" name="Rounded Rectangle 29"/>
           <p:cNvSpPr/>
           <p:nvPr/>
         </p:nvSpPr>
@@ -10227,8 +10371,10 @@
             <a:off x="1280160" y="8229600"/>
             <a:ext cx="15727680" cy="960120"/>
           </a:xfrm>
-          <a:prstGeom prst="rect">
-            <a:avLst/>
+          <a:prstGeom prst="roundRect">
+            <a:avLst>
+              <a:gd name="adj" fmla="val 22857"/>
+            </a:avLst>
           </a:prstGeom>
           <a:solidFill>
             <a:srgbClr val="E5E4DF"/>
@@ -10486,7 +10632,7 @@
       </p:sp>
       <p:sp>
         <p:nvSpPr>
-          <p:cNvPr id="4" name="Rectangle 3"/>
+          <p:cNvPr id="4" name="Rounded Rectangle 3"/>
           <p:cNvSpPr/>
           <p:nvPr/>
         </p:nvSpPr>
@@ -10495,8 +10641,10 @@
             <a:off x="1280160" y="2788920"/>
             <a:ext cx="15727680" cy="2148840"/>
           </a:xfrm>
-          <a:prstGeom prst="rect">
-            <a:avLst/>
+          <a:prstGeom prst="roundRect">
+            <a:avLst>
+              <a:gd name="adj" fmla="val 10212"/>
+            </a:avLst>
           </a:prstGeom>
           <a:solidFill>
             <a:srgbClr val="E5E4DF"/>
@@ -10585,7 +10733,7 @@
       </p:sp>
       <p:sp>
         <p:nvSpPr>
-          <p:cNvPr id="6" name="Rectangle 5"/>
+          <p:cNvPr id="6" name="Rounded Rectangle 5"/>
           <p:cNvSpPr/>
           <p:nvPr/>
         </p:nvSpPr>
@@ -10594,8 +10742,10 @@
             <a:off x="1280160" y="5394960"/>
             <a:ext cx="3685032" cy="3337560"/>
           </a:xfrm>
-          <a:prstGeom prst="rect">
-            <a:avLst/>
+          <a:prstGeom prst="roundRect">
+            <a:avLst>
+              <a:gd name="adj" fmla="val 6575"/>
+            </a:avLst>
           </a:prstGeom>
           <a:solidFill>
             <a:srgbClr val="E5E4DF"/>
@@ -10629,7 +10779,7 @@
       </p:sp>
       <p:sp>
         <p:nvSpPr>
-          <p:cNvPr id="7" name="Rectangle 6"/>
+          <p:cNvPr id="7" name="Rounded Rectangle 6"/>
           <p:cNvSpPr/>
           <p:nvPr/>
         </p:nvSpPr>
@@ -10638,8 +10788,10 @@
             <a:off x="1291133" y="5405933"/>
             <a:ext cx="3663086" cy="3315614"/>
           </a:xfrm>
-          <a:prstGeom prst="rect">
-            <a:avLst/>
+          <a:prstGeom prst="roundRect">
+            <a:avLst>
+              <a:gd name="adj" fmla="val 6287"/>
+            </a:avLst>
           </a:prstGeom>
           <a:solidFill>
             <a:srgbClr val="FFFFFF"/>
@@ -10673,17 +10825,19 @@
       </p:sp>
       <p:sp>
         <p:nvSpPr>
-          <p:cNvPr id="8" name="Rectangle 7"/>
+          <p:cNvPr id="8" name="Rounded Rectangle 7"/>
           <p:cNvSpPr/>
           <p:nvPr/>
         </p:nvSpPr>
         <p:spPr>
           <a:xfrm>
-            <a:off x="1280160" y="5394960"/>
-            <a:ext cx="3685032" cy="73152"/>
-          </a:xfrm>
-          <a:prstGeom prst="rect">
-            <a:avLst/>
+            <a:off x="2551176" y="5596128"/>
+            <a:ext cx="1143000" cy="73152"/>
+          </a:xfrm>
+          <a:prstGeom prst="roundRect">
+            <a:avLst>
+              <a:gd name="adj" fmla="val 50000"/>
+            </a:avLst>
           </a:prstGeom>
           <a:solidFill>
             <a:srgbClr val="2E2E2A"/>
@@ -10795,7 +10949,7 @@
       </p:sp>
       <p:sp>
         <p:nvSpPr>
-          <p:cNvPr id="11" name="Rectangle 10"/>
+          <p:cNvPr id="11" name="Rounded Rectangle 10"/>
           <p:cNvSpPr/>
           <p:nvPr/>
         </p:nvSpPr>
@@ -10804,8 +10958,10 @@
             <a:off x="5230368" y="5394960"/>
             <a:ext cx="3685032" cy="3337560"/>
           </a:xfrm>
-          <a:prstGeom prst="rect">
-            <a:avLst/>
+          <a:prstGeom prst="roundRect">
+            <a:avLst>
+              <a:gd name="adj" fmla="val 6575"/>
+            </a:avLst>
           </a:prstGeom>
           <a:solidFill>
             <a:srgbClr val="E5E4DF"/>
@@ -10839,7 +10995,7 @@
       </p:sp>
       <p:sp>
         <p:nvSpPr>
-          <p:cNvPr id="12" name="Rectangle 11"/>
+          <p:cNvPr id="12" name="Rounded Rectangle 11"/>
           <p:cNvSpPr/>
           <p:nvPr/>
         </p:nvSpPr>
@@ -10848,8 +11004,10 @@
             <a:off x="5241341" y="5405933"/>
             <a:ext cx="3663086" cy="3315614"/>
           </a:xfrm>
-          <a:prstGeom prst="rect">
-            <a:avLst/>
+          <a:prstGeom prst="roundRect">
+            <a:avLst>
+              <a:gd name="adj" fmla="val 6287"/>
+            </a:avLst>
           </a:prstGeom>
           <a:solidFill>
             <a:srgbClr val="EDEDDD"/>
@@ -10883,17 +11041,19 @@
       </p:sp>
       <p:sp>
         <p:nvSpPr>
-          <p:cNvPr id="13" name="Rectangle 12"/>
+          <p:cNvPr id="13" name="Rounded Rectangle 12"/>
           <p:cNvSpPr/>
           <p:nvPr/>
         </p:nvSpPr>
         <p:spPr>
           <a:xfrm>
-            <a:off x="5230368" y="5394960"/>
-            <a:ext cx="3685032" cy="73152"/>
-          </a:xfrm>
-          <a:prstGeom prst="rect">
-            <a:avLst/>
+            <a:off x="6501384" y="5596128"/>
+            <a:ext cx="1143000" cy="73152"/>
+          </a:xfrm>
+          <a:prstGeom prst="roundRect">
+            <a:avLst>
+              <a:gd name="adj" fmla="val 50000"/>
+            </a:avLst>
           </a:prstGeom>
           <a:solidFill>
             <a:srgbClr val="2E2E2A"/>
@@ -11005,7 +11165,7 @@
       </p:sp>
       <p:sp>
         <p:nvSpPr>
-          <p:cNvPr id="16" name="Rectangle 15"/>
+          <p:cNvPr id="16" name="Rounded Rectangle 15"/>
           <p:cNvSpPr/>
           <p:nvPr/>
         </p:nvSpPr>
@@ -11014,8 +11174,10 @@
             <a:off x="9180576" y="5394960"/>
             <a:ext cx="3685032" cy="3337560"/>
           </a:xfrm>
-          <a:prstGeom prst="rect">
-            <a:avLst/>
+          <a:prstGeom prst="roundRect">
+            <a:avLst>
+              <a:gd name="adj" fmla="val 6575"/>
+            </a:avLst>
           </a:prstGeom>
           <a:solidFill>
             <a:srgbClr val="E5E4DF"/>
@@ -11049,7 +11211,7 @@
       </p:sp>
       <p:sp>
         <p:nvSpPr>
-          <p:cNvPr id="17" name="Rectangle 16"/>
+          <p:cNvPr id="17" name="Rounded Rectangle 16"/>
           <p:cNvSpPr/>
           <p:nvPr/>
         </p:nvSpPr>
@@ -11058,8 +11220,10 @@
             <a:off x="9191549" y="5405933"/>
             <a:ext cx="3663086" cy="3315614"/>
           </a:xfrm>
-          <a:prstGeom prst="rect">
-            <a:avLst/>
+          <a:prstGeom prst="roundRect">
+            <a:avLst>
+              <a:gd name="adj" fmla="val 6287"/>
+            </a:avLst>
           </a:prstGeom>
           <a:solidFill>
             <a:srgbClr val="FFFFFF"/>
@@ -11093,17 +11257,19 @@
       </p:sp>
       <p:sp>
         <p:nvSpPr>
-          <p:cNvPr id="18" name="Rectangle 17"/>
+          <p:cNvPr id="18" name="Rounded Rectangle 17"/>
           <p:cNvSpPr/>
           <p:nvPr/>
         </p:nvSpPr>
         <p:spPr>
           <a:xfrm>
-            <a:off x="9180576" y="5394960"/>
-            <a:ext cx="3685032" cy="73152"/>
-          </a:xfrm>
-          <a:prstGeom prst="rect">
-            <a:avLst/>
+            <a:off x="10451592" y="5596128"/>
+            <a:ext cx="1143000" cy="73152"/>
+          </a:xfrm>
+          <a:prstGeom prst="roundRect">
+            <a:avLst>
+              <a:gd name="adj" fmla="val 50000"/>
+            </a:avLst>
           </a:prstGeom>
           <a:solidFill>
             <a:srgbClr val="2E2E2A"/>
@@ -11215,7 +11381,7 @@
       </p:sp>
       <p:sp>
         <p:nvSpPr>
-          <p:cNvPr id="21" name="Rectangle 20"/>
+          <p:cNvPr id="21" name="Rounded Rectangle 20"/>
           <p:cNvSpPr/>
           <p:nvPr/>
         </p:nvSpPr>
@@ -11224,8 +11390,10 @@
             <a:off x="13130784" y="5394960"/>
             <a:ext cx="3685032" cy="3337560"/>
           </a:xfrm>
-          <a:prstGeom prst="rect">
-            <a:avLst/>
+          <a:prstGeom prst="roundRect">
+            <a:avLst>
+              <a:gd name="adj" fmla="val 6575"/>
+            </a:avLst>
           </a:prstGeom>
           <a:solidFill>
             <a:srgbClr val="E5E4DF"/>
@@ -11259,7 +11427,7 @@
       </p:sp>
       <p:sp>
         <p:nvSpPr>
-          <p:cNvPr id="22" name="Rectangle 21"/>
+          <p:cNvPr id="22" name="Rounded Rectangle 21"/>
           <p:cNvSpPr/>
           <p:nvPr/>
         </p:nvSpPr>
@@ -11268,8 +11436,10 @@
             <a:off x="13141757" y="5405933"/>
             <a:ext cx="3663086" cy="3315614"/>
           </a:xfrm>
-          <a:prstGeom prst="rect">
-            <a:avLst/>
+          <a:prstGeom prst="roundRect">
+            <a:avLst>
+              <a:gd name="adj" fmla="val 6287"/>
+            </a:avLst>
           </a:prstGeom>
           <a:solidFill>
             <a:srgbClr val="EDEDDD"/>
@@ -11303,17 +11473,19 @@
       </p:sp>
       <p:sp>
         <p:nvSpPr>
-          <p:cNvPr id="23" name="Rectangle 22"/>
+          <p:cNvPr id="23" name="Rounded Rectangle 22"/>
           <p:cNvSpPr/>
           <p:nvPr/>
         </p:nvSpPr>
         <p:spPr>
           <a:xfrm>
-            <a:off x="13130784" y="5394960"/>
-            <a:ext cx="3685032" cy="73152"/>
-          </a:xfrm>
-          <a:prstGeom prst="rect">
-            <a:avLst/>
+            <a:off x="14401800" y="5596128"/>
+            <a:ext cx="1143000" cy="73152"/>
+          </a:xfrm>
+          <a:prstGeom prst="roundRect">
+            <a:avLst>
+              <a:gd name="adj" fmla="val 50000"/>
+            </a:avLst>
           </a:prstGeom>
           <a:solidFill>
             <a:srgbClr val="2E2E2A"/>
@@ -11626,7 +11798,7 @@
       </p:sp>
       <p:sp>
         <p:nvSpPr>
-          <p:cNvPr id="4" name="Rectangle 3"/>
+          <p:cNvPr id="4" name="Rounded Rectangle 3"/>
           <p:cNvSpPr/>
           <p:nvPr/>
         </p:nvSpPr>
@@ -11635,8 +11807,10 @@
             <a:off x="1280160" y="3246120"/>
             <a:ext cx="15727680" cy="1417320"/>
           </a:xfrm>
-          <a:prstGeom prst="rect">
-            <a:avLst/>
+          <a:prstGeom prst="roundRect">
+            <a:avLst>
+              <a:gd name="adj" fmla="val 15483"/>
+            </a:avLst>
           </a:prstGeom>
           <a:solidFill>
             <a:srgbClr val="2E2E2A"/>
@@ -11748,17 +11922,19 @@
       </p:sp>
       <p:sp>
         <p:nvSpPr>
-          <p:cNvPr id="7" name="Rectangle 6"/>
+          <p:cNvPr id="7" name="Rounded Rectangle 6"/>
           <p:cNvSpPr/>
           <p:nvPr/>
         </p:nvSpPr>
         <p:spPr>
           <a:xfrm>
-            <a:off x="9125712" y="4663440"/>
-            <a:ext cx="36576" cy="320040"/>
-          </a:xfrm>
-          <a:prstGeom prst="rect">
-            <a:avLst/>
+            <a:off x="9116568" y="4663440"/>
+            <a:ext cx="54864" cy="365760"/>
+          </a:xfrm>
+          <a:prstGeom prst="roundRect">
+            <a:avLst>
+              <a:gd name="adj" fmla="val 50000"/>
+            </a:avLst>
           </a:prstGeom>
           <a:solidFill>
             <a:srgbClr val="2E2E2A"/>
@@ -11792,17 +11968,19 @@
       </p:sp>
       <p:sp>
         <p:nvSpPr>
-          <p:cNvPr id="8" name="Rectangle 7"/>
+          <p:cNvPr id="8" name="Rounded Rectangle 7"/>
           <p:cNvSpPr/>
           <p:nvPr/>
         </p:nvSpPr>
         <p:spPr>
           <a:xfrm>
-            <a:off x="4983480" y="4983480"/>
-            <a:ext cx="8321040" cy="36576"/>
-          </a:xfrm>
-          <a:prstGeom prst="rect">
-            <a:avLst/>
+            <a:off x="4983480" y="4974336"/>
+            <a:ext cx="8321040" cy="54864"/>
+          </a:xfrm>
+          <a:prstGeom prst="roundRect">
+            <a:avLst>
+              <a:gd name="adj" fmla="val 50000"/>
+            </a:avLst>
           </a:prstGeom>
           <a:solidFill>
             <a:srgbClr val="2E2E2A"/>
@@ -11836,17 +12014,19 @@
       </p:sp>
       <p:sp>
         <p:nvSpPr>
-          <p:cNvPr id="9" name="Rectangle 8"/>
+          <p:cNvPr id="9" name="Rounded Rectangle 8"/>
           <p:cNvSpPr/>
           <p:nvPr/>
         </p:nvSpPr>
         <p:spPr>
           <a:xfrm>
-            <a:off x="4983480" y="4983480"/>
-            <a:ext cx="36576" cy="320040"/>
-          </a:xfrm>
-          <a:prstGeom prst="rect">
-            <a:avLst/>
+            <a:off x="4983480" y="4974336"/>
+            <a:ext cx="54864" cy="347472"/>
+          </a:xfrm>
+          <a:prstGeom prst="roundRect">
+            <a:avLst>
+              <a:gd name="adj" fmla="val 50000"/>
+            </a:avLst>
           </a:prstGeom>
           <a:solidFill>
             <a:srgbClr val="2E2E2A"/>
@@ -11880,17 +12060,19 @@
       </p:sp>
       <p:sp>
         <p:nvSpPr>
-          <p:cNvPr id="10" name="Rectangle 9"/>
+          <p:cNvPr id="10" name="Rounded Rectangle 9"/>
           <p:cNvSpPr/>
           <p:nvPr/>
         </p:nvSpPr>
         <p:spPr>
           <a:xfrm>
-            <a:off x="13267944" y="4983480"/>
-            <a:ext cx="36576" cy="320040"/>
-          </a:xfrm>
-          <a:prstGeom prst="rect">
-            <a:avLst/>
+            <a:off x="13249656" y="4974336"/>
+            <a:ext cx="54864" cy="347472"/>
+          </a:xfrm>
+          <a:prstGeom prst="roundRect">
+            <a:avLst>
+              <a:gd name="adj" fmla="val 50000"/>
+            </a:avLst>
           </a:prstGeom>
           <a:solidFill>
             <a:srgbClr val="2E2E2A"/>
@@ -11924,7 +12106,7 @@
       </p:sp>
       <p:sp>
         <p:nvSpPr>
-          <p:cNvPr id="11" name="Rectangle 10"/>
+          <p:cNvPr id="11" name="Rounded Rectangle 10"/>
           <p:cNvSpPr/>
           <p:nvPr/>
         </p:nvSpPr>
@@ -11933,8 +12115,10 @@
             <a:off x="1280160" y="5440680"/>
             <a:ext cx="7680960" cy="2514600"/>
           </a:xfrm>
-          <a:prstGeom prst="rect">
-            <a:avLst/>
+          <a:prstGeom prst="roundRect">
+            <a:avLst>
+              <a:gd name="adj" fmla="val 8727"/>
+            </a:avLst>
           </a:prstGeom>
           <a:solidFill>
             <a:srgbClr val="E5E4DF"/>
@@ -11968,7 +12152,7 @@
       </p:sp>
       <p:sp>
         <p:nvSpPr>
-          <p:cNvPr id="12" name="Rectangle 11"/>
+          <p:cNvPr id="12" name="Rounded Rectangle 11"/>
           <p:cNvSpPr/>
           <p:nvPr/>
         </p:nvSpPr>
@@ -11977,8 +12161,10 @@
             <a:off x="1291133" y="5451653"/>
             <a:ext cx="7659014" cy="2492654"/>
           </a:xfrm>
-          <a:prstGeom prst="rect">
-            <a:avLst/>
+          <a:prstGeom prst="roundRect">
+            <a:avLst>
+              <a:gd name="adj" fmla="val 8363"/>
+            </a:avLst>
           </a:prstGeom>
           <a:solidFill>
             <a:srgbClr val="FFFFFF"/>
@@ -12012,17 +12198,19 @@
       </p:sp>
       <p:sp>
         <p:nvSpPr>
-          <p:cNvPr id="13" name="Rectangle 12"/>
+          <p:cNvPr id="13" name="Rounded Rectangle 12"/>
           <p:cNvSpPr/>
           <p:nvPr/>
         </p:nvSpPr>
         <p:spPr>
           <a:xfrm>
-            <a:off x="1280160" y="5440680"/>
-            <a:ext cx="7680960" cy="73152"/>
-          </a:xfrm>
-          <a:prstGeom prst="rect">
-            <a:avLst/>
+            <a:off x="4549140" y="5641848"/>
+            <a:ext cx="1143000" cy="73152"/>
+          </a:xfrm>
+          <a:prstGeom prst="roundRect">
+            <a:avLst>
+              <a:gd name="adj" fmla="val 50000"/>
+            </a:avLst>
           </a:prstGeom>
           <a:solidFill>
             <a:srgbClr val="2E2E2A"/>
@@ -12062,7 +12250,7 @@
         </p:nvSpPr>
         <p:spPr>
           <a:xfrm>
-            <a:off x="1691640" y="5760720"/>
+            <a:off x="1691640" y="5833872"/>
             <a:ext cx="6858000" cy="452628"/>
           </a:xfrm>
           <a:prstGeom prst="rect">
@@ -12173,7 +12361,7 @@
       </p:sp>
       <p:sp>
         <p:nvSpPr>
-          <p:cNvPr id="17" name="Rectangle 16"/>
+          <p:cNvPr id="17" name="Rounded Rectangle 16"/>
           <p:cNvSpPr/>
           <p:nvPr/>
         </p:nvSpPr>
@@ -12182,8 +12370,10 @@
             <a:off x="9326880" y="5440680"/>
             <a:ext cx="7680960" cy="2514600"/>
           </a:xfrm>
-          <a:prstGeom prst="rect">
-            <a:avLst/>
+          <a:prstGeom prst="roundRect">
+            <a:avLst>
+              <a:gd name="adj" fmla="val 8727"/>
+            </a:avLst>
           </a:prstGeom>
           <a:solidFill>
             <a:srgbClr val="E5E4DF"/>
@@ -12217,7 +12407,7 @@
       </p:sp>
       <p:sp>
         <p:nvSpPr>
-          <p:cNvPr id="18" name="Rectangle 17"/>
+          <p:cNvPr id="18" name="Rounded Rectangle 17"/>
           <p:cNvSpPr/>
           <p:nvPr/>
         </p:nvSpPr>
@@ -12226,8 +12416,10 @@
             <a:off x="9337853" y="5451653"/>
             <a:ext cx="7659014" cy="2492654"/>
           </a:xfrm>
-          <a:prstGeom prst="rect">
-            <a:avLst/>
+          <a:prstGeom prst="roundRect">
+            <a:avLst>
+              <a:gd name="adj" fmla="val 8363"/>
+            </a:avLst>
           </a:prstGeom>
           <a:solidFill>
             <a:srgbClr val="EDEDDD"/>
@@ -12261,17 +12453,19 @@
       </p:sp>
       <p:sp>
         <p:nvSpPr>
-          <p:cNvPr id="19" name="Rectangle 18"/>
+          <p:cNvPr id="19" name="Rounded Rectangle 18"/>
           <p:cNvSpPr/>
           <p:nvPr/>
         </p:nvSpPr>
         <p:spPr>
           <a:xfrm>
-            <a:off x="9326880" y="5440680"/>
-            <a:ext cx="7680960" cy="73152"/>
-          </a:xfrm>
-          <a:prstGeom prst="rect">
-            <a:avLst/>
+            <a:off x="12595860" y="5641848"/>
+            <a:ext cx="1143000" cy="73152"/>
+          </a:xfrm>
+          <a:prstGeom prst="roundRect">
+            <a:avLst>
+              <a:gd name="adj" fmla="val 50000"/>
+            </a:avLst>
           </a:prstGeom>
           <a:solidFill>
             <a:srgbClr val="2E2E2A"/>
@@ -12311,7 +12505,7 @@
         </p:nvSpPr>
         <p:spPr>
           <a:xfrm>
-            <a:off x="9738360" y="5760720"/>
+            <a:off x="9738360" y="5833872"/>
             <a:ext cx="6858000" cy="452628"/>
           </a:xfrm>
           <a:prstGeom prst="rect">
@@ -12422,7 +12616,7 @@
       </p:sp>
       <p:sp>
         <p:nvSpPr>
-          <p:cNvPr id="23" name="Rectangle 22"/>
+          <p:cNvPr id="23" name="Rounded Rectangle 22"/>
           <p:cNvSpPr/>
           <p:nvPr/>
         </p:nvSpPr>
@@ -12431,8 +12625,10 @@
             <a:off x="1280160" y="8229600"/>
             <a:ext cx="15727680" cy="1005840"/>
           </a:xfrm>
-          <a:prstGeom prst="rect">
-            <a:avLst/>
+          <a:prstGeom prst="roundRect">
+            <a:avLst>
+              <a:gd name="adj" fmla="val 21818"/>
+            </a:avLst>
           </a:prstGeom>
           <a:solidFill>
             <a:srgbClr val="E5E4DF"/>
@@ -12729,7 +12925,7 @@
       </p:sp>
       <p:sp>
         <p:nvSpPr>
-          <p:cNvPr id="5" name="Rectangle 4"/>
+          <p:cNvPr id="5" name="Rounded Rectangle 4"/>
           <p:cNvSpPr/>
           <p:nvPr/>
         </p:nvSpPr>
@@ -12738,8 +12934,10 @@
             <a:off x="1280160" y="5212080"/>
             <a:ext cx="15727680" cy="1417320"/>
           </a:xfrm>
-          <a:prstGeom prst="rect">
-            <a:avLst/>
+          <a:prstGeom prst="roundRect">
+            <a:avLst>
+              <a:gd name="adj" fmla="val 15483"/>
+            </a:avLst>
           </a:prstGeom>
           <a:solidFill>
             <a:srgbClr val="E5E4DF"/>
@@ -12773,7 +12971,7 @@
       </p:sp>
       <p:sp>
         <p:nvSpPr>
-          <p:cNvPr id="6" name="Rectangle 5"/>
+          <p:cNvPr id="6" name="Rounded Rectangle 5"/>
           <p:cNvSpPr/>
           <p:nvPr/>
         </p:nvSpPr>
@@ -12782,8 +12980,10 @@
             <a:off x="1291133" y="5223053"/>
             <a:ext cx="15705734" cy="1395374"/>
           </a:xfrm>
-          <a:prstGeom prst="rect">
-            <a:avLst/>
+          <a:prstGeom prst="roundRect">
+            <a:avLst>
+              <a:gd name="adj" fmla="val 14941"/>
+            </a:avLst>
           </a:prstGeom>
           <a:solidFill>
             <a:srgbClr val="FFFFFF"/>
@@ -12817,17 +13017,19 @@
       </p:sp>
       <p:sp>
         <p:nvSpPr>
-          <p:cNvPr id="7" name="Rectangle 6"/>
+          <p:cNvPr id="7" name="Rounded Rectangle 6"/>
           <p:cNvSpPr/>
           <p:nvPr/>
         </p:nvSpPr>
         <p:spPr>
           <a:xfrm>
-            <a:off x="1280160" y="5212080"/>
-            <a:ext cx="91440" cy="1417320"/>
-          </a:xfrm>
-          <a:prstGeom prst="rect">
-            <a:avLst/>
+            <a:off x="1291133" y="5431536"/>
+            <a:ext cx="91440" cy="978408"/>
+          </a:xfrm>
+          <a:prstGeom prst="roundRect">
+            <a:avLst>
+              <a:gd name="adj" fmla="val 50000"/>
+            </a:avLst>
           </a:prstGeom>
           <a:solidFill>
             <a:srgbClr val="2E2E2A"/>
@@ -12900,7 +13102,7 @@
       </p:sp>
       <p:sp>
         <p:nvSpPr>
-          <p:cNvPr id="9" name="Rectangle 8"/>
+          <p:cNvPr id="9" name="Rounded Rectangle 8"/>
           <p:cNvSpPr/>
           <p:nvPr/>
         </p:nvSpPr>
@@ -12909,8 +13111,10 @@
             <a:off x="1280160" y="7086600"/>
             <a:ext cx="15727680" cy="1417320"/>
           </a:xfrm>
-          <a:prstGeom prst="rect">
-            <a:avLst/>
+          <a:prstGeom prst="roundRect">
+            <a:avLst>
+              <a:gd name="adj" fmla="val 15483"/>
+            </a:avLst>
           </a:prstGeom>
           <a:solidFill>
             <a:srgbClr val="E5E4DF"/>
@@ -13168,7 +13372,7 @@
       </p:sp>
       <p:sp>
         <p:nvSpPr>
-          <p:cNvPr id="4" name="Rectangle 3"/>
+          <p:cNvPr id="4" name="Rounded Rectangle 3"/>
           <p:cNvSpPr/>
           <p:nvPr/>
         </p:nvSpPr>
@@ -13177,8 +13381,10 @@
             <a:off x="1280160" y="3337560"/>
             <a:ext cx="3685032" cy="3703320"/>
           </a:xfrm>
-          <a:prstGeom prst="rect">
-            <a:avLst/>
+          <a:prstGeom prst="roundRect">
+            <a:avLst>
+              <a:gd name="adj" fmla="val 5955"/>
+            </a:avLst>
           </a:prstGeom>
           <a:solidFill>
             <a:srgbClr val="E5E4DF"/>
@@ -13212,7 +13418,7 @@
       </p:sp>
       <p:sp>
         <p:nvSpPr>
-          <p:cNvPr id="5" name="Rectangle 4"/>
+          <p:cNvPr id="5" name="Rounded Rectangle 4"/>
           <p:cNvSpPr/>
           <p:nvPr/>
         </p:nvSpPr>
@@ -13221,8 +13427,10 @@
             <a:off x="1291133" y="3348533"/>
             <a:ext cx="3663086" cy="3681374"/>
           </a:xfrm>
-          <a:prstGeom prst="rect">
-            <a:avLst/>
+          <a:prstGeom prst="roundRect">
+            <a:avLst>
+              <a:gd name="adj" fmla="val 5691"/>
+            </a:avLst>
           </a:prstGeom>
           <a:solidFill>
             <a:srgbClr val="FFFFFF"/>
@@ -13256,17 +13464,19 @@
       </p:sp>
       <p:sp>
         <p:nvSpPr>
-          <p:cNvPr id="6" name="Rectangle 5"/>
+          <p:cNvPr id="6" name="Rounded Rectangle 5"/>
           <p:cNvSpPr/>
           <p:nvPr/>
         </p:nvSpPr>
         <p:spPr>
           <a:xfrm>
-            <a:off x="1280160" y="3337560"/>
-            <a:ext cx="3685032" cy="73152"/>
-          </a:xfrm>
-          <a:prstGeom prst="rect">
-            <a:avLst/>
+            <a:off x="2551176" y="3538728"/>
+            <a:ext cx="1143000" cy="73152"/>
+          </a:xfrm>
+          <a:prstGeom prst="roundRect">
+            <a:avLst>
+              <a:gd name="adj" fmla="val 50000"/>
+            </a:avLst>
           </a:prstGeom>
           <a:solidFill>
             <a:srgbClr val="2E2E2A"/>
@@ -13417,7 +13627,7 @@
       </p:sp>
       <p:sp>
         <p:nvSpPr>
-          <p:cNvPr id="10" name="Rectangle 9"/>
+          <p:cNvPr id="10" name="Rounded Rectangle 9"/>
           <p:cNvSpPr/>
           <p:nvPr/>
         </p:nvSpPr>
@@ -13426,8 +13636,10 @@
             <a:off x="5230368" y="3337560"/>
             <a:ext cx="3685032" cy="3703320"/>
           </a:xfrm>
-          <a:prstGeom prst="rect">
-            <a:avLst/>
+          <a:prstGeom prst="roundRect">
+            <a:avLst>
+              <a:gd name="adj" fmla="val 5955"/>
+            </a:avLst>
           </a:prstGeom>
           <a:solidFill>
             <a:srgbClr val="E5E4DF"/>
@@ -13461,7 +13673,7 @@
       </p:sp>
       <p:sp>
         <p:nvSpPr>
-          <p:cNvPr id="11" name="Rectangle 10"/>
+          <p:cNvPr id="11" name="Rounded Rectangle 10"/>
           <p:cNvSpPr/>
           <p:nvPr/>
         </p:nvSpPr>
@@ -13470,8 +13682,10 @@
             <a:off x="5241341" y="3348533"/>
             <a:ext cx="3663086" cy="3681374"/>
           </a:xfrm>
-          <a:prstGeom prst="rect">
-            <a:avLst/>
+          <a:prstGeom prst="roundRect">
+            <a:avLst>
+              <a:gd name="adj" fmla="val 5691"/>
+            </a:avLst>
           </a:prstGeom>
           <a:solidFill>
             <a:srgbClr val="EDEDDD"/>
@@ -13505,17 +13719,19 @@
       </p:sp>
       <p:sp>
         <p:nvSpPr>
-          <p:cNvPr id="12" name="Rectangle 11"/>
+          <p:cNvPr id="12" name="Rounded Rectangle 11"/>
           <p:cNvSpPr/>
           <p:nvPr/>
         </p:nvSpPr>
         <p:spPr>
           <a:xfrm>
-            <a:off x="5230368" y="3337560"/>
-            <a:ext cx="3685032" cy="73152"/>
-          </a:xfrm>
-          <a:prstGeom prst="rect">
-            <a:avLst/>
+            <a:off x="6501384" y="3538728"/>
+            <a:ext cx="1143000" cy="73152"/>
+          </a:xfrm>
+          <a:prstGeom prst="roundRect">
+            <a:avLst>
+              <a:gd name="adj" fmla="val 50000"/>
+            </a:avLst>
           </a:prstGeom>
           <a:solidFill>
             <a:srgbClr val="2E2E2A"/>
@@ -13666,7 +13882,7 @@
       </p:sp>
       <p:sp>
         <p:nvSpPr>
-          <p:cNvPr id="16" name="Rectangle 15"/>
+          <p:cNvPr id="16" name="Rounded Rectangle 15"/>
           <p:cNvSpPr/>
           <p:nvPr/>
         </p:nvSpPr>
@@ -13675,8 +13891,10 @@
             <a:off x="9180576" y="3337560"/>
             <a:ext cx="3685032" cy="3703320"/>
           </a:xfrm>
-          <a:prstGeom prst="rect">
-            <a:avLst/>
+          <a:prstGeom prst="roundRect">
+            <a:avLst>
+              <a:gd name="adj" fmla="val 5955"/>
+            </a:avLst>
           </a:prstGeom>
           <a:solidFill>
             <a:srgbClr val="E5E4DF"/>
@@ -13710,7 +13928,7 @@
       </p:sp>
       <p:sp>
         <p:nvSpPr>
-          <p:cNvPr id="17" name="Rectangle 16"/>
+          <p:cNvPr id="17" name="Rounded Rectangle 16"/>
           <p:cNvSpPr/>
           <p:nvPr/>
         </p:nvSpPr>
@@ -13719,8 +13937,10 @@
             <a:off x="9191549" y="3348533"/>
             <a:ext cx="3663086" cy="3681374"/>
           </a:xfrm>
-          <a:prstGeom prst="rect">
-            <a:avLst/>
+          <a:prstGeom prst="roundRect">
+            <a:avLst>
+              <a:gd name="adj" fmla="val 5691"/>
+            </a:avLst>
           </a:prstGeom>
           <a:solidFill>
             <a:srgbClr val="FFFFFF"/>
@@ -13754,17 +13974,19 @@
       </p:sp>
       <p:sp>
         <p:nvSpPr>
-          <p:cNvPr id="18" name="Rectangle 17"/>
+          <p:cNvPr id="18" name="Rounded Rectangle 17"/>
           <p:cNvSpPr/>
           <p:nvPr/>
         </p:nvSpPr>
         <p:spPr>
           <a:xfrm>
-            <a:off x="9180576" y="3337560"/>
-            <a:ext cx="3685032" cy="73152"/>
-          </a:xfrm>
-          <a:prstGeom prst="rect">
-            <a:avLst/>
+            <a:off x="10451592" y="3538728"/>
+            <a:ext cx="1143000" cy="73152"/>
+          </a:xfrm>
+          <a:prstGeom prst="roundRect">
+            <a:avLst>
+              <a:gd name="adj" fmla="val 50000"/>
+            </a:avLst>
           </a:prstGeom>
           <a:solidFill>
             <a:srgbClr val="2E2E2A"/>
@@ -13915,7 +14137,7 @@
       </p:sp>
       <p:sp>
         <p:nvSpPr>
-          <p:cNvPr id="22" name="Rectangle 21"/>
+          <p:cNvPr id="22" name="Rounded Rectangle 21"/>
           <p:cNvSpPr/>
           <p:nvPr/>
         </p:nvSpPr>
@@ -13924,8 +14146,10 @@
             <a:off x="13130784" y="3337560"/>
             <a:ext cx="3685032" cy="3703320"/>
           </a:xfrm>
-          <a:prstGeom prst="rect">
-            <a:avLst/>
+          <a:prstGeom prst="roundRect">
+            <a:avLst>
+              <a:gd name="adj" fmla="val 5955"/>
+            </a:avLst>
           </a:prstGeom>
           <a:solidFill>
             <a:srgbClr val="E5E4DF"/>
@@ -13959,7 +14183,7 @@
       </p:sp>
       <p:sp>
         <p:nvSpPr>
-          <p:cNvPr id="23" name="Rectangle 22"/>
+          <p:cNvPr id="23" name="Rounded Rectangle 22"/>
           <p:cNvSpPr/>
           <p:nvPr/>
         </p:nvSpPr>
@@ -13968,8 +14192,10 @@
             <a:off x="13141757" y="3348533"/>
             <a:ext cx="3663086" cy="3681374"/>
           </a:xfrm>
-          <a:prstGeom prst="rect">
-            <a:avLst/>
+          <a:prstGeom prst="roundRect">
+            <a:avLst>
+              <a:gd name="adj" fmla="val 5691"/>
+            </a:avLst>
           </a:prstGeom>
           <a:solidFill>
             <a:srgbClr val="EDEDDD"/>
@@ -14003,17 +14229,19 @@
       </p:sp>
       <p:sp>
         <p:nvSpPr>
-          <p:cNvPr id="24" name="Rectangle 23"/>
+          <p:cNvPr id="24" name="Rounded Rectangle 23"/>
           <p:cNvSpPr/>
           <p:nvPr/>
         </p:nvSpPr>
         <p:spPr>
           <a:xfrm>
-            <a:off x="13130784" y="3337560"/>
-            <a:ext cx="3685032" cy="73152"/>
-          </a:xfrm>
-          <a:prstGeom prst="rect">
-            <a:avLst/>
+            <a:off x="14401800" y="3538728"/>
+            <a:ext cx="1143000" cy="73152"/>
+          </a:xfrm>
+          <a:prstGeom prst="roundRect">
+            <a:avLst>
+              <a:gd name="adj" fmla="val 50000"/>
+            </a:avLst>
           </a:prstGeom>
           <a:solidFill>
             <a:srgbClr val="2E2E2A"/>
@@ -14164,7 +14392,7 @@
       </p:sp>
       <p:sp>
         <p:nvSpPr>
-          <p:cNvPr id="28" name="Rectangle 27"/>
+          <p:cNvPr id="28" name="Rounded Rectangle 27"/>
           <p:cNvSpPr/>
           <p:nvPr/>
         </p:nvSpPr>
@@ -14173,8 +14401,10 @@
             <a:off x="1280160" y="7589520"/>
             <a:ext cx="15727680" cy="1188720"/>
           </a:xfrm>
-          <a:prstGeom prst="rect">
-            <a:avLst/>
+          <a:prstGeom prst="roundRect">
+            <a:avLst>
+              <a:gd name="adj" fmla="val 18461"/>
+            </a:avLst>
           </a:prstGeom>
           <a:solidFill>
             <a:srgbClr val="E5E4DF"/>
@@ -14471,17 +14701,19 @@
       </p:sp>
       <p:sp>
         <p:nvSpPr>
-          <p:cNvPr id="4" name="Rectangle 3"/>
+          <p:cNvPr id="4" name="Rounded Rectangle 3"/>
           <p:cNvSpPr/>
           <p:nvPr/>
         </p:nvSpPr>
         <p:spPr>
           <a:xfrm>
-            <a:off x="1280160" y="3840480"/>
-            <a:ext cx="3429000" cy="2377440"/>
-          </a:xfrm>
-          <a:prstGeom prst="rect">
-            <a:avLst/>
+            <a:off x="1188720" y="3840480"/>
+            <a:ext cx="3383280" cy="2377440"/>
+          </a:xfrm>
+          <a:prstGeom prst="roundRect">
+            <a:avLst>
+              <a:gd name="adj" fmla="val 9230"/>
+            </a:avLst>
           </a:prstGeom>
           <a:solidFill>
             <a:srgbClr val="E5E4DF"/>
@@ -14515,17 +14747,19 @@
       </p:sp>
       <p:sp>
         <p:nvSpPr>
-          <p:cNvPr id="5" name="Rectangle 4"/>
+          <p:cNvPr id="5" name="Rounded Rectangle 4"/>
           <p:cNvSpPr/>
           <p:nvPr/>
         </p:nvSpPr>
         <p:spPr>
           <a:xfrm>
-            <a:off x="1291133" y="3851453"/>
-            <a:ext cx="3407054" cy="2355494"/>
-          </a:xfrm>
-          <a:prstGeom prst="rect">
-            <a:avLst/>
+            <a:off x="1199693" y="3851453"/>
+            <a:ext cx="3361334" cy="2355494"/>
+          </a:xfrm>
+          <a:prstGeom prst="roundRect">
+            <a:avLst>
+              <a:gd name="adj" fmla="val 8850"/>
+            </a:avLst>
           </a:prstGeom>
           <a:solidFill>
             <a:srgbClr val="FFFFFF"/>
@@ -14559,17 +14793,19 @@
       </p:sp>
       <p:sp>
         <p:nvSpPr>
-          <p:cNvPr id="6" name="Rectangle 5"/>
+          <p:cNvPr id="6" name="Rounded Rectangle 5"/>
           <p:cNvSpPr/>
           <p:nvPr/>
         </p:nvSpPr>
         <p:spPr>
           <a:xfrm>
-            <a:off x="1280160" y="3840480"/>
-            <a:ext cx="3429000" cy="73152"/>
-          </a:xfrm>
-          <a:prstGeom prst="rect">
-            <a:avLst/>
+            <a:off x="2308860" y="4041648"/>
+            <a:ext cx="1143000" cy="73152"/>
+          </a:xfrm>
+          <a:prstGeom prst="roundRect">
+            <a:avLst>
+              <a:gd name="adj" fmla="val 50000"/>
+            </a:avLst>
           </a:prstGeom>
           <a:solidFill>
             <a:srgbClr val="2E2E2A"/>
@@ -14609,8 +14845,8 @@
         </p:nvSpPr>
         <p:spPr>
           <a:xfrm>
-            <a:off x="1481328" y="3913632"/>
-            <a:ext cx="3026664" cy="2304288"/>
+            <a:off x="1389888" y="3913632"/>
+            <a:ext cx="2980944" cy="2304288"/>
           </a:xfrm>
           <a:prstGeom prst="rect">
             <a:avLst/>
@@ -14642,55 +14878,16 @@
       </p:sp>
       <p:sp>
         <p:nvSpPr>
-          <p:cNvPr id="8" name="TextBox 7"/>
-          <p:cNvSpPr txBox="1"/>
-          <p:nvPr/>
-        </p:nvSpPr>
-        <p:spPr>
-          <a:xfrm>
-            <a:off x="4937760" y="3840480"/>
-            <a:ext cx="731520" cy="2377440"/>
-          </a:xfrm>
-          <a:prstGeom prst="rect">
-            <a:avLst/>
-          </a:prstGeom>
-          <a:noFill/>
-        </p:spPr>
-        <p:txBody>
-          <a:bodyPr wrap="square" anchor="ctr" lIns="0" rIns="0" tIns="0" bIns="0">
-            <a:spAutoFit/>
-          </a:bodyPr>
-          <a:lstStyle/>
-          <a:p>
-            <a:pPr algn="ctr">
-              <a:lnSpc>
-                <a:spcPct val="115000"/>
-              </a:lnSpc>
-            </a:pPr>
-            <a:r>
-              <a:rPr sz="4400" b="1" i="0">
-                <a:solidFill>
-                  <a:srgbClr val="2E2E2A"/>
-                </a:solidFill>
-                <a:latin typeface="Outfit 1 Bold"/>
-              </a:rPr>
-              <a:t>+</a:t>
-            </a:r>
-          </a:p>
-        </p:txBody>
-      </p:sp>
-      <p:sp>
-        <p:nvSpPr>
-          <p:cNvPr id="9" name="Rectangle 8"/>
+          <p:cNvPr id="8" name="Oval 7"/>
           <p:cNvSpPr/>
           <p:nvPr/>
         </p:nvSpPr>
         <p:spPr>
           <a:xfrm>
-            <a:off x="5897880" y="3840480"/>
-            <a:ext cx="3429000" cy="2377440"/>
-          </a:xfrm>
-          <a:prstGeom prst="rect">
+            <a:off x="4846320" y="4690872"/>
+            <a:ext cx="676656" cy="676656"/>
+          </a:xfrm>
+          <a:prstGeom prst="ellipse">
             <a:avLst/>
           </a:prstGeom>
           <a:solidFill>
@@ -14725,17 +14922,104 @@
       </p:sp>
       <p:sp>
         <p:nvSpPr>
-          <p:cNvPr id="10" name="Rectangle 9"/>
+          <p:cNvPr id="9" name="TextBox 8"/>
+          <p:cNvSpPr txBox="1"/>
+          <p:nvPr/>
+        </p:nvSpPr>
+        <p:spPr>
+          <a:xfrm>
+            <a:off x="4846320" y="4690872"/>
+            <a:ext cx="676656" cy="676656"/>
+          </a:xfrm>
+          <a:prstGeom prst="rect">
+            <a:avLst/>
+          </a:prstGeom>
+          <a:noFill/>
+        </p:spPr>
+        <p:txBody>
+          <a:bodyPr wrap="square" anchor="ctr" lIns="0" rIns="0" tIns="0" bIns="0">
+            <a:spAutoFit/>
+          </a:bodyPr>
+          <a:lstStyle/>
+          <a:p>
+            <a:pPr algn="ctr">
+              <a:lnSpc>
+                <a:spcPct val="115000"/>
+              </a:lnSpc>
+            </a:pPr>
+            <a:r>
+              <a:rPr sz="3000" b="1" i="0">
+                <a:solidFill>
+                  <a:srgbClr val="2E2E2A"/>
+                </a:solidFill>
+                <a:latin typeface="Outfit 1 Bold"/>
+              </a:rPr>
+              <a:t>+</a:t>
+            </a:r>
+          </a:p>
+        </p:txBody>
+      </p:sp>
+      <p:sp>
+        <p:nvSpPr>
+          <p:cNvPr id="10" name="Rounded Rectangle 9"/>
           <p:cNvSpPr/>
           <p:nvPr/>
         </p:nvSpPr>
         <p:spPr>
           <a:xfrm>
-            <a:off x="5908853" y="3851453"/>
-            <a:ext cx="3407054" cy="2355494"/>
-          </a:xfrm>
-          <a:prstGeom prst="rect">
-            <a:avLst/>
+            <a:off x="5715000" y="3840480"/>
+            <a:ext cx="3383280" cy="2377440"/>
+          </a:xfrm>
+          <a:prstGeom prst="roundRect">
+            <a:avLst>
+              <a:gd name="adj" fmla="val 9230"/>
+            </a:avLst>
+          </a:prstGeom>
+          <a:solidFill>
+            <a:srgbClr val="E5E4DF"/>
+          </a:solidFill>
+          <a:ln>
+            <a:noFill/>
+          </a:ln>
+          <a:effectLst/>
+        </p:spPr>
+        <p:style>
+          <a:lnRef idx="1">
+            <a:schemeClr val="accent1"/>
+          </a:lnRef>
+          <a:fillRef idx="3">
+            <a:schemeClr val="accent1"/>
+          </a:fillRef>
+          <a:effectRef idx="2">
+            <a:schemeClr val="accent1"/>
+          </a:effectRef>
+          <a:fontRef idx="minor">
+            <a:schemeClr val="lt1"/>
+          </a:fontRef>
+        </p:style>
+        <p:txBody>
+          <a:bodyPr rtlCol="0" anchor="ctr"/>
+          <a:lstStyle/>
+          <a:p>
+            <a:pPr algn="ctr"/>
+          </a:p>
+        </p:txBody>
+      </p:sp>
+      <p:sp>
+        <p:nvSpPr>
+          <p:cNvPr id="11" name="Rounded Rectangle 10"/>
+          <p:cNvSpPr/>
+          <p:nvPr/>
+        </p:nvSpPr>
+        <p:spPr>
+          <a:xfrm>
+            <a:off x="5725973" y="3851453"/>
+            <a:ext cx="3361334" cy="2355494"/>
+          </a:xfrm>
+          <a:prstGeom prst="roundRect">
+            <a:avLst>
+              <a:gd name="adj" fmla="val 8850"/>
+            </a:avLst>
           </a:prstGeom>
           <a:solidFill>
             <a:srgbClr val="EDEDDD"/>
@@ -14769,17 +15053,19 @@
       </p:sp>
       <p:sp>
         <p:nvSpPr>
-          <p:cNvPr id="11" name="Rectangle 10"/>
+          <p:cNvPr id="12" name="Rounded Rectangle 11"/>
           <p:cNvSpPr/>
           <p:nvPr/>
         </p:nvSpPr>
         <p:spPr>
           <a:xfrm>
-            <a:off x="5897880" y="3840480"/>
-            <a:ext cx="3429000" cy="73152"/>
-          </a:xfrm>
-          <a:prstGeom prst="rect">
-            <a:avLst/>
+            <a:off x="6835140" y="4041648"/>
+            <a:ext cx="1143000" cy="73152"/>
+          </a:xfrm>
+          <a:prstGeom prst="roundRect">
+            <a:avLst>
+              <a:gd name="adj" fmla="val 50000"/>
+            </a:avLst>
           </a:prstGeom>
           <a:solidFill>
             <a:srgbClr val="2E2E2A"/>
@@ -14813,14 +15099,14 @@
       </p:sp>
       <p:sp>
         <p:nvSpPr>
-          <p:cNvPr id="12" name="TextBox 11"/>
+          <p:cNvPr id="13" name="TextBox 12"/>
           <p:cNvSpPr txBox="1"/>
           <p:nvPr/>
         </p:nvSpPr>
         <p:spPr>
           <a:xfrm>
-            <a:off x="6099048" y="3913632"/>
-            <a:ext cx="3026664" cy="2304288"/>
+            <a:off x="5916168" y="3913632"/>
+            <a:ext cx="2980944" cy="2304288"/>
           </a:xfrm>
           <a:prstGeom prst="rect">
             <a:avLst/>
@@ -14852,55 +15138,16 @@
       </p:sp>
       <p:sp>
         <p:nvSpPr>
-          <p:cNvPr id="13" name="TextBox 12"/>
-          <p:cNvSpPr txBox="1"/>
-          <p:nvPr/>
-        </p:nvSpPr>
-        <p:spPr>
-          <a:xfrm>
-            <a:off x="9555480" y="3840480"/>
-            <a:ext cx="731520" cy="2377440"/>
-          </a:xfrm>
-          <a:prstGeom prst="rect">
-            <a:avLst/>
-          </a:prstGeom>
-          <a:noFill/>
-        </p:spPr>
-        <p:txBody>
-          <a:bodyPr wrap="square" anchor="ctr" lIns="0" rIns="0" tIns="0" bIns="0">
-            <a:spAutoFit/>
-          </a:bodyPr>
-          <a:lstStyle/>
-          <a:p>
-            <a:pPr algn="ctr">
-              <a:lnSpc>
-                <a:spcPct val="115000"/>
-              </a:lnSpc>
-            </a:pPr>
-            <a:r>
-              <a:rPr sz="4400" b="1" i="0">
-                <a:solidFill>
-                  <a:srgbClr val="2E2E2A"/>
-                </a:solidFill>
-                <a:latin typeface="Outfit 1 Bold"/>
-              </a:rPr>
-              <a:t>+</a:t>
-            </a:r>
-          </a:p>
-        </p:txBody>
-      </p:sp>
-      <p:sp>
-        <p:nvSpPr>
-          <p:cNvPr id="14" name="Rectangle 13"/>
+          <p:cNvPr id="14" name="Oval 13"/>
           <p:cNvSpPr/>
           <p:nvPr/>
         </p:nvSpPr>
         <p:spPr>
           <a:xfrm>
-            <a:off x="10515600" y="3840480"/>
-            <a:ext cx="3429000" cy="2377440"/>
-          </a:xfrm>
-          <a:prstGeom prst="rect">
+            <a:off x="9372600" y="4690872"/>
+            <a:ext cx="676656" cy="676656"/>
+          </a:xfrm>
+          <a:prstGeom prst="ellipse">
             <a:avLst/>
           </a:prstGeom>
           <a:solidFill>
@@ -14935,17 +15182,104 @@
       </p:sp>
       <p:sp>
         <p:nvSpPr>
-          <p:cNvPr id="15" name="Rectangle 14"/>
+          <p:cNvPr id="15" name="TextBox 14"/>
+          <p:cNvSpPr txBox="1"/>
+          <p:nvPr/>
+        </p:nvSpPr>
+        <p:spPr>
+          <a:xfrm>
+            <a:off x="9372600" y="4690872"/>
+            <a:ext cx="676656" cy="676656"/>
+          </a:xfrm>
+          <a:prstGeom prst="rect">
+            <a:avLst/>
+          </a:prstGeom>
+          <a:noFill/>
+        </p:spPr>
+        <p:txBody>
+          <a:bodyPr wrap="square" anchor="ctr" lIns="0" rIns="0" tIns="0" bIns="0">
+            <a:spAutoFit/>
+          </a:bodyPr>
+          <a:lstStyle/>
+          <a:p>
+            <a:pPr algn="ctr">
+              <a:lnSpc>
+                <a:spcPct val="115000"/>
+              </a:lnSpc>
+            </a:pPr>
+            <a:r>
+              <a:rPr sz="3000" b="1" i="0">
+                <a:solidFill>
+                  <a:srgbClr val="2E2E2A"/>
+                </a:solidFill>
+                <a:latin typeface="Outfit 1 Bold"/>
+              </a:rPr>
+              <a:t>+</a:t>
+            </a:r>
+          </a:p>
+        </p:txBody>
+      </p:sp>
+      <p:sp>
+        <p:nvSpPr>
+          <p:cNvPr id="16" name="Rounded Rectangle 15"/>
           <p:cNvSpPr/>
           <p:nvPr/>
         </p:nvSpPr>
         <p:spPr>
           <a:xfrm>
-            <a:off x="10526573" y="3851453"/>
-            <a:ext cx="3407054" cy="2355494"/>
-          </a:xfrm>
-          <a:prstGeom prst="rect">
-            <a:avLst/>
+            <a:off x="10241280" y="3840480"/>
+            <a:ext cx="3383280" cy="2377440"/>
+          </a:xfrm>
+          <a:prstGeom prst="roundRect">
+            <a:avLst>
+              <a:gd name="adj" fmla="val 9230"/>
+            </a:avLst>
+          </a:prstGeom>
+          <a:solidFill>
+            <a:srgbClr val="E5E4DF"/>
+          </a:solidFill>
+          <a:ln>
+            <a:noFill/>
+          </a:ln>
+          <a:effectLst/>
+        </p:spPr>
+        <p:style>
+          <a:lnRef idx="1">
+            <a:schemeClr val="accent1"/>
+          </a:lnRef>
+          <a:fillRef idx="3">
+            <a:schemeClr val="accent1"/>
+          </a:fillRef>
+          <a:effectRef idx="2">
+            <a:schemeClr val="accent1"/>
+          </a:effectRef>
+          <a:fontRef idx="minor">
+            <a:schemeClr val="lt1"/>
+          </a:fontRef>
+        </p:style>
+        <p:txBody>
+          <a:bodyPr rtlCol="0" anchor="ctr"/>
+          <a:lstStyle/>
+          <a:p>
+            <a:pPr algn="ctr"/>
+          </a:p>
+        </p:txBody>
+      </p:sp>
+      <p:sp>
+        <p:nvSpPr>
+          <p:cNvPr id="17" name="Rounded Rectangle 16"/>
+          <p:cNvSpPr/>
+          <p:nvPr/>
+        </p:nvSpPr>
+        <p:spPr>
+          <a:xfrm>
+            <a:off x="10252253" y="3851453"/>
+            <a:ext cx="3361334" cy="2355494"/>
+          </a:xfrm>
+          <a:prstGeom prst="roundRect">
+            <a:avLst>
+              <a:gd name="adj" fmla="val 8850"/>
+            </a:avLst>
           </a:prstGeom>
           <a:solidFill>
             <a:srgbClr val="FFFFFF"/>
@@ -14979,17 +15313,19 @@
       </p:sp>
       <p:sp>
         <p:nvSpPr>
-          <p:cNvPr id="16" name="Rectangle 15"/>
+          <p:cNvPr id="18" name="Rounded Rectangle 17"/>
           <p:cNvSpPr/>
           <p:nvPr/>
         </p:nvSpPr>
         <p:spPr>
           <a:xfrm>
-            <a:off x="10515600" y="3840480"/>
-            <a:ext cx="3429000" cy="73152"/>
-          </a:xfrm>
-          <a:prstGeom prst="rect">
-            <a:avLst/>
+            <a:off x="11361420" y="4041648"/>
+            <a:ext cx="1143000" cy="73152"/>
+          </a:xfrm>
+          <a:prstGeom prst="roundRect">
+            <a:avLst>
+              <a:gd name="adj" fmla="val 50000"/>
+            </a:avLst>
           </a:prstGeom>
           <a:solidFill>
             <a:srgbClr val="2E2E2A"/>
@@ -15023,14 +15359,14 @@
       </p:sp>
       <p:sp>
         <p:nvSpPr>
-          <p:cNvPr id="17" name="TextBox 16"/>
+          <p:cNvPr id="19" name="TextBox 18"/>
           <p:cNvSpPr txBox="1"/>
           <p:nvPr/>
         </p:nvSpPr>
         <p:spPr>
           <a:xfrm>
-            <a:off x="10716768" y="3913632"/>
-            <a:ext cx="3026664" cy="2304288"/>
+            <a:off x="10442448" y="3913632"/>
+            <a:ext cx="2980944" cy="2304288"/>
           </a:xfrm>
           <a:prstGeom prst="rect">
             <a:avLst/>
@@ -15078,14 +15414,58 @@
       </p:sp>
       <p:sp>
         <p:nvSpPr>
-          <p:cNvPr id="18" name="TextBox 17"/>
+          <p:cNvPr id="20" name="Oval 19"/>
+          <p:cNvSpPr/>
+          <p:nvPr/>
+        </p:nvSpPr>
+        <p:spPr>
+          <a:xfrm>
+            <a:off x="13898880" y="4690872"/>
+            <a:ext cx="676656" cy="676656"/>
+          </a:xfrm>
+          <a:prstGeom prst="ellipse">
+            <a:avLst/>
+          </a:prstGeom>
+          <a:solidFill>
+            <a:srgbClr val="E5E4DF"/>
+          </a:solidFill>
+          <a:ln>
+            <a:noFill/>
+          </a:ln>
+          <a:effectLst/>
+        </p:spPr>
+        <p:style>
+          <a:lnRef idx="1">
+            <a:schemeClr val="accent1"/>
+          </a:lnRef>
+          <a:fillRef idx="3">
+            <a:schemeClr val="accent1"/>
+          </a:fillRef>
+          <a:effectRef idx="2">
+            <a:schemeClr val="accent1"/>
+          </a:effectRef>
+          <a:fontRef idx="minor">
+            <a:schemeClr val="lt1"/>
+          </a:fontRef>
+        </p:style>
+        <p:txBody>
+          <a:bodyPr rtlCol="0" anchor="ctr"/>
+          <a:lstStyle/>
+          <a:p>
+            <a:pPr algn="ctr"/>
+          </a:p>
+        </p:txBody>
+      </p:sp>
+      <p:sp>
+        <p:nvSpPr>
+          <p:cNvPr id="21" name="TextBox 20"/>
           <p:cNvSpPr txBox="1"/>
           <p:nvPr/>
         </p:nvSpPr>
         <p:spPr>
           <a:xfrm>
-            <a:off x="14173200" y="3840480"/>
-            <a:ext cx="731520" cy="2377440"/>
+            <a:off x="13898880" y="4690872"/>
+            <a:ext cx="676656" cy="676656"/>
           </a:xfrm>
           <a:prstGeom prst="rect">
             <a:avLst/>
@@ -15104,7 +15484,7 @@
               </a:lnSpc>
             </a:pPr>
             <a:r>
-              <a:rPr sz="4400" b="1" i="0">
+              <a:rPr sz="3000" b="1" i="0">
                 <a:solidFill>
                   <a:srgbClr val="2E2E2A"/>
                 </a:solidFill>
@@ -15117,17 +15497,19 @@
       </p:sp>
       <p:sp>
         <p:nvSpPr>
-          <p:cNvPr id="19" name="Rectangle 18"/>
+          <p:cNvPr id="22" name="Rounded Rectangle 21"/>
           <p:cNvSpPr/>
           <p:nvPr/>
         </p:nvSpPr>
         <p:spPr>
           <a:xfrm>
-            <a:off x="14493240" y="3840480"/>
-            <a:ext cx="2514600" cy="2377440"/>
-          </a:xfrm>
-          <a:prstGeom prst="rect">
-            <a:avLst/>
+            <a:off x="14813280" y="3840480"/>
+            <a:ext cx="2194560" cy="2377440"/>
+          </a:xfrm>
+          <a:prstGeom prst="roundRect">
+            <a:avLst>
+              <a:gd name="adj" fmla="val 10000"/>
+            </a:avLst>
           </a:prstGeom>
           <a:solidFill>
             <a:srgbClr val="2E2E2A"/>
@@ -15161,14 +15543,14 @@
       </p:sp>
       <p:sp>
         <p:nvSpPr>
-          <p:cNvPr id="20" name="TextBox 19"/>
+          <p:cNvPr id="23" name="TextBox 22"/>
           <p:cNvSpPr txBox="1"/>
           <p:nvPr/>
         </p:nvSpPr>
         <p:spPr>
           <a:xfrm>
-            <a:off x="14584680" y="3840480"/>
-            <a:ext cx="2331720" cy="2377440"/>
+            <a:off x="14904720" y="3840480"/>
+            <a:ext cx="2011680" cy="2377440"/>
           </a:xfrm>
           <a:prstGeom prst="rect">
             <a:avLst/>
@@ -15216,7 +15598,7 @@
       </p:sp>
       <p:sp>
         <p:nvSpPr>
-          <p:cNvPr id="21" name="Rectangle 20"/>
+          <p:cNvPr id="24" name="Rounded Rectangle 23"/>
           <p:cNvSpPr/>
           <p:nvPr/>
         </p:nvSpPr>
@@ -15225,8 +15607,10 @@
             <a:off x="1280160" y="7360920"/>
             <a:ext cx="15727680" cy="1325880"/>
           </a:xfrm>
-          <a:prstGeom prst="rect">
-            <a:avLst/>
+          <a:prstGeom prst="roundRect">
+            <a:avLst>
+              <a:gd name="adj" fmla="val 16551"/>
+            </a:avLst>
           </a:prstGeom>
           <a:solidFill>
             <a:srgbClr val="E5E4DF"/>
@@ -15260,7 +15644,7 @@
       </p:sp>
       <p:sp>
         <p:nvSpPr>
-          <p:cNvPr id="22" name="TextBox 21"/>
+          <p:cNvPr id="25" name="TextBox 24"/>
           <p:cNvSpPr txBox="1"/>
           <p:nvPr/>
         </p:nvSpPr>
@@ -15299,7 +15683,7 @@
       </p:sp>
       <p:sp>
         <p:nvSpPr>
-          <p:cNvPr id="23" name="TextBox 22"/>
+          <p:cNvPr id="26" name="TextBox 25"/>
           <p:cNvSpPr txBox="1"/>
           <p:nvPr/>
         </p:nvSpPr>
@@ -15356,7 +15740,7 @@
       </p:sp>
       <p:pic>
         <p:nvPicPr>
-          <p:cNvPr id="24" name="Picture 23" descr="logo-ka.png"/>
+          <p:cNvPr id="27" name="Picture 26" descr="logo-ka.png"/>
           <p:cNvPicPr>
             <a:picLocks noChangeAspect="1"/>
           </p:cNvPicPr>
@@ -15502,14 +15886,16 @@
             <a:off x="10424160" y="3017520"/>
             <a:ext cx="6583680" cy="5760720"/>
           </a:xfrm>
-          <a:prstGeom prst="rect">
-            <a:avLst/>
+          <a:prstGeom prst="roundRect">
+            <a:avLst>
+              <a:gd name="adj" fmla="val 5714"/>
+            </a:avLst>
           </a:prstGeom>
         </p:spPr>
       </p:pic>
       <p:sp>
         <p:nvSpPr>
-          <p:cNvPr id="5" name="Rectangle 4"/>
+          <p:cNvPr id="5" name="Rounded Rectangle 4"/>
           <p:cNvSpPr/>
           <p:nvPr/>
         </p:nvSpPr>
@@ -15518,8 +15904,10 @@
             <a:off x="1280160" y="3017520"/>
             <a:ext cx="8778240" cy="1828800"/>
           </a:xfrm>
-          <a:prstGeom prst="rect">
-            <a:avLst/>
+          <a:prstGeom prst="roundRect">
+            <a:avLst>
+              <a:gd name="adj" fmla="val 12000"/>
+            </a:avLst>
           </a:prstGeom>
           <a:solidFill>
             <a:srgbClr val="E5E4DF"/>
@@ -15553,7 +15941,7 @@
       </p:sp>
       <p:sp>
         <p:nvSpPr>
-          <p:cNvPr id="6" name="Rectangle 5"/>
+          <p:cNvPr id="6" name="Rounded Rectangle 5"/>
           <p:cNvSpPr/>
           <p:nvPr/>
         </p:nvSpPr>
@@ -15562,8 +15950,10 @@
             <a:off x="1291133" y="3028493"/>
             <a:ext cx="8756294" cy="1806854"/>
           </a:xfrm>
-          <a:prstGeom prst="rect">
-            <a:avLst/>
+          <a:prstGeom prst="roundRect">
+            <a:avLst>
+              <a:gd name="adj" fmla="val 11538"/>
+            </a:avLst>
           </a:prstGeom>
           <a:solidFill>
             <a:srgbClr val="FFFFFF"/>
@@ -15597,17 +15987,19 @@
       </p:sp>
       <p:sp>
         <p:nvSpPr>
-          <p:cNvPr id="7" name="Rectangle 6"/>
+          <p:cNvPr id="7" name="Rounded Rectangle 6"/>
           <p:cNvSpPr/>
           <p:nvPr/>
         </p:nvSpPr>
         <p:spPr>
           <a:xfrm>
-            <a:off x="1280160" y="3017520"/>
-            <a:ext cx="82296" cy="1828800"/>
-          </a:xfrm>
-          <a:prstGeom prst="rect">
-            <a:avLst/>
+            <a:off x="1291133" y="3236976"/>
+            <a:ext cx="91440" cy="1389888"/>
+          </a:xfrm>
+          <a:prstGeom prst="roundRect">
+            <a:avLst>
+              <a:gd name="adj" fmla="val 50000"/>
+            </a:avLst>
           </a:prstGeom>
           <a:solidFill>
             <a:srgbClr val="2E2E2A"/>
@@ -15719,7 +16111,7 @@
       </p:sp>
       <p:sp>
         <p:nvSpPr>
-          <p:cNvPr id="10" name="Rectangle 9"/>
+          <p:cNvPr id="10" name="Rounded Rectangle 9"/>
           <p:cNvSpPr/>
           <p:nvPr/>
         </p:nvSpPr>
@@ -15728,8 +16120,10 @@
             <a:off x="1280160" y="5029200"/>
             <a:ext cx="8778240" cy="1828800"/>
           </a:xfrm>
-          <a:prstGeom prst="rect">
-            <a:avLst/>
+          <a:prstGeom prst="roundRect">
+            <a:avLst>
+              <a:gd name="adj" fmla="val 12000"/>
+            </a:avLst>
           </a:prstGeom>
           <a:solidFill>
             <a:srgbClr val="E5E4DF"/>
@@ -15763,7 +16157,7 @@
       </p:sp>
       <p:sp>
         <p:nvSpPr>
-          <p:cNvPr id="11" name="Rectangle 10"/>
+          <p:cNvPr id="11" name="Rounded Rectangle 10"/>
           <p:cNvSpPr/>
           <p:nvPr/>
         </p:nvSpPr>
@@ -15772,8 +16166,10 @@
             <a:off x="1291133" y="5040173"/>
             <a:ext cx="8756294" cy="1806854"/>
           </a:xfrm>
-          <a:prstGeom prst="rect">
-            <a:avLst/>
+          <a:prstGeom prst="roundRect">
+            <a:avLst>
+              <a:gd name="adj" fmla="val 11538"/>
+            </a:avLst>
           </a:prstGeom>
           <a:solidFill>
             <a:srgbClr val="EDEDDD"/>
@@ -15807,17 +16203,19 @@
       </p:sp>
       <p:sp>
         <p:nvSpPr>
-          <p:cNvPr id="12" name="Rectangle 11"/>
+          <p:cNvPr id="12" name="Rounded Rectangle 11"/>
           <p:cNvSpPr/>
           <p:nvPr/>
         </p:nvSpPr>
         <p:spPr>
           <a:xfrm>
-            <a:off x="1280160" y="5029200"/>
-            <a:ext cx="82296" cy="1828800"/>
-          </a:xfrm>
-          <a:prstGeom prst="rect">
-            <a:avLst/>
+            <a:off x="1291133" y="5248656"/>
+            <a:ext cx="91440" cy="1389888"/>
+          </a:xfrm>
+          <a:prstGeom prst="roundRect">
+            <a:avLst>
+              <a:gd name="adj" fmla="val 50000"/>
+            </a:avLst>
           </a:prstGeom>
           <a:solidFill>
             <a:srgbClr val="2E2E2A"/>
@@ -15929,7 +16327,7 @@
       </p:sp>
       <p:sp>
         <p:nvSpPr>
-          <p:cNvPr id="15" name="Rectangle 14"/>
+          <p:cNvPr id="15" name="Rounded Rectangle 14"/>
           <p:cNvSpPr/>
           <p:nvPr/>
         </p:nvSpPr>
@@ -15938,8 +16336,10 @@
             <a:off x="1280160" y="7040880"/>
             <a:ext cx="8778240" cy="1828800"/>
           </a:xfrm>
-          <a:prstGeom prst="rect">
-            <a:avLst/>
+          <a:prstGeom prst="roundRect">
+            <a:avLst>
+              <a:gd name="adj" fmla="val 12000"/>
+            </a:avLst>
           </a:prstGeom>
           <a:solidFill>
             <a:srgbClr val="E5E4DF"/>
@@ -15973,7 +16373,7 @@
       </p:sp>
       <p:sp>
         <p:nvSpPr>
-          <p:cNvPr id="16" name="Rectangle 15"/>
+          <p:cNvPr id="16" name="Rounded Rectangle 15"/>
           <p:cNvSpPr/>
           <p:nvPr/>
         </p:nvSpPr>
@@ -15982,8 +16382,10 @@
             <a:off x="1291133" y="7051853"/>
             <a:ext cx="8756294" cy="1806854"/>
           </a:xfrm>
-          <a:prstGeom prst="rect">
-            <a:avLst/>
+          <a:prstGeom prst="roundRect">
+            <a:avLst>
+              <a:gd name="adj" fmla="val 11538"/>
+            </a:avLst>
           </a:prstGeom>
           <a:solidFill>
             <a:srgbClr val="FFFFFF"/>
@@ -16017,17 +16419,19 @@
       </p:sp>
       <p:sp>
         <p:nvSpPr>
-          <p:cNvPr id="17" name="Rectangle 16"/>
+          <p:cNvPr id="17" name="Rounded Rectangle 16"/>
           <p:cNvSpPr/>
           <p:nvPr/>
         </p:nvSpPr>
         <p:spPr>
           <a:xfrm>
-            <a:off x="1280160" y="7040880"/>
-            <a:ext cx="82296" cy="1828800"/>
-          </a:xfrm>
-          <a:prstGeom prst="rect">
-            <a:avLst/>
+            <a:off x="1291133" y="7260336"/>
+            <a:ext cx="91440" cy="1389888"/>
+          </a:xfrm>
+          <a:prstGeom prst="roundRect">
+            <a:avLst>
+              <a:gd name="adj" fmla="val 50000"/>
+            </a:avLst>
           </a:prstGeom>
           <a:solidFill>
             <a:srgbClr val="2E2E2A"/>
@@ -16264,8 +16668,10 @@
             <a:off x="10424160" y="1325880"/>
             <a:ext cx="6583680" cy="7452360"/>
           </a:xfrm>
-          <a:prstGeom prst="rect">
-            <a:avLst/>
+          <a:prstGeom prst="roundRect">
+            <a:avLst>
+              <a:gd name="adj" fmla="val 5000"/>
+            </a:avLst>
           </a:prstGeom>
         </p:spPr>
       </p:pic>
@@ -16381,7 +16787,7 @@
       </p:sp>
       <p:sp>
         <p:nvSpPr>
-          <p:cNvPr id="5" name="Rectangle 4"/>
+          <p:cNvPr id="5" name="Rounded Rectangle 4"/>
           <p:cNvSpPr/>
           <p:nvPr/>
         </p:nvSpPr>
@@ -16390,8 +16796,10 @@
             <a:off x="1280160" y="5394960"/>
             <a:ext cx="1463040" cy="64008"/>
           </a:xfrm>
-          <a:prstGeom prst="rect">
-            <a:avLst/>
+          <a:prstGeom prst="roundRect">
+            <a:avLst>
+              <a:gd name="adj" fmla="val 50000"/>
+            </a:avLst>
           </a:prstGeom>
           <a:solidFill>
             <a:srgbClr val="2E2E2A"/>
@@ -16464,16 +16872,16 @@
       </p:sp>
       <p:sp>
         <p:nvSpPr>
-          <p:cNvPr id="7" name="Rectangle 6"/>
+          <p:cNvPr id="7" name="Oval 6"/>
           <p:cNvSpPr/>
           <p:nvPr/>
         </p:nvSpPr>
         <p:spPr>
           <a:xfrm>
-            <a:off x="1280160" y="7717536"/>
-            <a:ext cx="274320" cy="45720"/>
-          </a:xfrm>
-          <a:prstGeom prst="rect">
+            <a:off x="1316736" y="7699248"/>
+            <a:ext cx="146304" cy="146304"/>
+          </a:xfrm>
+          <a:prstGeom prst="ellipse">
             <a:avLst/>
           </a:prstGeom>
           <a:solidFill>
@@ -16547,16 +16955,16 @@
       </p:sp>
       <p:sp>
         <p:nvSpPr>
-          <p:cNvPr id="9" name="Rectangle 8"/>
+          <p:cNvPr id="9" name="Oval 8"/>
           <p:cNvSpPr/>
           <p:nvPr/>
         </p:nvSpPr>
         <p:spPr>
           <a:xfrm>
-            <a:off x="1280160" y="8193024"/>
-            <a:ext cx="274320" cy="45720"/>
-          </a:xfrm>
-          <a:prstGeom prst="rect">
+            <a:off x="1316736" y="8174736"/>
+            <a:ext cx="146304" cy="146304"/>
+          </a:xfrm>
+          <a:prstGeom prst="ellipse">
             <a:avLst/>
           </a:prstGeom>
           <a:solidFill>
@@ -16630,16 +17038,16 @@
       </p:sp>
       <p:sp>
         <p:nvSpPr>
-          <p:cNvPr id="11" name="Rectangle 10"/>
+          <p:cNvPr id="11" name="Oval 10"/>
           <p:cNvSpPr/>
           <p:nvPr/>
         </p:nvSpPr>
         <p:spPr>
           <a:xfrm>
-            <a:off x="1280160" y="8668512"/>
-            <a:ext cx="274320" cy="45720"/>
-          </a:xfrm>
-          <a:prstGeom prst="rect">
+            <a:off x="1316736" y="8650224"/>
+            <a:ext cx="146304" cy="146304"/>
+          </a:xfrm>
+          <a:prstGeom prst="ellipse">
             <a:avLst/>
           </a:prstGeom>
           <a:solidFill>
@@ -16916,14 +17324,16 @@
             <a:off x="11521440" y="3017520"/>
             <a:ext cx="5486400" cy="5669280"/>
           </a:xfrm>
-          <a:prstGeom prst="rect">
-            <a:avLst/>
+          <a:prstGeom prst="roundRect">
+            <a:avLst>
+              <a:gd name="adj" fmla="val 6000"/>
+            </a:avLst>
           </a:prstGeom>
         </p:spPr>
       </p:pic>
       <p:sp>
         <p:nvSpPr>
-          <p:cNvPr id="5" name="Rectangle 4"/>
+          <p:cNvPr id="5" name="Rounded Rectangle 4"/>
           <p:cNvSpPr/>
           <p:nvPr/>
         </p:nvSpPr>
@@ -16932,8 +17342,10 @@
             <a:off x="1865376" y="3246120"/>
             <a:ext cx="27432" cy="5349240"/>
           </a:xfrm>
-          <a:prstGeom prst="rect">
-            <a:avLst/>
+          <a:prstGeom prst="roundRect">
+            <a:avLst>
+              <a:gd name="adj" fmla="val 50000"/>
+            </a:avLst>
           </a:prstGeom>
           <a:solidFill>
             <a:srgbClr val="DCDBD5"/>
@@ -17796,7 +18208,7 @@
       </p:sp>
       <p:sp>
         <p:nvSpPr>
-          <p:cNvPr id="4" name="Rectangle 3"/>
+          <p:cNvPr id="4" name="Rounded Rectangle 3"/>
           <p:cNvSpPr/>
           <p:nvPr/>
         </p:nvSpPr>
@@ -17805,8 +18217,10 @@
             <a:off x="1280160" y="3291840"/>
             <a:ext cx="15727680" cy="1207008"/>
           </a:xfrm>
-          <a:prstGeom prst="rect">
-            <a:avLst/>
+          <a:prstGeom prst="roundRect">
+            <a:avLst>
+              <a:gd name="adj" fmla="val 18181"/>
+            </a:avLst>
           </a:prstGeom>
           <a:solidFill>
             <a:srgbClr val="FFFFFF"/>
@@ -17840,17 +18254,19 @@
       </p:sp>
       <p:sp>
         <p:nvSpPr>
-          <p:cNvPr id="5" name="Rectangle 4"/>
+          <p:cNvPr id="5" name="Rounded Rectangle 4"/>
           <p:cNvSpPr/>
           <p:nvPr/>
         </p:nvSpPr>
         <p:spPr>
           <a:xfrm>
-            <a:off x="1280160" y="3291840"/>
-            <a:ext cx="82296" cy="1207008"/>
-          </a:xfrm>
-          <a:prstGeom prst="rect">
-            <a:avLst/>
+            <a:off x="1291133" y="3511296"/>
+            <a:ext cx="91440" cy="768096"/>
+          </a:xfrm>
+          <a:prstGeom prst="roundRect">
+            <a:avLst>
+              <a:gd name="adj" fmla="val 50000"/>
+            </a:avLst>
           </a:prstGeom>
           <a:solidFill>
             <a:srgbClr val="2E2E2A"/>
@@ -17962,7 +18378,7 @@
       </p:sp>
       <p:sp>
         <p:nvSpPr>
-          <p:cNvPr id="8" name="Rectangle 7"/>
+          <p:cNvPr id="8" name="Rounded Rectangle 7"/>
           <p:cNvSpPr/>
           <p:nvPr/>
         </p:nvSpPr>
@@ -17971,8 +18387,10 @@
             <a:off x="12115800" y="3858768"/>
             <a:ext cx="502920" cy="45720"/>
           </a:xfrm>
-          <a:prstGeom prst="rect">
-            <a:avLst/>
+          <a:prstGeom prst="roundRect">
+            <a:avLst>
+              <a:gd name="adj" fmla="val 50000"/>
+            </a:avLst>
           </a:prstGeom>
           <a:solidFill>
             <a:srgbClr val="2E2E2A"/>
@@ -18045,7 +18463,7 @@
       </p:sp>
       <p:sp>
         <p:nvSpPr>
-          <p:cNvPr id="10" name="Rectangle 9"/>
+          <p:cNvPr id="10" name="Rounded Rectangle 9"/>
           <p:cNvSpPr/>
           <p:nvPr/>
         </p:nvSpPr>
@@ -18054,8 +18472,10 @@
             <a:off x="1280160" y="4709160"/>
             <a:ext cx="15727680" cy="1207008"/>
           </a:xfrm>
-          <a:prstGeom prst="rect">
-            <a:avLst/>
+          <a:prstGeom prst="roundRect">
+            <a:avLst>
+              <a:gd name="adj" fmla="val 18181"/>
+            </a:avLst>
           </a:prstGeom>
           <a:solidFill>
             <a:srgbClr val="EDEDDD"/>
@@ -18089,17 +18509,19 @@
       </p:sp>
       <p:sp>
         <p:nvSpPr>
-          <p:cNvPr id="11" name="Rectangle 10"/>
+          <p:cNvPr id="11" name="Rounded Rectangle 10"/>
           <p:cNvSpPr/>
           <p:nvPr/>
         </p:nvSpPr>
         <p:spPr>
           <a:xfrm>
-            <a:off x="1280160" y="4709160"/>
-            <a:ext cx="82296" cy="1207008"/>
-          </a:xfrm>
-          <a:prstGeom prst="rect">
-            <a:avLst/>
+            <a:off x="1291133" y="4928616"/>
+            <a:ext cx="91440" cy="768096"/>
+          </a:xfrm>
+          <a:prstGeom prst="roundRect">
+            <a:avLst>
+              <a:gd name="adj" fmla="val 50000"/>
+            </a:avLst>
           </a:prstGeom>
           <a:solidFill>
             <a:srgbClr val="2E2E2A"/>
@@ -18211,7 +18633,7 @@
       </p:sp>
       <p:sp>
         <p:nvSpPr>
-          <p:cNvPr id="14" name="Rectangle 13"/>
+          <p:cNvPr id="14" name="Rounded Rectangle 13"/>
           <p:cNvSpPr/>
           <p:nvPr/>
         </p:nvSpPr>
@@ -18220,8 +18642,10 @@
             <a:off x="12115800" y="5276088"/>
             <a:ext cx="502920" cy="45720"/>
           </a:xfrm>
-          <a:prstGeom prst="rect">
-            <a:avLst/>
+          <a:prstGeom prst="roundRect">
+            <a:avLst>
+              <a:gd name="adj" fmla="val 50000"/>
+            </a:avLst>
           </a:prstGeom>
           <a:solidFill>
             <a:srgbClr val="2E2E2A"/>
@@ -18294,7 +18718,7 @@
       </p:sp>
       <p:sp>
         <p:nvSpPr>
-          <p:cNvPr id="16" name="Rectangle 15"/>
+          <p:cNvPr id="16" name="Rounded Rectangle 15"/>
           <p:cNvSpPr/>
           <p:nvPr/>
         </p:nvSpPr>
@@ -18303,8 +18727,10 @@
             <a:off x="1280160" y="6126480"/>
             <a:ext cx="15727680" cy="1207008"/>
           </a:xfrm>
-          <a:prstGeom prst="rect">
-            <a:avLst/>
+          <a:prstGeom prst="roundRect">
+            <a:avLst>
+              <a:gd name="adj" fmla="val 18181"/>
+            </a:avLst>
           </a:prstGeom>
           <a:solidFill>
             <a:srgbClr val="FFFFFF"/>
@@ -18338,17 +18764,19 @@
       </p:sp>
       <p:sp>
         <p:nvSpPr>
-          <p:cNvPr id="17" name="Rectangle 16"/>
+          <p:cNvPr id="17" name="Rounded Rectangle 16"/>
           <p:cNvSpPr/>
           <p:nvPr/>
         </p:nvSpPr>
         <p:spPr>
           <a:xfrm>
-            <a:off x="1280160" y="6126480"/>
-            <a:ext cx="82296" cy="1207008"/>
-          </a:xfrm>
-          <a:prstGeom prst="rect">
-            <a:avLst/>
+            <a:off x="1291133" y="6345936"/>
+            <a:ext cx="91440" cy="768096"/>
+          </a:xfrm>
+          <a:prstGeom prst="roundRect">
+            <a:avLst>
+              <a:gd name="adj" fmla="val 50000"/>
+            </a:avLst>
           </a:prstGeom>
           <a:solidFill>
             <a:srgbClr val="2E2E2A"/>
@@ -18460,7 +18888,7 @@
       </p:sp>
       <p:sp>
         <p:nvSpPr>
-          <p:cNvPr id="20" name="Rectangle 19"/>
+          <p:cNvPr id="20" name="Rounded Rectangle 19"/>
           <p:cNvSpPr/>
           <p:nvPr/>
         </p:nvSpPr>
@@ -18469,8 +18897,10 @@
             <a:off x="12115800" y="6693408"/>
             <a:ext cx="502920" cy="45720"/>
           </a:xfrm>
-          <a:prstGeom prst="rect">
-            <a:avLst/>
+          <a:prstGeom prst="roundRect">
+            <a:avLst>
+              <a:gd name="adj" fmla="val 50000"/>
+            </a:avLst>
           </a:prstGeom>
           <a:solidFill>
             <a:srgbClr val="2E2E2A"/>
@@ -18543,7 +18973,7 @@
       </p:sp>
       <p:sp>
         <p:nvSpPr>
-          <p:cNvPr id="22" name="Rectangle 21"/>
+          <p:cNvPr id="22" name="Rounded Rectangle 21"/>
           <p:cNvSpPr/>
           <p:nvPr/>
         </p:nvSpPr>
@@ -18552,8 +18982,10 @@
             <a:off x="1280160" y="7543800"/>
             <a:ext cx="15727680" cy="1207008"/>
           </a:xfrm>
-          <a:prstGeom prst="rect">
-            <a:avLst/>
+          <a:prstGeom prst="roundRect">
+            <a:avLst>
+              <a:gd name="adj" fmla="val 18181"/>
+            </a:avLst>
           </a:prstGeom>
           <a:solidFill>
             <a:srgbClr val="EDEDDD"/>
@@ -18587,17 +19019,19 @@
       </p:sp>
       <p:sp>
         <p:nvSpPr>
-          <p:cNvPr id="23" name="Rectangle 22"/>
+          <p:cNvPr id="23" name="Rounded Rectangle 22"/>
           <p:cNvSpPr/>
           <p:nvPr/>
         </p:nvSpPr>
         <p:spPr>
           <a:xfrm>
-            <a:off x="1280160" y="7543800"/>
-            <a:ext cx="82296" cy="1207008"/>
-          </a:xfrm>
-          <a:prstGeom prst="rect">
-            <a:avLst/>
+            <a:off x="1291133" y="7763256"/>
+            <a:ext cx="91440" cy="768096"/>
+          </a:xfrm>
+          <a:prstGeom prst="roundRect">
+            <a:avLst>
+              <a:gd name="adj" fmla="val 50000"/>
+            </a:avLst>
           </a:prstGeom>
           <a:solidFill>
             <a:srgbClr val="2E2E2A"/>
@@ -18709,7 +19143,7 @@
       </p:sp>
       <p:sp>
         <p:nvSpPr>
-          <p:cNvPr id="26" name="Rectangle 25"/>
+          <p:cNvPr id="26" name="Rounded Rectangle 25"/>
           <p:cNvSpPr/>
           <p:nvPr/>
         </p:nvSpPr>
@@ -18718,8 +19152,10 @@
             <a:off x="12115800" y="8110728"/>
             <a:ext cx="502920" cy="45720"/>
           </a:xfrm>
-          <a:prstGeom prst="rect">
-            <a:avLst/>
+          <a:prstGeom prst="roundRect">
+            <a:avLst>
+              <a:gd name="adj" fmla="val 50000"/>
+            </a:avLst>
           </a:prstGeom>
           <a:solidFill>
             <a:srgbClr val="2E2E2A"/>
@@ -18977,7 +19413,7 @@
       </p:sp>
       <p:sp>
         <p:nvSpPr>
-          <p:cNvPr id="4" name="Rectangle 3"/>
+          <p:cNvPr id="4" name="Rounded Rectangle 3"/>
           <p:cNvSpPr/>
           <p:nvPr/>
         </p:nvSpPr>
@@ -18986,8 +19422,10 @@
             <a:off x="1280160" y="3566160"/>
             <a:ext cx="3685032" cy="4663440"/>
           </a:xfrm>
-          <a:prstGeom prst="rect">
-            <a:avLst/>
+          <a:prstGeom prst="roundRect">
+            <a:avLst>
+              <a:gd name="adj" fmla="val 5955"/>
+            </a:avLst>
           </a:prstGeom>
           <a:solidFill>
             <a:srgbClr val="E5E4DF"/>
@@ -19021,7 +19459,7 @@
       </p:sp>
       <p:sp>
         <p:nvSpPr>
-          <p:cNvPr id="5" name="Rectangle 4"/>
+          <p:cNvPr id="5" name="Rounded Rectangle 4"/>
           <p:cNvSpPr/>
           <p:nvPr/>
         </p:nvSpPr>
@@ -19030,8 +19468,10 @@
             <a:off x="1291133" y="3577133"/>
             <a:ext cx="3663086" cy="4641494"/>
           </a:xfrm>
-          <a:prstGeom prst="rect">
-            <a:avLst/>
+          <a:prstGeom prst="roundRect">
+            <a:avLst>
+              <a:gd name="adj" fmla="val 5691"/>
+            </a:avLst>
           </a:prstGeom>
           <a:solidFill>
             <a:srgbClr val="FFFFFF"/>
@@ -19065,16 +19505,177 @@
       </p:sp>
       <p:sp>
         <p:nvSpPr>
-          <p:cNvPr id="6" name="Rectangle 5"/>
+          <p:cNvPr id="6" name="Oval 5"/>
           <p:cNvSpPr/>
           <p:nvPr/>
         </p:nvSpPr>
         <p:spPr>
           <a:xfrm>
-            <a:off x="1280160" y="3566160"/>
-            <a:ext cx="3685032" cy="73152"/>
-          </a:xfrm>
-          <a:prstGeom prst="rect">
+            <a:off x="2788920" y="4114800"/>
+            <a:ext cx="658368" cy="658368"/>
+          </a:xfrm>
+          <a:prstGeom prst="ellipse">
+            <a:avLst/>
+          </a:prstGeom>
+          <a:solidFill>
+            <a:srgbClr val="E5E4DF"/>
+          </a:solidFill>
+          <a:ln>
+            <a:noFill/>
+          </a:ln>
+          <a:effectLst/>
+        </p:spPr>
+        <p:style>
+          <a:lnRef idx="1">
+            <a:schemeClr val="accent1"/>
+          </a:lnRef>
+          <a:fillRef idx="3">
+            <a:schemeClr val="accent1"/>
+          </a:fillRef>
+          <a:effectRef idx="2">
+            <a:schemeClr val="accent1"/>
+          </a:effectRef>
+          <a:fontRef idx="minor">
+            <a:schemeClr val="lt1"/>
+          </a:fontRef>
+        </p:style>
+        <p:txBody>
+          <a:bodyPr rtlCol="0" anchor="ctr"/>
+          <a:lstStyle/>
+          <a:p>
+            <a:pPr algn="ctr"/>
+          </a:p>
+        </p:txBody>
+      </p:sp>
+      <p:sp>
+        <p:nvSpPr>
+          <p:cNvPr id="7" name="TextBox 6"/>
+          <p:cNvSpPr txBox="1"/>
+          <p:nvPr/>
+        </p:nvSpPr>
+        <p:spPr>
+          <a:xfrm>
+            <a:off x="2788920" y="4114800"/>
+            <a:ext cx="658368" cy="658368"/>
+          </a:xfrm>
+          <a:prstGeom prst="rect">
+            <a:avLst/>
+          </a:prstGeom>
+          <a:noFill/>
+        </p:spPr>
+        <p:txBody>
+          <a:bodyPr wrap="square" anchor="ctr" lIns="0" rIns="0" tIns="0" bIns="0">
+            <a:spAutoFit/>
+          </a:bodyPr>
+          <a:lstStyle/>
+          <a:p>
+            <a:pPr algn="ctr">
+              <a:lnSpc>
+                <a:spcPct val="115000"/>
+              </a:lnSpc>
+            </a:pPr>
+            <a:r>
+              <a:rPr sz="1800" b="1" i="0">
+                <a:solidFill>
+                  <a:srgbClr val="2E2E2A"/>
+                </a:solidFill>
+                <a:latin typeface="Outfit 1 Bold"/>
+              </a:rPr>
+              <a:t>01</a:t>
+            </a:r>
+          </a:p>
+        </p:txBody>
+      </p:sp>
+      <p:sp>
+        <p:nvSpPr>
+          <p:cNvPr id="8" name="TextBox 7"/>
+          <p:cNvSpPr txBox="1"/>
+          <p:nvPr/>
+        </p:nvSpPr>
+        <p:spPr>
+          <a:xfrm>
+            <a:off x="1554480" y="5212080"/>
+            <a:ext cx="3136392" cy="482600"/>
+          </a:xfrm>
+          <a:prstGeom prst="rect">
+            <a:avLst/>
+          </a:prstGeom>
+          <a:noFill/>
+        </p:spPr>
+        <p:txBody>
+          <a:bodyPr wrap="square" anchor="t" lIns="0" rIns="0" tIns="0" bIns="0">
+            <a:spAutoFit/>
+          </a:bodyPr>
+          <a:lstStyle/>
+          <a:p>
+            <a:pPr algn="ctr">
+              <a:lnSpc>
+                <a:spcPct val="118000"/>
+              </a:lnSpc>
+            </a:pPr>
+            <a:r>
+              <a:rPr sz="2000" b="1" i="0">
+                <a:solidFill>
+                  <a:srgbClr val="1A1A1A"/>
+                </a:solidFill>
+                <a:latin typeface="Outfit 1 Bold"/>
+              </a:rPr>
+              <a:t>MONTA SUA LOJA</a:t>
+            </a:r>
+          </a:p>
+        </p:txBody>
+      </p:sp>
+      <p:sp>
+        <p:nvSpPr>
+          <p:cNvPr id="9" name="TextBox 8"/>
+          <p:cNvSpPr txBox="1"/>
+          <p:nvPr/>
+        </p:nvSpPr>
+        <p:spPr>
+          <a:xfrm>
+            <a:off x="1554480" y="5989320"/>
+            <a:ext cx="3136392" cy="2011680"/>
+          </a:xfrm>
+          <a:prstGeom prst="rect">
+            <a:avLst/>
+          </a:prstGeom>
+          <a:noFill/>
+        </p:spPr>
+        <p:txBody>
+          <a:bodyPr wrap="square" anchor="t" lIns="0" rIns="0" tIns="0" bIns="0">
+            <a:spAutoFit/>
+          </a:bodyPr>
+          <a:lstStyle/>
+          <a:p>
+            <a:pPr algn="ctr">
+              <a:lnSpc>
+                <a:spcPct val="125000"/>
+              </a:lnSpc>
+            </a:pPr>
+            <a:r>
+              <a:rPr sz="2400" b="0" i="0">
+                <a:solidFill>
+                  <a:srgbClr val="B5B5AD"/>
+                </a:solidFill>
+                <a:latin typeface="Outfit 1"/>
+              </a:rPr>
+              <a:t>Sai do papel de funcionária e assume uma trajetória própria.</a:t>
+            </a:r>
+          </a:p>
+        </p:txBody>
+      </p:sp>
+      <p:sp>
+        <p:nvSpPr>
+          <p:cNvPr id="10" name="Oval 9"/>
+          <p:cNvSpPr/>
+          <p:nvPr/>
+        </p:nvSpPr>
+        <p:spPr>
+          <a:xfrm>
+            <a:off x="5047488" y="5815584"/>
+            <a:ext cx="146304" cy="146304"/>
+          </a:xfrm>
+          <a:prstGeom prst="ellipse">
             <a:avLst/>
           </a:prstGeom>
           <a:solidFill>
@@ -19109,17 +19710,19 @@
       </p:sp>
       <p:sp>
         <p:nvSpPr>
-          <p:cNvPr id="7" name="Oval 6"/>
+          <p:cNvPr id="11" name="Rounded Rectangle 10"/>
           <p:cNvSpPr/>
           <p:nvPr/>
         </p:nvSpPr>
         <p:spPr>
           <a:xfrm>
-            <a:off x="2788920" y="4114800"/>
-            <a:ext cx="658368" cy="658368"/>
-          </a:xfrm>
-          <a:prstGeom prst="ellipse">
-            <a:avLst/>
+            <a:off x="5230368" y="3566160"/>
+            <a:ext cx="3685032" cy="4663440"/>
+          </a:xfrm>
+          <a:prstGeom prst="roundRect">
+            <a:avLst>
+              <a:gd name="adj" fmla="val 5955"/>
+            </a:avLst>
           </a:prstGeom>
           <a:solidFill>
             <a:srgbClr val="E5E4DF"/>
@@ -19153,13 +19756,103 @@
       </p:sp>
       <p:sp>
         <p:nvSpPr>
-          <p:cNvPr id="8" name="TextBox 7"/>
+          <p:cNvPr id="12" name="Rounded Rectangle 11"/>
+          <p:cNvSpPr/>
+          <p:nvPr/>
+        </p:nvSpPr>
+        <p:spPr>
+          <a:xfrm>
+            <a:off x="5241341" y="3577133"/>
+            <a:ext cx="3663086" cy="4641494"/>
+          </a:xfrm>
+          <a:prstGeom prst="roundRect">
+            <a:avLst>
+              <a:gd name="adj" fmla="val 5691"/>
+            </a:avLst>
+          </a:prstGeom>
+          <a:solidFill>
+            <a:srgbClr val="EDEDDD"/>
+          </a:solidFill>
+          <a:ln>
+            <a:noFill/>
+          </a:ln>
+          <a:effectLst/>
+        </p:spPr>
+        <p:style>
+          <a:lnRef idx="1">
+            <a:schemeClr val="accent1"/>
+          </a:lnRef>
+          <a:fillRef idx="3">
+            <a:schemeClr val="accent1"/>
+          </a:fillRef>
+          <a:effectRef idx="2">
+            <a:schemeClr val="accent1"/>
+          </a:effectRef>
+          <a:fontRef idx="minor">
+            <a:schemeClr val="lt1"/>
+          </a:fontRef>
+        </p:style>
+        <p:txBody>
+          <a:bodyPr rtlCol="0" anchor="ctr"/>
+          <a:lstStyle/>
+          <a:p>
+            <a:pPr algn="ctr"/>
+          </a:p>
+        </p:txBody>
+      </p:sp>
+      <p:sp>
+        <p:nvSpPr>
+          <p:cNvPr id="13" name="Oval 12"/>
+          <p:cNvSpPr/>
+          <p:nvPr/>
+        </p:nvSpPr>
+        <p:spPr>
+          <a:xfrm>
+            <a:off x="6739128" y="4114800"/>
+            <a:ext cx="658368" cy="658368"/>
+          </a:xfrm>
+          <a:prstGeom prst="ellipse">
+            <a:avLst/>
+          </a:prstGeom>
+          <a:solidFill>
+            <a:srgbClr val="E5E4DF"/>
+          </a:solidFill>
+          <a:ln>
+            <a:noFill/>
+          </a:ln>
+          <a:effectLst/>
+        </p:spPr>
+        <p:style>
+          <a:lnRef idx="1">
+            <a:schemeClr val="accent1"/>
+          </a:lnRef>
+          <a:fillRef idx="3">
+            <a:schemeClr val="accent1"/>
+          </a:fillRef>
+          <a:effectRef idx="2">
+            <a:schemeClr val="accent1"/>
+          </a:effectRef>
+          <a:fontRef idx="minor">
+            <a:schemeClr val="lt1"/>
+          </a:fontRef>
+        </p:style>
+        <p:txBody>
+          <a:bodyPr rtlCol="0" anchor="ctr"/>
+          <a:lstStyle/>
+          <a:p>
+            <a:pPr algn="ctr"/>
+          </a:p>
+        </p:txBody>
+      </p:sp>
+      <p:sp>
+        <p:nvSpPr>
+          <p:cNvPr id="14" name="TextBox 13"/>
           <p:cNvSpPr txBox="1"/>
           <p:nvPr/>
         </p:nvSpPr>
         <p:spPr>
           <a:xfrm>
-            <a:off x="2788920" y="4114800"/>
+            <a:off x="6739128" y="4114800"/>
             <a:ext cx="658368" cy="658368"/>
           </a:xfrm>
           <a:prstGeom prst="rect">
@@ -19185,20 +19878,20 @@
                 </a:solidFill>
                 <a:latin typeface="Outfit 1 Bold"/>
               </a:rPr>
-              <a:t>01</a:t>
-            </a:r>
-          </a:p>
-        </p:txBody>
-      </p:sp>
-      <p:sp>
-        <p:nvSpPr>
-          <p:cNvPr id="9" name="TextBox 8"/>
+              <a:t>02</a:t>
+            </a:r>
+          </a:p>
+        </p:txBody>
+      </p:sp>
+      <p:sp>
+        <p:nvSpPr>
+          <p:cNvPr id="15" name="TextBox 14"/>
           <p:cNvSpPr txBox="1"/>
           <p:nvPr/>
         </p:nvSpPr>
         <p:spPr>
           <a:xfrm>
-            <a:off x="1554480" y="5212080"/>
+            <a:off x="5504688" y="5212080"/>
             <a:ext cx="3136392" cy="482600"/>
           </a:xfrm>
           <a:prstGeom prst="rect">
@@ -19224,20 +19917,20 @@
                 </a:solidFill>
                 <a:latin typeface="Outfit 1 Bold"/>
               </a:rPr>
-              <a:t>MONTA SUA LOJA</a:t>
-            </a:r>
-          </a:p>
-        </p:txBody>
-      </p:sp>
-      <p:sp>
-        <p:nvSpPr>
-          <p:cNvPr id="10" name="TextBox 9"/>
+              <a:t>FAZ UMA PAUSA</a:t>
+            </a:r>
+          </a:p>
+        </p:txBody>
+      </p:sp>
+      <p:sp>
+        <p:nvSpPr>
+          <p:cNvPr id="16" name="TextBox 15"/>
           <p:cNvSpPr txBox="1"/>
           <p:nvPr/>
         </p:nvSpPr>
         <p:spPr>
           <a:xfrm>
-            <a:off x="1554480" y="5989320"/>
+            <a:off x="5504688" y="5989320"/>
             <a:ext cx="3136392" cy="2011680"/>
           </a:xfrm>
           <a:prstGeom prst="rect">
@@ -19263,23 +19956,23 @@
                 </a:solidFill>
                 <a:latin typeface="Outfit 1"/>
               </a:rPr>
-              <a:t>Sai do papel de funcionária e assume uma trajetória própria.</a:t>
-            </a:r>
-          </a:p>
-        </p:txBody>
-      </p:sp>
-      <p:sp>
-        <p:nvSpPr>
-          <p:cNvPr id="11" name="Rectangle 10"/>
+              <a:t>Escolhe a maternidade, reorganiza a vida e se fortalece.</a:t>
+            </a:r>
+          </a:p>
+        </p:txBody>
+      </p:sp>
+      <p:sp>
+        <p:nvSpPr>
+          <p:cNvPr id="17" name="Oval 16"/>
           <p:cNvSpPr/>
           <p:nvPr/>
         </p:nvSpPr>
         <p:spPr>
           <a:xfrm>
-            <a:off x="5020056" y="5870448"/>
-            <a:ext cx="155448" cy="45720"/>
-          </a:xfrm>
-          <a:prstGeom prst="rect">
+            <a:off x="8997696" y="5815584"/>
+            <a:ext cx="146304" cy="146304"/>
+          </a:xfrm>
+          <a:prstGeom prst="ellipse">
             <a:avLst/>
           </a:prstGeom>
           <a:solidFill>
@@ -19314,17 +20007,19 @@
       </p:sp>
       <p:sp>
         <p:nvSpPr>
-          <p:cNvPr id="12" name="Rectangle 11"/>
+          <p:cNvPr id="18" name="Rounded Rectangle 17"/>
           <p:cNvSpPr/>
           <p:nvPr/>
         </p:nvSpPr>
         <p:spPr>
           <a:xfrm>
-            <a:off x="5230368" y="3566160"/>
+            <a:off x="9180576" y="3566160"/>
             <a:ext cx="3685032" cy="4663440"/>
           </a:xfrm>
-          <a:prstGeom prst="rect">
-            <a:avLst/>
+          <a:prstGeom prst="roundRect">
+            <a:avLst>
+              <a:gd name="adj" fmla="val 5955"/>
+            </a:avLst>
           </a:prstGeom>
           <a:solidFill>
             <a:srgbClr val="E5E4DF"/>
@@ -19358,17 +20053,316 @@
       </p:sp>
       <p:sp>
         <p:nvSpPr>
-          <p:cNvPr id="13" name="Rectangle 12"/>
+          <p:cNvPr id="19" name="Rounded Rectangle 18"/>
           <p:cNvSpPr/>
           <p:nvPr/>
         </p:nvSpPr>
         <p:spPr>
           <a:xfrm>
-            <a:off x="5241341" y="3577133"/>
+            <a:off x="9191549" y="3577133"/>
             <a:ext cx="3663086" cy="4641494"/>
           </a:xfrm>
-          <a:prstGeom prst="rect">
-            <a:avLst/>
+          <a:prstGeom prst="roundRect">
+            <a:avLst>
+              <a:gd name="adj" fmla="val 5691"/>
+            </a:avLst>
+          </a:prstGeom>
+          <a:solidFill>
+            <a:srgbClr val="FFFFFF"/>
+          </a:solidFill>
+          <a:ln>
+            <a:noFill/>
+          </a:ln>
+          <a:effectLst/>
+        </p:spPr>
+        <p:style>
+          <a:lnRef idx="1">
+            <a:schemeClr val="accent1"/>
+          </a:lnRef>
+          <a:fillRef idx="3">
+            <a:schemeClr val="accent1"/>
+          </a:fillRef>
+          <a:effectRef idx="2">
+            <a:schemeClr val="accent1"/>
+          </a:effectRef>
+          <a:fontRef idx="minor">
+            <a:schemeClr val="lt1"/>
+          </a:fontRef>
+        </p:style>
+        <p:txBody>
+          <a:bodyPr rtlCol="0" anchor="ctr"/>
+          <a:lstStyle/>
+          <a:p>
+            <a:pPr algn="ctr"/>
+          </a:p>
+        </p:txBody>
+      </p:sp>
+      <p:sp>
+        <p:nvSpPr>
+          <p:cNvPr id="20" name="Oval 19"/>
+          <p:cNvSpPr/>
+          <p:nvPr/>
+        </p:nvSpPr>
+        <p:spPr>
+          <a:xfrm>
+            <a:off x="10689336" y="4114800"/>
+            <a:ext cx="658368" cy="658368"/>
+          </a:xfrm>
+          <a:prstGeom prst="ellipse">
+            <a:avLst/>
+          </a:prstGeom>
+          <a:solidFill>
+            <a:srgbClr val="E5E4DF"/>
+          </a:solidFill>
+          <a:ln>
+            <a:noFill/>
+          </a:ln>
+          <a:effectLst/>
+        </p:spPr>
+        <p:style>
+          <a:lnRef idx="1">
+            <a:schemeClr val="accent1"/>
+          </a:lnRef>
+          <a:fillRef idx="3">
+            <a:schemeClr val="accent1"/>
+          </a:fillRef>
+          <a:effectRef idx="2">
+            <a:schemeClr val="accent1"/>
+          </a:effectRef>
+          <a:fontRef idx="minor">
+            <a:schemeClr val="lt1"/>
+          </a:fontRef>
+        </p:style>
+        <p:txBody>
+          <a:bodyPr rtlCol="0" anchor="ctr"/>
+          <a:lstStyle/>
+          <a:p>
+            <a:pPr algn="ctr"/>
+          </a:p>
+        </p:txBody>
+      </p:sp>
+      <p:sp>
+        <p:nvSpPr>
+          <p:cNvPr id="21" name="TextBox 20"/>
+          <p:cNvSpPr txBox="1"/>
+          <p:nvPr/>
+        </p:nvSpPr>
+        <p:spPr>
+          <a:xfrm>
+            <a:off x="10689336" y="4114800"/>
+            <a:ext cx="658368" cy="658368"/>
+          </a:xfrm>
+          <a:prstGeom prst="rect">
+            <a:avLst/>
+          </a:prstGeom>
+          <a:noFill/>
+        </p:spPr>
+        <p:txBody>
+          <a:bodyPr wrap="square" anchor="ctr" lIns="0" rIns="0" tIns="0" bIns="0">
+            <a:spAutoFit/>
+          </a:bodyPr>
+          <a:lstStyle/>
+          <a:p>
+            <a:pPr algn="ctr">
+              <a:lnSpc>
+                <a:spcPct val="115000"/>
+              </a:lnSpc>
+            </a:pPr>
+            <a:r>
+              <a:rPr sz="1800" b="1" i="0">
+                <a:solidFill>
+                  <a:srgbClr val="2E2E2A"/>
+                </a:solidFill>
+                <a:latin typeface="Outfit 1 Bold"/>
+              </a:rPr>
+              <a:t>03</a:t>
+            </a:r>
+          </a:p>
+        </p:txBody>
+      </p:sp>
+      <p:sp>
+        <p:nvSpPr>
+          <p:cNvPr id="22" name="TextBox 21"/>
+          <p:cNvSpPr txBox="1"/>
+          <p:nvPr/>
+        </p:nvSpPr>
+        <p:spPr>
+          <a:xfrm>
+            <a:off x="9454896" y="5212080"/>
+            <a:ext cx="3136392" cy="482600"/>
+          </a:xfrm>
+          <a:prstGeom prst="rect">
+            <a:avLst/>
+          </a:prstGeom>
+          <a:noFill/>
+        </p:spPr>
+        <p:txBody>
+          <a:bodyPr wrap="square" anchor="t" lIns="0" rIns="0" tIns="0" bIns="0">
+            <a:spAutoFit/>
+          </a:bodyPr>
+          <a:lstStyle/>
+          <a:p>
+            <a:pPr algn="ctr">
+              <a:lnSpc>
+                <a:spcPct val="118000"/>
+              </a:lnSpc>
+            </a:pPr>
+            <a:r>
+              <a:rPr sz="2000" b="1" i="0">
+                <a:solidFill>
+                  <a:srgbClr val="1A1A1A"/>
+                </a:solidFill>
+                <a:latin typeface="Outfit 1 Bold"/>
+              </a:rPr>
+              <a:t>RETORNA PELA FORMA</a:t>
+            </a:r>
+          </a:p>
+        </p:txBody>
+      </p:sp>
+      <p:sp>
+        <p:nvSpPr>
+          <p:cNvPr id="23" name="TextBox 22"/>
+          <p:cNvSpPr txBox="1"/>
+          <p:nvPr/>
+        </p:nvSpPr>
+        <p:spPr>
+          <a:xfrm>
+            <a:off x="9454896" y="5989320"/>
+            <a:ext cx="3136392" cy="2011680"/>
+          </a:xfrm>
+          <a:prstGeom prst="rect">
+            <a:avLst/>
+          </a:prstGeom>
+          <a:noFill/>
+        </p:spPr>
+        <p:txBody>
+          <a:bodyPr wrap="square" anchor="t" lIns="0" rIns="0" tIns="0" bIns="0">
+            <a:spAutoFit/>
+          </a:bodyPr>
+          <a:lstStyle/>
+          <a:p>
+            <a:pPr algn="ctr">
+              <a:lnSpc>
+                <a:spcPct val="125000"/>
+              </a:lnSpc>
+            </a:pPr>
+            <a:r>
+              <a:rPr sz="2400" b="0" i="0">
+                <a:solidFill>
+                  <a:srgbClr val="B5B5AD"/>
+                </a:solidFill>
+                <a:latin typeface="Outfit 1"/>
+              </a:rPr>
+              <a:t>Volta ao setor e reencontra o lugar onde quer construir.</a:t>
+            </a:r>
+          </a:p>
+        </p:txBody>
+      </p:sp>
+      <p:sp>
+        <p:nvSpPr>
+          <p:cNvPr id="24" name="Oval 23"/>
+          <p:cNvSpPr/>
+          <p:nvPr/>
+        </p:nvSpPr>
+        <p:spPr>
+          <a:xfrm>
+            <a:off x="12947904" y="5815584"/>
+            <a:ext cx="146304" cy="146304"/>
+          </a:xfrm>
+          <a:prstGeom prst="ellipse">
+            <a:avLst/>
+          </a:prstGeom>
+          <a:solidFill>
+            <a:srgbClr val="2E2E2A"/>
+          </a:solidFill>
+          <a:ln>
+            <a:noFill/>
+          </a:ln>
+          <a:effectLst/>
+        </p:spPr>
+        <p:style>
+          <a:lnRef idx="1">
+            <a:schemeClr val="accent1"/>
+          </a:lnRef>
+          <a:fillRef idx="3">
+            <a:schemeClr val="accent1"/>
+          </a:fillRef>
+          <a:effectRef idx="2">
+            <a:schemeClr val="accent1"/>
+          </a:effectRef>
+          <a:fontRef idx="minor">
+            <a:schemeClr val="lt1"/>
+          </a:fontRef>
+        </p:style>
+        <p:txBody>
+          <a:bodyPr rtlCol="0" anchor="ctr"/>
+          <a:lstStyle/>
+          <a:p>
+            <a:pPr algn="ctr"/>
+          </a:p>
+        </p:txBody>
+      </p:sp>
+      <p:sp>
+        <p:nvSpPr>
+          <p:cNvPr id="25" name="Rounded Rectangle 24"/>
+          <p:cNvSpPr/>
+          <p:nvPr/>
+        </p:nvSpPr>
+        <p:spPr>
+          <a:xfrm>
+            <a:off x="13130784" y="3566160"/>
+            <a:ext cx="3685032" cy="4663440"/>
+          </a:xfrm>
+          <a:prstGeom prst="roundRect">
+            <a:avLst>
+              <a:gd name="adj" fmla="val 5955"/>
+            </a:avLst>
+          </a:prstGeom>
+          <a:solidFill>
+            <a:srgbClr val="E5E4DF"/>
+          </a:solidFill>
+          <a:ln>
+            <a:noFill/>
+          </a:ln>
+          <a:effectLst/>
+        </p:spPr>
+        <p:style>
+          <a:lnRef idx="1">
+            <a:schemeClr val="accent1"/>
+          </a:lnRef>
+          <a:fillRef idx="3">
+            <a:schemeClr val="accent1"/>
+          </a:fillRef>
+          <a:effectRef idx="2">
+            <a:schemeClr val="accent1"/>
+          </a:effectRef>
+          <a:fontRef idx="minor">
+            <a:schemeClr val="lt1"/>
+          </a:fontRef>
+        </p:style>
+        <p:txBody>
+          <a:bodyPr rtlCol="0" anchor="ctr"/>
+          <a:lstStyle/>
+          <a:p>
+            <a:pPr algn="ctr"/>
+          </a:p>
+        </p:txBody>
+      </p:sp>
+      <p:sp>
+        <p:nvSpPr>
+          <p:cNvPr id="26" name="Rounded Rectangle 25"/>
+          <p:cNvSpPr/>
+          <p:nvPr/>
+        </p:nvSpPr>
+        <p:spPr>
+          <a:xfrm>
+            <a:off x="13141757" y="3577133"/>
+            <a:ext cx="3663086" cy="4641494"/>
+          </a:xfrm>
+          <a:prstGeom prst="roundRect">
+            <a:avLst>
+              <a:gd name="adj" fmla="val 5691"/>
+            </a:avLst>
           </a:prstGeom>
           <a:solidFill>
             <a:srgbClr val="EDEDDD"/>
@@ -19402,16 +20396,16 @@
       </p:sp>
       <p:sp>
         <p:nvSpPr>
-          <p:cNvPr id="14" name="Rectangle 13"/>
+          <p:cNvPr id="27" name="Oval 26"/>
           <p:cNvSpPr/>
           <p:nvPr/>
         </p:nvSpPr>
         <p:spPr>
           <a:xfrm>
-            <a:off x="5230368" y="3566160"/>
-            <a:ext cx="3685032" cy="73152"/>
-          </a:xfrm>
-          <a:prstGeom prst="rect">
+            <a:off x="14639544" y="4114800"/>
+            <a:ext cx="658368" cy="658368"/>
+          </a:xfrm>
+          <a:prstGeom prst="ellipse">
             <a:avLst/>
           </a:prstGeom>
           <a:solidFill>
@@ -19446,57 +20440,13 @@
       </p:sp>
       <p:sp>
         <p:nvSpPr>
-          <p:cNvPr id="15" name="Oval 14"/>
-          <p:cNvSpPr/>
-          <p:nvPr/>
-        </p:nvSpPr>
-        <p:spPr>
-          <a:xfrm>
-            <a:off x="6739128" y="4114800"/>
-            <a:ext cx="658368" cy="658368"/>
-          </a:xfrm>
-          <a:prstGeom prst="ellipse">
-            <a:avLst/>
-          </a:prstGeom>
-          <a:solidFill>
-            <a:srgbClr val="E5E4DF"/>
-          </a:solidFill>
-          <a:ln>
-            <a:noFill/>
-          </a:ln>
-          <a:effectLst/>
-        </p:spPr>
-        <p:style>
-          <a:lnRef idx="1">
-            <a:schemeClr val="accent1"/>
-          </a:lnRef>
-          <a:fillRef idx="3">
-            <a:schemeClr val="accent1"/>
-          </a:fillRef>
-          <a:effectRef idx="2">
-            <a:schemeClr val="accent1"/>
-          </a:effectRef>
-          <a:fontRef idx="minor">
-            <a:schemeClr val="lt1"/>
-          </a:fontRef>
-        </p:style>
-        <p:txBody>
-          <a:bodyPr rtlCol="0" anchor="ctr"/>
-          <a:lstStyle/>
-          <a:p>
-            <a:pPr algn="ctr"/>
-          </a:p>
-        </p:txBody>
-      </p:sp>
-      <p:sp>
-        <p:nvSpPr>
-          <p:cNvPr id="16" name="TextBox 15"/>
+          <p:cNvPr id="28" name="TextBox 27"/>
           <p:cNvSpPr txBox="1"/>
           <p:nvPr/>
         </p:nvSpPr>
         <p:spPr>
           <a:xfrm>
-            <a:off x="6739128" y="4114800"/>
+            <a:off x="14639544" y="4114800"/>
             <a:ext cx="658368" cy="658368"/>
           </a:xfrm>
           <a:prstGeom prst="rect">
@@ -19518,24 +20468,24 @@
             <a:r>
               <a:rPr sz="1800" b="1" i="0">
                 <a:solidFill>
-                  <a:srgbClr val="2E2E2A"/>
+                  <a:srgbClr val="FFFFFF"/>
                 </a:solidFill>
                 <a:latin typeface="Outfit 1 Bold"/>
               </a:rPr>
-              <a:t>02</a:t>
-            </a:r>
-          </a:p>
-        </p:txBody>
-      </p:sp>
-      <p:sp>
-        <p:nvSpPr>
-          <p:cNvPr id="17" name="TextBox 16"/>
+              <a:t>04</a:t>
+            </a:r>
+          </a:p>
+        </p:txBody>
+      </p:sp>
+      <p:sp>
+        <p:nvSpPr>
+          <p:cNvPr id="29" name="TextBox 28"/>
           <p:cNvSpPr txBox="1"/>
           <p:nvPr/>
         </p:nvSpPr>
         <p:spPr>
           <a:xfrm>
-            <a:off x="5504688" y="5212080"/>
+            <a:off x="13405104" y="5212080"/>
             <a:ext cx="3136392" cy="482600"/>
           </a:xfrm>
           <a:prstGeom prst="rect">
@@ -19561,20 +20511,20 @@
                 </a:solidFill>
                 <a:latin typeface="Outfit 1 Bold"/>
               </a:rPr>
-              <a:t>FAZ UMA PAUSA</a:t>
-            </a:r>
-          </a:p>
-        </p:txBody>
-      </p:sp>
-      <p:sp>
-        <p:nvSpPr>
-          <p:cNvPr id="18" name="TextBox 17"/>
+              <a:t>CRIA A MY HOME</a:t>
+            </a:r>
+          </a:p>
+        </p:txBody>
+      </p:sp>
+      <p:sp>
+        <p:nvSpPr>
+          <p:cNvPr id="30" name="TextBox 29"/>
           <p:cNvSpPr txBox="1"/>
           <p:nvPr/>
         </p:nvSpPr>
         <p:spPr>
           <a:xfrm>
-            <a:off x="5504688" y="5989320"/>
+            <a:off x="13405104" y="5989320"/>
             <a:ext cx="3136392" cy="2011680"/>
           </a:xfrm>
           <a:prstGeom prst="rect">
@@ -19600,680 +20550,6 @@
                 </a:solidFill>
                 <a:latin typeface="Outfit 1"/>
               </a:rPr>
-              <a:t>Escolhe a maternidade, reorganiza a vida e se fortalece.</a:t>
-            </a:r>
-          </a:p>
-        </p:txBody>
-      </p:sp>
-      <p:sp>
-        <p:nvSpPr>
-          <p:cNvPr id="19" name="Rectangle 18"/>
-          <p:cNvSpPr/>
-          <p:nvPr/>
-        </p:nvSpPr>
-        <p:spPr>
-          <a:xfrm>
-            <a:off x="8970264" y="5870448"/>
-            <a:ext cx="155448" cy="45720"/>
-          </a:xfrm>
-          <a:prstGeom prst="rect">
-            <a:avLst/>
-          </a:prstGeom>
-          <a:solidFill>
-            <a:srgbClr val="2E2E2A"/>
-          </a:solidFill>
-          <a:ln>
-            <a:noFill/>
-          </a:ln>
-          <a:effectLst/>
-        </p:spPr>
-        <p:style>
-          <a:lnRef idx="1">
-            <a:schemeClr val="accent1"/>
-          </a:lnRef>
-          <a:fillRef idx="3">
-            <a:schemeClr val="accent1"/>
-          </a:fillRef>
-          <a:effectRef idx="2">
-            <a:schemeClr val="accent1"/>
-          </a:effectRef>
-          <a:fontRef idx="minor">
-            <a:schemeClr val="lt1"/>
-          </a:fontRef>
-        </p:style>
-        <p:txBody>
-          <a:bodyPr rtlCol="0" anchor="ctr"/>
-          <a:lstStyle/>
-          <a:p>
-            <a:pPr algn="ctr"/>
-          </a:p>
-        </p:txBody>
-      </p:sp>
-      <p:sp>
-        <p:nvSpPr>
-          <p:cNvPr id="20" name="Rectangle 19"/>
-          <p:cNvSpPr/>
-          <p:nvPr/>
-        </p:nvSpPr>
-        <p:spPr>
-          <a:xfrm>
-            <a:off x="9180576" y="3566160"/>
-            <a:ext cx="3685032" cy="4663440"/>
-          </a:xfrm>
-          <a:prstGeom prst="rect">
-            <a:avLst/>
-          </a:prstGeom>
-          <a:solidFill>
-            <a:srgbClr val="E5E4DF"/>
-          </a:solidFill>
-          <a:ln>
-            <a:noFill/>
-          </a:ln>
-          <a:effectLst/>
-        </p:spPr>
-        <p:style>
-          <a:lnRef idx="1">
-            <a:schemeClr val="accent1"/>
-          </a:lnRef>
-          <a:fillRef idx="3">
-            <a:schemeClr val="accent1"/>
-          </a:fillRef>
-          <a:effectRef idx="2">
-            <a:schemeClr val="accent1"/>
-          </a:effectRef>
-          <a:fontRef idx="minor">
-            <a:schemeClr val="lt1"/>
-          </a:fontRef>
-        </p:style>
-        <p:txBody>
-          <a:bodyPr rtlCol="0" anchor="ctr"/>
-          <a:lstStyle/>
-          <a:p>
-            <a:pPr algn="ctr"/>
-          </a:p>
-        </p:txBody>
-      </p:sp>
-      <p:sp>
-        <p:nvSpPr>
-          <p:cNvPr id="21" name="Rectangle 20"/>
-          <p:cNvSpPr/>
-          <p:nvPr/>
-        </p:nvSpPr>
-        <p:spPr>
-          <a:xfrm>
-            <a:off x="9191549" y="3577133"/>
-            <a:ext cx="3663086" cy="4641494"/>
-          </a:xfrm>
-          <a:prstGeom prst="rect">
-            <a:avLst/>
-          </a:prstGeom>
-          <a:solidFill>
-            <a:srgbClr val="FFFFFF"/>
-          </a:solidFill>
-          <a:ln>
-            <a:noFill/>
-          </a:ln>
-          <a:effectLst/>
-        </p:spPr>
-        <p:style>
-          <a:lnRef idx="1">
-            <a:schemeClr val="accent1"/>
-          </a:lnRef>
-          <a:fillRef idx="3">
-            <a:schemeClr val="accent1"/>
-          </a:fillRef>
-          <a:effectRef idx="2">
-            <a:schemeClr val="accent1"/>
-          </a:effectRef>
-          <a:fontRef idx="minor">
-            <a:schemeClr val="lt1"/>
-          </a:fontRef>
-        </p:style>
-        <p:txBody>
-          <a:bodyPr rtlCol="0" anchor="ctr"/>
-          <a:lstStyle/>
-          <a:p>
-            <a:pPr algn="ctr"/>
-          </a:p>
-        </p:txBody>
-      </p:sp>
-      <p:sp>
-        <p:nvSpPr>
-          <p:cNvPr id="22" name="Rectangle 21"/>
-          <p:cNvSpPr/>
-          <p:nvPr/>
-        </p:nvSpPr>
-        <p:spPr>
-          <a:xfrm>
-            <a:off x="9180576" y="3566160"/>
-            <a:ext cx="3685032" cy="73152"/>
-          </a:xfrm>
-          <a:prstGeom prst="rect">
-            <a:avLst/>
-          </a:prstGeom>
-          <a:solidFill>
-            <a:srgbClr val="2E2E2A"/>
-          </a:solidFill>
-          <a:ln>
-            <a:noFill/>
-          </a:ln>
-          <a:effectLst/>
-        </p:spPr>
-        <p:style>
-          <a:lnRef idx="1">
-            <a:schemeClr val="accent1"/>
-          </a:lnRef>
-          <a:fillRef idx="3">
-            <a:schemeClr val="accent1"/>
-          </a:fillRef>
-          <a:effectRef idx="2">
-            <a:schemeClr val="accent1"/>
-          </a:effectRef>
-          <a:fontRef idx="minor">
-            <a:schemeClr val="lt1"/>
-          </a:fontRef>
-        </p:style>
-        <p:txBody>
-          <a:bodyPr rtlCol="0" anchor="ctr"/>
-          <a:lstStyle/>
-          <a:p>
-            <a:pPr algn="ctr"/>
-          </a:p>
-        </p:txBody>
-      </p:sp>
-      <p:sp>
-        <p:nvSpPr>
-          <p:cNvPr id="23" name="Oval 22"/>
-          <p:cNvSpPr/>
-          <p:nvPr/>
-        </p:nvSpPr>
-        <p:spPr>
-          <a:xfrm>
-            <a:off x="10689336" y="4114800"/>
-            <a:ext cx="658368" cy="658368"/>
-          </a:xfrm>
-          <a:prstGeom prst="ellipse">
-            <a:avLst/>
-          </a:prstGeom>
-          <a:solidFill>
-            <a:srgbClr val="E5E4DF"/>
-          </a:solidFill>
-          <a:ln>
-            <a:noFill/>
-          </a:ln>
-          <a:effectLst/>
-        </p:spPr>
-        <p:style>
-          <a:lnRef idx="1">
-            <a:schemeClr val="accent1"/>
-          </a:lnRef>
-          <a:fillRef idx="3">
-            <a:schemeClr val="accent1"/>
-          </a:fillRef>
-          <a:effectRef idx="2">
-            <a:schemeClr val="accent1"/>
-          </a:effectRef>
-          <a:fontRef idx="minor">
-            <a:schemeClr val="lt1"/>
-          </a:fontRef>
-        </p:style>
-        <p:txBody>
-          <a:bodyPr rtlCol="0" anchor="ctr"/>
-          <a:lstStyle/>
-          <a:p>
-            <a:pPr algn="ctr"/>
-          </a:p>
-        </p:txBody>
-      </p:sp>
-      <p:sp>
-        <p:nvSpPr>
-          <p:cNvPr id="24" name="TextBox 23"/>
-          <p:cNvSpPr txBox="1"/>
-          <p:nvPr/>
-        </p:nvSpPr>
-        <p:spPr>
-          <a:xfrm>
-            <a:off x="10689336" y="4114800"/>
-            <a:ext cx="658368" cy="658368"/>
-          </a:xfrm>
-          <a:prstGeom prst="rect">
-            <a:avLst/>
-          </a:prstGeom>
-          <a:noFill/>
-        </p:spPr>
-        <p:txBody>
-          <a:bodyPr wrap="square" anchor="ctr" lIns="0" rIns="0" tIns="0" bIns="0">
-            <a:spAutoFit/>
-          </a:bodyPr>
-          <a:lstStyle/>
-          <a:p>
-            <a:pPr algn="ctr">
-              <a:lnSpc>
-                <a:spcPct val="115000"/>
-              </a:lnSpc>
-            </a:pPr>
-            <a:r>
-              <a:rPr sz="1800" b="1" i="0">
-                <a:solidFill>
-                  <a:srgbClr val="2E2E2A"/>
-                </a:solidFill>
-                <a:latin typeface="Outfit 1 Bold"/>
-              </a:rPr>
-              <a:t>03</a:t>
-            </a:r>
-          </a:p>
-        </p:txBody>
-      </p:sp>
-      <p:sp>
-        <p:nvSpPr>
-          <p:cNvPr id="25" name="TextBox 24"/>
-          <p:cNvSpPr txBox="1"/>
-          <p:nvPr/>
-        </p:nvSpPr>
-        <p:spPr>
-          <a:xfrm>
-            <a:off x="9454896" y="5212080"/>
-            <a:ext cx="3136392" cy="482600"/>
-          </a:xfrm>
-          <a:prstGeom prst="rect">
-            <a:avLst/>
-          </a:prstGeom>
-          <a:noFill/>
-        </p:spPr>
-        <p:txBody>
-          <a:bodyPr wrap="square" anchor="t" lIns="0" rIns="0" tIns="0" bIns="0">
-            <a:spAutoFit/>
-          </a:bodyPr>
-          <a:lstStyle/>
-          <a:p>
-            <a:pPr algn="ctr">
-              <a:lnSpc>
-                <a:spcPct val="118000"/>
-              </a:lnSpc>
-            </a:pPr>
-            <a:r>
-              <a:rPr sz="2000" b="1" i="0">
-                <a:solidFill>
-                  <a:srgbClr val="1A1A1A"/>
-                </a:solidFill>
-                <a:latin typeface="Outfit 1 Bold"/>
-              </a:rPr>
-              <a:t>RETORNA PELA FORMA</a:t>
-            </a:r>
-          </a:p>
-        </p:txBody>
-      </p:sp>
-      <p:sp>
-        <p:nvSpPr>
-          <p:cNvPr id="26" name="TextBox 25"/>
-          <p:cNvSpPr txBox="1"/>
-          <p:nvPr/>
-        </p:nvSpPr>
-        <p:spPr>
-          <a:xfrm>
-            <a:off x="9454896" y="5989320"/>
-            <a:ext cx="3136392" cy="2011680"/>
-          </a:xfrm>
-          <a:prstGeom prst="rect">
-            <a:avLst/>
-          </a:prstGeom>
-          <a:noFill/>
-        </p:spPr>
-        <p:txBody>
-          <a:bodyPr wrap="square" anchor="t" lIns="0" rIns="0" tIns="0" bIns="0">
-            <a:spAutoFit/>
-          </a:bodyPr>
-          <a:lstStyle/>
-          <a:p>
-            <a:pPr algn="ctr">
-              <a:lnSpc>
-                <a:spcPct val="125000"/>
-              </a:lnSpc>
-            </a:pPr>
-            <a:r>
-              <a:rPr sz="2400" b="0" i="0">
-                <a:solidFill>
-                  <a:srgbClr val="B5B5AD"/>
-                </a:solidFill>
-                <a:latin typeface="Outfit 1"/>
-              </a:rPr>
-              <a:t>Volta ao setor e reencontra o lugar onde quer construir.</a:t>
-            </a:r>
-          </a:p>
-        </p:txBody>
-      </p:sp>
-      <p:sp>
-        <p:nvSpPr>
-          <p:cNvPr id="27" name="Rectangle 26"/>
-          <p:cNvSpPr/>
-          <p:nvPr/>
-        </p:nvSpPr>
-        <p:spPr>
-          <a:xfrm>
-            <a:off x="12920472" y="5870448"/>
-            <a:ext cx="155448" cy="45720"/>
-          </a:xfrm>
-          <a:prstGeom prst="rect">
-            <a:avLst/>
-          </a:prstGeom>
-          <a:solidFill>
-            <a:srgbClr val="2E2E2A"/>
-          </a:solidFill>
-          <a:ln>
-            <a:noFill/>
-          </a:ln>
-          <a:effectLst/>
-        </p:spPr>
-        <p:style>
-          <a:lnRef idx="1">
-            <a:schemeClr val="accent1"/>
-          </a:lnRef>
-          <a:fillRef idx="3">
-            <a:schemeClr val="accent1"/>
-          </a:fillRef>
-          <a:effectRef idx="2">
-            <a:schemeClr val="accent1"/>
-          </a:effectRef>
-          <a:fontRef idx="minor">
-            <a:schemeClr val="lt1"/>
-          </a:fontRef>
-        </p:style>
-        <p:txBody>
-          <a:bodyPr rtlCol="0" anchor="ctr"/>
-          <a:lstStyle/>
-          <a:p>
-            <a:pPr algn="ctr"/>
-          </a:p>
-        </p:txBody>
-      </p:sp>
-      <p:sp>
-        <p:nvSpPr>
-          <p:cNvPr id="28" name="Rectangle 27"/>
-          <p:cNvSpPr/>
-          <p:nvPr/>
-        </p:nvSpPr>
-        <p:spPr>
-          <a:xfrm>
-            <a:off x="13130784" y="3566160"/>
-            <a:ext cx="3685032" cy="4663440"/>
-          </a:xfrm>
-          <a:prstGeom prst="rect">
-            <a:avLst/>
-          </a:prstGeom>
-          <a:solidFill>
-            <a:srgbClr val="E5E4DF"/>
-          </a:solidFill>
-          <a:ln>
-            <a:noFill/>
-          </a:ln>
-          <a:effectLst/>
-        </p:spPr>
-        <p:style>
-          <a:lnRef idx="1">
-            <a:schemeClr val="accent1"/>
-          </a:lnRef>
-          <a:fillRef idx="3">
-            <a:schemeClr val="accent1"/>
-          </a:fillRef>
-          <a:effectRef idx="2">
-            <a:schemeClr val="accent1"/>
-          </a:effectRef>
-          <a:fontRef idx="minor">
-            <a:schemeClr val="lt1"/>
-          </a:fontRef>
-        </p:style>
-        <p:txBody>
-          <a:bodyPr rtlCol="0" anchor="ctr"/>
-          <a:lstStyle/>
-          <a:p>
-            <a:pPr algn="ctr"/>
-          </a:p>
-        </p:txBody>
-      </p:sp>
-      <p:sp>
-        <p:nvSpPr>
-          <p:cNvPr id="29" name="Rectangle 28"/>
-          <p:cNvSpPr/>
-          <p:nvPr/>
-        </p:nvSpPr>
-        <p:spPr>
-          <a:xfrm>
-            <a:off x="13141757" y="3577133"/>
-            <a:ext cx="3663086" cy="4641494"/>
-          </a:xfrm>
-          <a:prstGeom prst="rect">
-            <a:avLst/>
-          </a:prstGeom>
-          <a:solidFill>
-            <a:srgbClr val="EDEDDD"/>
-          </a:solidFill>
-          <a:ln>
-            <a:noFill/>
-          </a:ln>
-          <a:effectLst/>
-        </p:spPr>
-        <p:style>
-          <a:lnRef idx="1">
-            <a:schemeClr val="accent1"/>
-          </a:lnRef>
-          <a:fillRef idx="3">
-            <a:schemeClr val="accent1"/>
-          </a:fillRef>
-          <a:effectRef idx="2">
-            <a:schemeClr val="accent1"/>
-          </a:effectRef>
-          <a:fontRef idx="minor">
-            <a:schemeClr val="lt1"/>
-          </a:fontRef>
-        </p:style>
-        <p:txBody>
-          <a:bodyPr rtlCol="0" anchor="ctr"/>
-          <a:lstStyle/>
-          <a:p>
-            <a:pPr algn="ctr"/>
-          </a:p>
-        </p:txBody>
-      </p:sp>
-      <p:sp>
-        <p:nvSpPr>
-          <p:cNvPr id="30" name="Rectangle 29"/>
-          <p:cNvSpPr/>
-          <p:nvPr/>
-        </p:nvSpPr>
-        <p:spPr>
-          <a:xfrm>
-            <a:off x="13130784" y="3566160"/>
-            <a:ext cx="3685032" cy="73152"/>
-          </a:xfrm>
-          <a:prstGeom prst="rect">
-            <a:avLst/>
-          </a:prstGeom>
-          <a:solidFill>
-            <a:srgbClr val="2E2E2A"/>
-          </a:solidFill>
-          <a:ln>
-            <a:noFill/>
-          </a:ln>
-          <a:effectLst/>
-        </p:spPr>
-        <p:style>
-          <a:lnRef idx="1">
-            <a:schemeClr val="accent1"/>
-          </a:lnRef>
-          <a:fillRef idx="3">
-            <a:schemeClr val="accent1"/>
-          </a:fillRef>
-          <a:effectRef idx="2">
-            <a:schemeClr val="accent1"/>
-          </a:effectRef>
-          <a:fontRef idx="minor">
-            <a:schemeClr val="lt1"/>
-          </a:fontRef>
-        </p:style>
-        <p:txBody>
-          <a:bodyPr rtlCol="0" anchor="ctr"/>
-          <a:lstStyle/>
-          <a:p>
-            <a:pPr algn="ctr"/>
-          </a:p>
-        </p:txBody>
-      </p:sp>
-      <p:sp>
-        <p:nvSpPr>
-          <p:cNvPr id="31" name="Oval 30"/>
-          <p:cNvSpPr/>
-          <p:nvPr/>
-        </p:nvSpPr>
-        <p:spPr>
-          <a:xfrm>
-            <a:off x="14639544" y="4114800"/>
-            <a:ext cx="658368" cy="658368"/>
-          </a:xfrm>
-          <a:prstGeom prst="ellipse">
-            <a:avLst/>
-          </a:prstGeom>
-          <a:solidFill>
-            <a:srgbClr val="2E2E2A"/>
-          </a:solidFill>
-          <a:ln>
-            <a:noFill/>
-          </a:ln>
-          <a:effectLst/>
-        </p:spPr>
-        <p:style>
-          <a:lnRef idx="1">
-            <a:schemeClr val="accent1"/>
-          </a:lnRef>
-          <a:fillRef idx="3">
-            <a:schemeClr val="accent1"/>
-          </a:fillRef>
-          <a:effectRef idx="2">
-            <a:schemeClr val="accent1"/>
-          </a:effectRef>
-          <a:fontRef idx="minor">
-            <a:schemeClr val="lt1"/>
-          </a:fontRef>
-        </p:style>
-        <p:txBody>
-          <a:bodyPr rtlCol="0" anchor="ctr"/>
-          <a:lstStyle/>
-          <a:p>
-            <a:pPr algn="ctr"/>
-          </a:p>
-        </p:txBody>
-      </p:sp>
-      <p:sp>
-        <p:nvSpPr>
-          <p:cNvPr id="32" name="TextBox 31"/>
-          <p:cNvSpPr txBox="1"/>
-          <p:nvPr/>
-        </p:nvSpPr>
-        <p:spPr>
-          <a:xfrm>
-            <a:off x="14639544" y="4114800"/>
-            <a:ext cx="658368" cy="658368"/>
-          </a:xfrm>
-          <a:prstGeom prst="rect">
-            <a:avLst/>
-          </a:prstGeom>
-          <a:noFill/>
-        </p:spPr>
-        <p:txBody>
-          <a:bodyPr wrap="square" anchor="ctr" lIns="0" rIns="0" tIns="0" bIns="0">
-            <a:spAutoFit/>
-          </a:bodyPr>
-          <a:lstStyle/>
-          <a:p>
-            <a:pPr algn="ctr">
-              <a:lnSpc>
-                <a:spcPct val="115000"/>
-              </a:lnSpc>
-            </a:pPr>
-            <a:r>
-              <a:rPr sz="1800" b="1" i="0">
-                <a:solidFill>
-                  <a:srgbClr val="FFFFFF"/>
-                </a:solidFill>
-                <a:latin typeface="Outfit 1 Bold"/>
-              </a:rPr>
-              <a:t>04</a:t>
-            </a:r>
-          </a:p>
-        </p:txBody>
-      </p:sp>
-      <p:sp>
-        <p:nvSpPr>
-          <p:cNvPr id="33" name="TextBox 32"/>
-          <p:cNvSpPr txBox="1"/>
-          <p:nvPr/>
-        </p:nvSpPr>
-        <p:spPr>
-          <a:xfrm>
-            <a:off x="13405104" y="5212080"/>
-            <a:ext cx="3136392" cy="482600"/>
-          </a:xfrm>
-          <a:prstGeom prst="rect">
-            <a:avLst/>
-          </a:prstGeom>
-          <a:noFill/>
-        </p:spPr>
-        <p:txBody>
-          <a:bodyPr wrap="square" anchor="t" lIns="0" rIns="0" tIns="0" bIns="0">
-            <a:spAutoFit/>
-          </a:bodyPr>
-          <a:lstStyle/>
-          <a:p>
-            <a:pPr algn="ctr">
-              <a:lnSpc>
-                <a:spcPct val="118000"/>
-              </a:lnSpc>
-            </a:pPr>
-            <a:r>
-              <a:rPr sz="2000" b="1" i="0">
-                <a:solidFill>
-                  <a:srgbClr val="1A1A1A"/>
-                </a:solidFill>
-                <a:latin typeface="Outfit 1 Bold"/>
-              </a:rPr>
-              <a:t>CRIA A MY HOME</a:t>
-            </a:r>
-          </a:p>
-        </p:txBody>
-      </p:sp>
-      <p:sp>
-        <p:nvSpPr>
-          <p:cNvPr id="34" name="TextBox 33"/>
-          <p:cNvSpPr txBox="1"/>
-          <p:nvPr/>
-        </p:nvSpPr>
-        <p:spPr>
-          <a:xfrm>
-            <a:off x="13405104" y="5989320"/>
-            <a:ext cx="3136392" cy="2011680"/>
-          </a:xfrm>
-          <a:prstGeom prst="rect">
-            <a:avLst/>
-          </a:prstGeom>
-          <a:noFill/>
-        </p:spPr>
-        <p:txBody>
-          <a:bodyPr wrap="square" anchor="t" lIns="0" rIns="0" tIns="0" bIns="0">
-            <a:spAutoFit/>
-          </a:bodyPr>
-          <a:lstStyle/>
-          <a:p>
-            <a:pPr algn="ctr">
-              <a:lnSpc>
-                <a:spcPct val="125000"/>
-              </a:lnSpc>
-            </a:pPr>
-            <a:r>
-              <a:rPr sz="2400" b="0" i="0">
-                <a:solidFill>
-                  <a:srgbClr val="B5B5AD"/>
-                </a:solidFill>
-                <a:latin typeface="Outfit 1"/>
-              </a:rPr>
               <a:t>Transforma o descarte em nova possibilidade de negócio.</a:t>
             </a:r>
           </a:p>
@@ -20281,7 +20557,7 @@
       </p:sp>
       <p:sp>
         <p:nvSpPr>
-          <p:cNvPr id="35" name="TextBox 34"/>
+          <p:cNvPr id="31" name="TextBox 30"/>
           <p:cNvSpPr txBox="1"/>
           <p:nvPr/>
         </p:nvSpPr>
@@ -20338,7 +20614,7 @@
       </p:sp>
       <p:pic>
         <p:nvPicPr>
-          <p:cNvPr id="36" name="Picture 35" descr="logo-ka.png"/>
+          <p:cNvPr id="32" name="Picture 31" descr="logo-ka.png"/>
           <p:cNvPicPr>
             <a:picLocks noChangeAspect="1"/>
           </p:cNvPicPr>

--- a/Revelacao-de-Essencia-Flavia-Pereira-Muccelin.pptx
+++ b/Revelacao-de-Essencia-Flavia-Pereira-Muccelin.pptx
@@ -3475,7 +3475,7 @@
     <p:bg>
       <p:bgPr>
         <a:solidFill>
-          <a:srgbClr val="F6F5F0"/>
+          <a:srgbClr val="FFFFFF"/>
         </a:solidFill>
         <a:effectLst/>
       </p:bgPr>
@@ -3930,7 +3930,7 @@
     <p:bg>
       <p:bgPr>
         <a:solidFill>
-          <a:srgbClr val="F8F7F2"/>
+          <a:srgbClr val="FFFFFF"/>
         </a:solidFill>
         <a:effectLst/>
       </p:bgPr>
@@ -3999,7 +3999,7 @@
             <a:r>
               <a:rPr sz="1700" b="1" i="0" spc="120">
                 <a:solidFill>
-                  <a:srgbClr val="B5B5AD"/>
+                  <a:srgbClr val="AEAEAA"/>
                 </a:solidFill>
                 <a:latin typeface="Outfit 1 Bold"/>
               </a:rPr>
@@ -4155,7 +4155,7 @@
             <a:r>
               <a:rPr sz="2700" b="0" i="0">
                 <a:solidFill>
-                  <a:srgbClr val="B5B5AD"/>
+                  <a:srgbClr val="AEAEAA"/>
                 </a:solidFill>
                 <a:latin typeface="Outfit 1"/>
               </a:rPr>
@@ -4508,7 +4508,7 @@
     <p:bg>
       <p:bgPr>
         <a:solidFill>
-          <a:srgbClr val="F8F7F2"/>
+          <a:srgbClr val="FFFFFF"/>
         </a:solidFill>
         <a:effectLst/>
       </p:bgPr>
@@ -4550,7 +4550,7 @@
             <a:r>
               <a:rPr sz="1700" b="1" i="0" spc="120">
                 <a:solidFill>
-                  <a:srgbClr val="B5B5AD"/>
+                  <a:srgbClr val="AEAEAA"/>
                 </a:solidFill>
                 <a:latin typeface="Outfit 1 Bold"/>
               </a:rPr>
@@ -4642,7 +4642,7 @@
             </a:avLst>
           </a:prstGeom>
           <a:solidFill>
-            <a:srgbClr val="DCDBD5"/>
+            <a:srgbClr val="DBDBD9"/>
           </a:solidFill>
           <a:ln>
             <a:noFill/>
@@ -4686,7 +4686,7 @@
             <a:avLst/>
           </a:prstGeom>
           <a:solidFill>
-            <a:srgbClr val="E5E4DF"/>
+            <a:srgbClr val="E3E3E1"/>
           </a:solidFill>
           <a:ln>
             <a:noFill/>
@@ -4823,7 +4823,7 @@
             <a:r>
               <a:rPr sz="2500" b="0" i="0">
                 <a:solidFill>
-                  <a:srgbClr val="B5B5AD"/>
+                  <a:srgbClr val="AEAEAA"/>
                 </a:solidFill>
                 <a:latin typeface="Outfit 1"/>
               </a:rPr>
@@ -4847,7 +4847,7 @@
             <a:avLst/>
           </a:prstGeom>
           <a:solidFill>
-            <a:srgbClr val="E5E4DF"/>
+            <a:srgbClr val="E3E3E1"/>
           </a:solidFill>
           <a:ln>
             <a:noFill/>
@@ -4984,7 +4984,7 @@
             <a:r>
               <a:rPr sz="2500" b="0" i="0">
                 <a:solidFill>
-                  <a:srgbClr val="B5B5AD"/>
+                  <a:srgbClr val="AEAEAA"/>
                 </a:solidFill>
                 <a:latin typeface="Outfit 1"/>
               </a:rPr>
@@ -5008,7 +5008,7 @@
             <a:avLst/>
           </a:prstGeom>
           <a:solidFill>
-            <a:srgbClr val="E5E4DF"/>
+            <a:srgbClr val="E3E3E1"/>
           </a:solidFill>
           <a:ln>
             <a:noFill/>
@@ -5145,7 +5145,7 @@
             <a:r>
               <a:rPr sz="2500" b="0" i="0">
                 <a:solidFill>
-                  <a:srgbClr val="B5B5AD"/>
+                  <a:srgbClr val="AEAEAA"/>
                 </a:solidFill>
                 <a:latin typeface="Outfit 1"/>
               </a:rPr>
@@ -5306,7 +5306,7 @@
             <a:r>
               <a:rPr sz="2500" b="0" i="0">
                 <a:solidFill>
-                  <a:srgbClr val="B5B5AD"/>
+                  <a:srgbClr val="AEAEAA"/>
                 </a:solidFill>
                 <a:latin typeface="Outfit 1"/>
               </a:rPr>
@@ -5410,7 +5410,7 @@
     <p:bg>
       <p:bgPr>
         <a:solidFill>
-          <a:srgbClr val="F8F7F2"/>
+          <a:srgbClr val="FFFFFF"/>
         </a:solidFill>
         <a:effectLst/>
       </p:bgPr>
@@ -5452,7 +5452,7 @@
             <a:r>
               <a:rPr sz="1700" b="1" i="0" spc="120">
                 <a:solidFill>
-                  <a:srgbClr val="B5B5AD"/>
+                  <a:srgbClr val="AEAEAA"/>
                 </a:solidFill>
                 <a:latin typeface="Outfit 1 Bold"/>
               </a:rPr>
@@ -5517,7 +5517,7 @@
             </a:avLst>
           </a:prstGeom>
           <a:solidFill>
-            <a:srgbClr val="FFFFFF"/>
+            <a:srgbClr val="FAFAF9"/>
           </a:solidFill>
           <a:ln>
             <a:noFill/>
@@ -5661,7 +5661,7 @@
             <a:r>
               <a:rPr sz="2400" b="0" i="1">
                 <a:solidFill>
-                  <a:srgbClr val="B5B5AD"/>
+                  <a:srgbClr val="AEAEAA"/>
                 </a:solidFill>
                 <a:latin typeface="Outfit 1"/>
               </a:rPr>
@@ -5770,7 +5770,7 @@
             </a:avLst>
           </a:prstGeom>
           <a:solidFill>
-            <a:srgbClr val="EDEDDD"/>
+            <a:srgbClr val="EFEFED"/>
           </a:solidFill>
           <a:ln>
             <a:noFill/>
@@ -5914,7 +5914,7 @@
             <a:r>
               <a:rPr sz="2400" b="0" i="1">
                 <a:solidFill>
-                  <a:srgbClr val="B5B5AD"/>
+                  <a:srgbClr val="AEAEAA"/>
                 </a:solidFill>
                 <a:latin typeface="Outfit 1"/>
               </a:rPr>
@@ -6023,7 +6023,7 @@
             </a:avLst>
           </a:prstGeom>
           <a:solidFill>
-            <a:srgbClr val="FFFFFF"/>
+            <a:srgbClr val="FAFAF9"/>
           </a:solidFill>
           <a:ln>
             <a:noFill/>
@@ -6167,7 +6167,7 @@
             <a:r>
               <a:rPr sz="2400" b="0" i="1">
                 <a:solidFill>
-                  <a:srgbClr val="B5B5AD"/>
+                  <a:srgbClr val="AEAEAA"/>
                 </a:solidFill>
                 <a:latin typeface="Outfit 1"/>
               </a:rPr>
@@ -6276,7 +6276,7 @@
             </a:avLst>
           </a:prstGeom>
           <a:solidFill>
-            <a:srgbClr val="EDEDDD"/>
+            <a:srgbClr val="EFEFED"/>
           </a:solidFill>
           <a:ln>
             <a:noFill/>
@@ -6420,7 +6420,7 @@
             <a:r>
               <a:rPr sz="2400" b="0" i="1">
                 <a:solidFill>
-                  <a:srgbClr val="B5B5AD"/>
+                  <a:srgbClr val="AEAEAA"/>
                 </a:solidFill>
                 <a:latin typeface="Outfit 1"/>
               </a:rPr>
@@ -6607,7 +6607,7 @@
     <p:bg>
       <p:bgPr>
         <a:solidFill>
-          <a:srgbClr val="F8F7F2"/>
+          <a:srgbClr val="FFFFFF"/>
         </a:solidFill>
         <a:effectLst/>
       </p:bgPr>
@@ -6649,7 +6649,7 @@
             <a:r>
               <a:rPr sz="1700" b="1" i="0" spc="120">
                 <a:solidFill>
-                  <a:srgbClr val="B5B5AD"/>
+                  <a:srgbClr val="AEAEAA"/>
                 </a:solidFill>
                 <a:latin typeface="Outfit 1 Bold"/>
               </a:rPr>
@@ -6714,7 +6714,7 @@
             </a:avLst>
           </a:prstGeom>
           <a:solidFill>
-            <a:srgbClr val="E5E4DF"/>
+            <a:srgbClr val="E3E3E1"/>
           </a:solidFill>
           <a:ln>
             <a:noFill/>
@@ -6760,7 +6760,7 @@
             </a:avLst>
           </a:prstGeom>
           <a:solidFill>
-            <a:srgbClr val="FFFFFF"/>
+            <a:srgbClr val="FAFAF9"/>
           </a:solidFill>
           <a:ln>
             <a:noFill/>
@@ -6804,7 +6804,7 @@
             <a:avLst/>
           </a:prstGeom>
           <a:solidFill>
-            <a:srgbClr val="E5E4DF"/>
+            <a:srgbClr val="E3E3E1"/>
           </a:solidFill>
           <a:ln>
             <a:noFill/>
@@ -6941,7 +6941,7 @@
             <a:r>
               <a:rPr sz="2400" b="0" i="0">
                 <a:solidFill>
-                  <a:srgbClr val="B5B5AD"/>
+                  <a:srgbClr val="AEAEAA"/>
                 </a:solidFill>
                 <a:latin typeface="Outfit 1"/>
               </a:rPr>
@@ -7011,7 +7011,7 @@
             </a:avLst>
           </a:prstGeom>
           <a:solidFill>
-            <a:srgbClr val="E5E4DF"/>
+            <a:srgbClr val="E3E3E1"/>
           </a:solidFill>
           <a:ln>
             <a:noFill/>
@@ -7057,7 +7057,7 @@
             </a:avLst>
           </a:prstGeom>
           <a:solidFill>
-            <a:srgbClr val="EDEDDD"/>
+            <a:srgbClr val="EFEFED"/>
           </a:solidFill>
           <a:ln>
             <a:noFill/>
@@ -7101,7 +7101,7 @@
             <a:avLst/>
           </a:prstGeom>
           <a:solidFill>
-            <a:srgbClr val="E5E4DF"/>
+            <a:srgbClr val="E3E3E1"/>
           </a:solidFill>
           <a:ln>
             <a:noFill/>
@@ -7238,7 +7238,7 @@
             <a:r>
               <a:rPr sz="2400" b="0" i="0">
                 <a:solidFill>
-                  <a:srgbClr val="B5B5AD"/>
+                  <a:srgbClr val="AEAEAA"/>
                 </a:solidFill>
                 <a:latin typeface="Outfit 1"/>
               </a:rPr>
@@ -7308,7 +7308,7 @@
             </a:avLst>
           </a:prstGeom>
           <a:solidFill>
-            <a:srgbClr val="E5E4DF"/>
+            <a:srgbClr val="E3E3E1"/>
           </a:solidFill>
           <a:ln>
             <a:noFill/>
@@ -7354,7 +7354,7 @@
             </a:avLst>
           </a:prstGeom>
           <a:solidFill>
-            <a:srgbClr val="FFFFFF"/>
+            <a:srgbClr val="FAFAF9"/>
           </a:solidFill>
           <a:ln>
             <a:noFill/>
@@ -7398,7 +7398,7 @@
             <a:avLst/>
           </a:prstGeom>
           <a:solidFill>
-            <a:srgbClr val="E5E4DF"/>
+            <a:srgbClr val="E3E3E1"/>
           </a:solidFill>
           <a:ln>
             <a:noFill/>
@@ -7535,7 +7535,7 @@
             <a:r>
               <a:rPr sz="2400" b="0" i="0">
                 <a:solidFill>
-                  <a:srgbClr val="B5B5AD"/>
+                  <a:srgbClr val="AEAEAA"/>
                 </a:solidFill>
                 <a:latin typeface="Outfit 1"/>
               </a:rPr>
@@ -7605,7 +7605,7 @@
             </a:avLst>
           </a:prstGeom>
           <a:solidFill>
-            <a:srgbClr val="E5E4DF"/>
+            <a:srgbClr val="E3E3E1"/>
           </a:solidFill>
           <a:ln>
             <a:noFill/>
@@ -7651,7 +7651,7 @@
             </a:avLst>
           </a:prstGeom>
           <a:solidFill>
-            <a:srgbClr val="EDEDDD"/>
+            <a:srgbClr val="EFEFED"/>
           </a:solidFill>
           <a:ln>
             <a:noFill/>
@@ -7832,7 +7832,7 @@
             <a:r>
               <a:rPr sz="2400" b="0" i="0">
                 <a:solidFill>
-                  <a:srgbClr val="B5B5AD"/>
+                  <a:srgbClr val="AEAEAA"/>
                 </a:solidFill>
                 <a:latin typeface="Outfit 1"/>
               </a:rPr>
@@ -7936,7 +7936,7 @@
     <p:bg>
       <p:bgPr>
         <a:solidFill>
-          <a:srgbClr val="F8F7F2"/>
+          <a:srgbClr val="FFFFFF"/>
         </a:solidFill>
         <a:effectLst/>
       </p:bgPr>
@@ -7978,7 +7978,7 @@
             <a:r>
               <a:rPr sz="1700" b="1" i="0" spc="120">
                 <a:solidFill>
-                  <a:srgbClr val="B5B5AD"/>
+                  <a:srgbClr val="AEAEAA"/>
                 </a:solidFill>
                 <a:latin typeface="Outfit 1 Bold"/>
               </a:rPr>
@@ -8070,7 +8070,7 @@
             </a:avLst>
           </a:prstGeom>
           <a:solidFill>
-            <a:srgbClr val="E5E4DF"/>
+            <a:srgbClr val="E3E3E1"/>
           </a:solidFill>
           <a:ln>
             <a:noFill/>
@@ -8116,7 +8116,7 @@
             </a:avLst>
           </a:prstGeom>
           <a:solidFill>
-            <a:srgbClr val="FFFFFF"/>
+            <a:srgbClr val="FAFAF9"/>
           </a:solidFill>
           <a:ln>
             <a:noFill/>
@@ -8260,7 +8260,7 @@
             <a:r>
               <a:rPr sz="2400" b="0" i="0">
                 <a:solidFill>
-                  <a:srgbClr val="B5B5AD"/>
+                  <a:srgbClr val="AEAEAA"/>
                 </a:solidFill>
                 <a:latin typeface="Outfit 1"/>
               </a:rPr>
@@ -8286,7 +8286,7 @@
             </a:avLst>
           </a:prstGeom>
           <a:solidFill>
-            <a:srgbClr val="E5E4DF"/>
+            <a:srgbClr val="E3E3E1"/>
           </a:solidFill>
           <a:ln>
             <a:noFill/>
@@ -8332,7 +8332,7 @@
             </a:avLst>
           </a:prstGeom>
           <a:solidFill>
-            <a:srgbClr val="EDEDDD"/>
+            <a:srgbClr val="EFEFED"/>
           </a:solidFill>
           <a:ln>
             <a:noFill/>
@@ -8476,7 +8476,7 @@
             <a:r>
               <a:rPr sz="2400" b="0" i="0">
                 <a:solidFill>
-                  <a:srgbClr val="B5B5AD"/>
+                  <a:srgbClr val="AEAEAA"/>
                 </a:solidFill>
                 <a:latin typeface="Outfit 1"/>
               </a:rPr>
@@ -8502,7 +8502,7 @@
             </a:avLst>
           </a:prstGeom>
           <a:solidFill>
-            <a:srgbClr val="E5E4DF"/>
+            <a:srgbClr val="E3E3E1"/>
           </a:solidFill>
           <a:ln>
             <a:noFill/>
@@ -8548,7 +8548,7 @@
             </a:avLst>
           </a:prstGeom>
           <a:solidFill>
-            <a:srgbClr val="FFFFFF"/>
+            <a:srgbClr val="FAFAF9"/>
           </a:solidFill>
           <a:ln>
             <a:noFill/>
@@ -8692,7 +8692,7 @@
             <a:r>
               <a:rPr sz="2400" b="0" i="0">
                 <a:solidFill>
-                  <a:srgbClr val="B5B5AD"/>
+                  <a:srgbClr val="AEAEAA"/>
                 </a:solidFill>
                 <a:latin typeface="Outfit 1"/>
               </a:rPr>
@@ -8718,7 +8718,7 @@
             </a:avLst>
           </a:prstGeom>
           <a:solidFill>
-            <a:srgbClr val="E5E4DF"/>
+            <a:srgbClr val="E3E3E1"/>
           </a:solidFill>
           <a:ln>
             <a:noFill/>
@@ -8764,7 +8764,7 @@
             </a:avLst>
           </a:prstGeom>
           <a:solidFill>
-            <a:srgbClr val="EDEDDD"/>
+            <a:srgbClr val="EFEFED"/>
           </a:solidFill>
           <a:ln>
             <a:noFill/>
@@ -8908,7 +8908,7 @@
             <a:r>
               <a:rPr sz="2400" b="0" i="0">
                 <a:solidFill>
-                  <a:srgbClr val="B5B5AD"/>
+                  <a:srgbClr val="AEAEAA"/>
                 </a:solidFill>
                 <a:latin typeface="Outfit 1"/>
               </a:rPr>
@@ -9115,7 +9115,7 @@
     <p:bg>
       <p:bgPr>
         <a:solidFill>
-          <a:srgbClr val="F8F7F2"/>
+          <a:srgbClr val="FFFFFF"/>
         </a:solidFill>
         <a:effectLst/>
       </p:bgPr>
@@ -9157,7 +9157,7 @@
             <a:r>
               <a:rPr sz="1700" b="1" i="0" spc="120">
                 <a:solidFill>
-                  <a:srgbClr val="B5B5AD"/>
+                  <a:srgbClr val="AEAEAA"/>
                 </a:solidFill>
                 <a:latin typeface="Outfit 1 Bold"/>
               </a:rPr>
@@ -9222,7 +9222,7 @@
             </a:avLst>
           </a:prstGeom>
           <a:solidFill>
-            <a:srgbClr val="E5E4DF"/>
+            <a:srgbClr val="E3E3E1"/>
           </a:solidFill>
           <a:ln>
             <a:noFill/>
@@ -9268,7 +9268,7 @@
             </a:avLst>
           </a:prstGeom>
           <a:solidFill>
-            <a:srgbClr val="FFFFFF"/>
+            <a:srgbClr val="FAFAF9"/>
           </a:solidFill>
           <a:ln>
             <a:noFill/>
@@ -9459,7 +9459,7 @@
             </a:avLst>
           </a:prstGeom>
           <a:solidFill>
-            <a:srgbClr val="E5E4DF"/>
+            <a:srgbClr val="E3E3E1"/>
           </a:solidFill>
           <a:ln>
             <a:noFill/>
@@ -9505,7 +9505,7 @@
             </a:avLst>
           </a:prstGeom>
           <a:solidFill>
-            <a:srgbClr val="EDEDDD"/>
+            <a:srgbClr val="EFEFED"/>
           </a:solidFill>
           <a:ln>
             <a:noFill/>
@@ -9696,7 +9696,7 @@
             </a:avLst>
           </a:prstGeom>
           <a:solidFill>
-            <a:srgbClr val="E5E4DF"/>
+            <a:srgbClr val="E3E3E1"/>
           </a:solidFill>
           <a:ln>
             <a:noFill/>
@@ -9742,7 +9742,7 @@
             </a:avLst>
           </a:prstGeom>
           <a:solidFill>
-            <a:srgbClr val="FFFFFF"/>
+            <a:srgbClr val="FAFAF9"/>
           </a:solidFill>
           <a:ln>
             <a:noFill/>
@@ -9933,7 +9933,7 @@
             </a:avLst>
           </a:prstGeom>
           <a:solidFill>
-            <a:srgbClr val="E5E4DF"/>
+            <a:srgbClr val="E3E3E1"/>
           </a:solidFill>
           <a:ln>
             <a:noFill/>
@@ -9979,7 +9979,7 @@
             </a:avLst>
           </a:prstGeom>
           <a:solidFill>
-            <a:srgbClr val="EDEDDD"/>
+            <a:srgbClr val="EFEFED"/>
           </a:solidFill>
           <a:ln>
             <a:noFill/>
@@ -10170,7 +10170,7 @@
             </a:avLst>
           </a:prstGeom>
           <a:solidFill>
-            <a:srgbClr val="E5E4DF"/>
+            <a:srgbClr val="E3E3E1"/>
           </a:solidFill>
           <a:ln>
             <a:noFill/>
@@ -10216,7 +10216,7 @@
             </a:avLst>
           </a:prstGeom>
           <a:solidFill>
-            <a:srgbClr val="FFFFFF"/>
+            <a:srgbClr val="FAFAF9"/>
           </a:solidFill>
           <a:ln>
             <a:noFill/>
@@ -10673,7 +10673,7 @@
     <p:bg>
       <p:bgPr>
         <a:solidFill>
-          <a:srgbClr val="F6F5F0"/>
+          <a:srgbClr val="FFFFFF"/>
         </a:solidFill>
         <a:effectLst/>
       </p:bgPr>
@@ -10898,7 +10898,7 @@
     <p:bg>
       <p:bgPr>
         <a:solidFill>
-          <a:srgbClr val="F8F7F2"/>
+          <a:srgbClr val="FFFFFF"/>
         </a:solidFill>
         <a:effectLst/>
       </p:bgPr>
@@ -10964,7 +10964,7 @@
             <a:r>
               <a:rPr sz="1700" b="1" i="0" spc="120">
                 <a:solidFill>
-                  <a:srgbClr val="B5B5AD"/>
+                  <a:srgbClr val="AEAEAA"/>
                 </a:solidFill>
                 <a:latin typeface="Outfit 1 Bold"/>
               </a:rPr>
@@ -11003,7 +11003,7 @@
             <a:r>
               <a:rPr sz="3000" b="0" i="0">
                 <a:solidFill>
-                  <a:srgbClr val="B5B5AD"/>
+                  <a:srgbClr val="AEAEAA"/>
                 </a:solidFill>
                 <a:latin typeface="Outfit 1"/>
               </a:rPr>
@@ -11224,7 +11224,7 @@
     <p:bg>
       <p:bgPr>
         <a:solidFill>
-          <a:srgbClr val="F6F5F0"/>
+          <a:srgbClr val="FFFFFF"/>
         </a:solidFill>
         <a:effectLst/>
       </p:bgPr>
@@ -11433,7 +11433,7 @@
     <p:bg>
       <p:bgPr>
         <a:solidFill>
-          <a:srgbClr val="F8F7F2"/>
+          <a:srgbClr val="FFFFFF"/>
         </a:solidFill>
         <a:effectLst/>
       </p:bgPr>
@@ -11475,7 +11475,7 @@
             <a:r>
               <a:rPr sz="1700" b="1" i="0" spc="120">
                 <a:solidFill>
-                  <a:srgbClr val="B5B5AD"/>
+                  <a:srgbClr val="AEAEAA"/>
                 </a:solidFill>
                 <a:latin typeface="Outfit 1 Bold"/>
               </a:rPr>
@@ -11629,7 +11629,7 @@
             </a:avLst>
           </a:prstGeom>
           <a:solidFill>
-            <a:srgbClr val="E5E4DF"/>
+            <a:srgbClr val="E3E3E1"/>
           </a:solidFill>
           <a:ln>
             <a:noFill/>
@@ -11675,7 +11675,7 @@
             </a:avLst>
           </a:prstGeom>
           <a:solidFill>
-            <a:srgbClr val="FFFFFF"/>
+            <a:srgbClr val="FAFAF9"/>
           </a:solidFill>
           <a:ln>
             <a:noFill/>
@@ -11780,7 +11780,7 @@
             <a:r>
               <a:rPr sz="2700" b="0" i="0">
                 <a:solidFill>
-                  <a:srgbClr val="B5B5AD"/>
+                  <a:srgbClr val="AEAEAA"/>
                 </a:solidFill>
                 <a:latin typeface="Outfit 1"/>
               </a:rPr>
@@ -11923,7 +11923,7 @@
     <p:bg>
       <p:bgPr>
         <a:solidFill>
-          <a:srgbClr val="F6F5F0"/>
+          <a:srgbClr val="FFFFFF"/>
         </a:solidFill>
         <a:effectLst/>
       </p:bgPr>
@@ -12139,7 +12139,7 @@
             </a:avLst>
           </a:prstGeom>
           <a:solidFill>
-            <a:srgbClr val="DCDBD5"/>
+            <a:srgbClr val="DBDBD9"/>
           </a:solidFill>
           <a:ln>
             <a:noFill/>
@@ -12263,7 +12263,7 @@
             </a:avLst>
           </a:prstGeom>
           <a:solidFill>
-            <a:srgbClr val="DCDBD5"/>
+            <a:srgbClr val="DBDBD9"/>
           </a:solidFill>
           <a:ln>
             <a:noFill/>
@@ -12387,7 +12387,7 @@
             </a:avLst>
           </a:prstGeom>
           <a:solidFill>
-            <a:srgbClr val="DCDBD5"/>
+            <a:srgbClr val="DBDBD9"/>
           </a:solidFill>
           <a:ln>
             <a:noFill/>
@@ -12511,7 +12511,7 @@
             </a:avLst>
           </a:prstGeom>
           <a:solidFill>
-            <a:srgbClr val="DCDBD5"/>
+            <a:srgbClr val="DBDBD9"/>
           </a:solidFill>
           <a:ln>
             <a:noFill/>
@@ -12713,7 +12713,7 @@
     <p:bg>
       <p:bgPr>
         <a:solidFill>
-          <a:srgbClr val="F8F7F2"/>
+          <a:srgbClr val="FFFFFF"/>
         </a:solidFill>
         <a:effectLst/>
       </p:bgPr>
@@ -12755,7 +12755,7 @@
             <a:r>
               <a:rPr sz="1700" b="1" i="0" spc="120">
                 <a:solidFill>
-                  <a:srgbClr val="B5B5AD"/>
+                  <a:srgbClr val="AEAEAA"/>
                 </a:solidFill>
                 <a:latin typeface="Outfit 1 Bold"/>
               </a:rPr>
@@ -12847,7 +12847,7 @@
             </a:avLst>
           </a:prstGeom>
           <a:solidFill>
-            <a:srgbClr val="E5E4DF"/>
+            <a:srgbClr val="E3E3E1"/>
           </a:solidFill>
           <a:ln>
             <a:noFill/>
@@ -12893,7 +12893,7 @@
             </a:avLst>
           </a:prstGeom>
           <a:solidFill>
-            <a:srgbClr val="FFFFFF"/>
+            <a:srgbClr val="FAFAF9"/>
           </a:solidFill>
           <a:ln>
             <a:noFill/>
@@ -13037,7 +13037,7 @@
             <a:r>
               <a:rPr sz="2300" b="0" i="0">
                 <a:solidFill>
-                  <a:srgbClr val="B5B5AD"/>
+                  <a:srgbClr val="AEAEAA"/>
                 </a:solidFill>
                 <a:latin typeface="Outfit 1"/>
               </a:rPr>
@@ -13063,7 +13063,7 @@
             </a:avLst>
           </a:prstGeom>
           <a:solidFill>
-            <a:srgbClr val="E5E4DF"/>
+            <a:srgbClr val="E3E3E1"/>
           </a:solidFill>
           <a:ln>
             <a:noFill/>
@@ -13109,7 +13109,7 @@
             </a:avLst>
           </a:prstGeom>
           <a:solidFill>
-            <a:srgbClr val="EDEDDD"/>
+            <a:srgbClr val="EFEFED"/>
           </a:solidFill>
           <a:ln>
             <a:noFill/>
@@ -13253,7 +13253,7 @@
             <a:r>
               <a:rPr sz="2300" b="0" i="0">
                 <a:solidFill>
-                  <a:srgbClr val="B5B5AD"/>
+                  <a:srgbClr val="AEAEAA"/>
                 </a:solidFill>
                 <a:latin typeface="Outfit 1"/>
               </a:rPr>
@@ -13279,7 +13279,7 @@
             </a:avLst>
           </a:prstGeom>
           <a:solidFill>
-            <a:srgbClr val="E5E4DF"/>
+            <a:srgbClr val="E3E3E1"/>
           </a:solidFill>
           <a:ln>
             <a:noFill/>
@@ -13325,7 +13325,7 @@
             </a:avLst>
           </a:prstGeom>
           <a:solidFill>
-            <a:srgbClr val="FFFFFF"/>
+            <a:srgbClr val="FAFAF9"/>
           </a:solidFill>
           <a:ln>
             <a:noFill/>
@@ -13469,7 +13469,7 @@
             <a:r>
               <a:rPr sz="2300" b="0" i="0">
                 <a:solidFill>
-                  <a:srgbClr val="B5B5AD"/>
+                  <a:srgbClr val="AEAEAA"/>
                 </a:solidFill>
                 <a:latin typeface="Outfit 1"/>
               </a:rPr>
@@ -13495,7 +13495,7 @@
             </a:avLst>
           </a:prstGeom>
           <a:solidFill>
-            <a:srgbClr val="E5E4DF"/>
+            <a:srgbClr val="E3E3E1"/>
           </a:solidFill>
           <a:ln>
             <a:noFill/>
@@ -13541,7 +13541,7 @@
             </a:avLst>
           </a:prstGeom>
           <a:solidFill>
-            <a:srgbClr val="EDEDDD"/>
+            <a:srgbClr val="EFEFED"/>
           </a:solidFill>
           <a:ln>
             <a:noFill/>
@@ -13685,7 +13685,7 @@
             <a:r>
               <a:rPr sz="2300" b="0" i="0">
                 <a:solidFill>
-                  <a:srgbClr val="B5B5AD"/>
+                  <a:srgbClr val="AEAEAA"/>
                 </a:solidFill>
                 <a:latin typeface="Outfit 1"/>
               </a:rPr>
@@ -13904,7 +13904,7 @@
     <p:bg>
       <p:bgPr>
         <a:solidFill>
-          <a:srgbClr val="F8F7F2"/>
+          <a:srgbClr val="FFFFFF"/>
         </a:solidFill>
         <a:effectLst/>
       </p:bgPr>
@@ -13946,7 +13946,7 @@
             <a:r>
               <a:rPr sz="1700" b="1" i="0" spc="120">
                 <a:solidFill>
-                  <a:srgbClr val="B5B5AD"/>
+                  <a:srgbClr val="AEAEAA"/>
                 </a:solidFill>
                 <a:latin typeface="Outfit 1 Bold"/>
               </a:rPr>
@@ -14290,7 +14290,7 @@
     <p:bg>
       <p:bgPr>
         <a:solidFill>
-          <a:srgbClr val="F8F7F2"/>
+          <a:srgbClr val="FFFFFF"/>
         </a:solidFill>
         <a:effectLst/>
       </p:bgPr>
@@ -14332,7 +14332,7 @@
             <a:r>
               <a:rPr sz="1700" b="1" i="0" spc="120">
                 <a:solidFill>
-                  <a:srgbClr val="B5B5AD"/>
+                  <a:srgbClr val="AEAEAA"/>
                 </a:solidFill>
                 <a:latin typeface="Outfit 1 Bold"/>
               </a:rPr>
@@ -14397,7 +14397,7 @@
             </a:avLst>
           </a:prstGeom>
           <a:solidFill>
-            <a:srgbClr val="E5E4DF"/>
+            <a:srgbClr val="E3E3E1"/>
           </a:solidFill>
           <a:ln>
             <a:noFill/>
@@ -14443,7 +14443,7 @@
             </a:avLst>
           </a:prstGeom>
           <a:solidFill>
-            <a:srgbClr val="FFFFFF"/>
+            <a:srgbClr val="FAFAF9"/>
           </a:solidFill>
           <a:ln>
             <a:noFill/>
@@ -14587,7 +14587,7 @@
             <a:r>
               <a:rPr sz="2300" b="0" i="0">
                 <a:solidFill>
-                  <a:srgbClr val="B5B5AD"/>
+                  <a:srgbClr val="AEAEAA"/>
                 </a:solidFill>
                 <a:latin typeface="Outfit 1"/>
               </a:rPr>
@@ -14613,7 +14613,7 @@
             </a:avLst>
           </a:prstGeom>
           <a:solidFill>
-            <a:srgbClr val="E5E4DF"/>
+            <a:srgbClr val="E3E3E1"/>
           </a:solidFill>
           <a:ln>
             <a:noFill/>
@@ -14659,7 +14659,7 @@
             </a:avLst>
           </a:prstGeom>
           <a:solidFill>
-            <a:srgbClr val="EDEDDD"/>
+            <a:srgbClr val="EFEFED"/>
           </a:solidFill>
           <a:ln>
             <a:noFill/>
@@ -14803,7 +14803,7 @@
             <a:r>
               <a:rPr sz="2300" b="0" i="0">
                 <a:solidFill>
-                  <a:srgbClr val="B5B5AD"/>
+                  <a:srgbClr val="AEAEAA"/>
                 </a:solidFill>
                 <a:latin typeface="Outfit 1"/>
               </a:rPr>
@@ -14829,7 +14829,7 @@
             </a:avLst>
           </a:prstGeom>
           <a:solidFill>
-            <a:srgbClr val="E5E4DF"/>
+            <a:srgbClr val="E3E3E1"/>
           </a:solidFill>
           <a:ln>
             <a:noFill/>
@@ -14875,7 +14875,7 @@
             </a:avLst>
           </a:prstGeom>
           <a:solidFill>
-            <a:srgbClr val="FFFFFF"/>
+            <a:srgbClr val="FAFAF9"/>
           </a:solidFill>
           <a:ln>
             <a:noFill/>
@@ -15019,7 +15019,7 @@
             <a:r>
               <a:rPr sz="2300" b="0" i="0">
                 <a:solidFill>
-                  <a:srgbClr val="B5B5AD"/>
+                  <a:srgbClr val="AEAEAA"/>
                 </a:solidFill>
                 <a:latin typeface="Outfit 1"/>
               </a:rPr>
@@ -15045,7 +15045,7 @@
             </a:avLst>
           </a:prstGeom>
           <a:solidFill>
-            <a:srgbClr val="E5E4DF"/>
+            <a:srgbClr val="E3E3E1"/>
           </a:solidFill>
           <a:ln>
             <a:noFill/>
@@ -15091,7 +15091,7 @@
             </a:avLst>
           </a:prstGeom>
           <a:solidFill>
-            <a:srgbClr val="EDEDDD"/>
+            <a:srgbClr val="EFEFED"/>
           </a:solidFill>
           <a:ln>
             <a:noFill/>
@@ -15235,7 +15235,7 @@
             <a:r>
               <a:rPr sz="2300" b="0" i="0">
                 <a:solidFill>
-                  <a:srgbClr val="B5B5AD"/>
+                  <a:srgbClr val="AEAEAA"/>
                 </a:solidFill>
                 <a:latin typeface="Outfit 1"/>
               </a:rPr>
@@ -15344,7 +15344,7 @@
             </a:avLst>
           </a:prstGeom>
           <a:solidFill>
-            <a:srgbClr val="DCDBD5"/>
+            <a:srgbClr val="DBDBD9"/>
           </a:solidFill>
           <a:ln>
             <a:noFill/>
@@ -15390,7 +15390,7 @@
             </a:avLst>
           </a:prstGeom>
           <a:solidFill>
-            <a:srgbClr val="DCDBD5"/>
+            <a:srgbClr val="DBDBD9"/>
           </a:solidFill>
           <a:ln>
             <a:noFill/>
@@ -15436,7 +15436,7 @@
             </a:avLst>
           </a:prstGeom>
           <a:solidFill>
-            <a:srgbClr val="DCDBD5"/>
+            <a:srgbClr val="DBDBD9"/>
           </a:solidFill>
           <a:ln>
             <a:noFill/>
@@ -15482,7 +15482,7 @@
             </a:avLst>
           </a:prstGeom>
           <a:solidFill>
-            <a:srgbClr val="DCDBD5"/>
+            <a:srgbClr val="DBDBD9"/>
           </a:solidFill>
           <a:ln>
             <a:noFill/>
@@ -15663,7 +15663,7 @@
     <p:bg>
       <p:bgPr>
         <a:solidFill>
-          <a:srgbClr val="F6F5F0"/>
+          <a:srgbClr val="FFFFFF"/>
         </a:solidFill>
         <a:effectLst/>
       </p:bgPr>
@@ -15872,7 +15872,7 @@
     <p:bg>
       <p:bgPr>
         <a:solidFill>
-          <a:srgbClr val="F8F7F2"/>
+          <a:srgbClr val="FFFFFF"/>
         </a:solidFill>
         <a:effectLst/>
       </p:bgPr>
@@ -15914,7 +15914,7 @@
             <a:r>
               <a:rPr sz="1700" b="1" i="0" spc="120">
                 <a:solidFill>
-                  <a:srgbClr val="B5B5AD"/>
+                  <a:srgbClr val="AEAEAA"/>
                 </a:solidFill>
                 <a:latin typeface="Outfit 1 Bold"/>
               </a:rPr>
@@ -16080,7 +16080,7 @@
             </a:avLst>
           </a:prstGeom>
           <a:solidFill>
-            <a:srgbClr val="E5E4DF"/>
+            <a:srgbClr val="E3E3E1"/>
           </a:solidFill>
           <a:ln>
             <a:noFill/>
@@ -16126,7 +16126,7 @@
             </a:avLst>
           </a:prstGeom>
           <a:solidFill>
-            <a:srgbClr val="FFFFFF"/>
+            <a:srgbClr val="FAFAF9"/>
           </a:solidFill>
           <a:ln>
             <a:noFill/>
@@ -16270,7 +16270,7 @@
             <a:r>
               <a:rPr sz="2500" b="0" i="0">
                 <a:solidFill>
-                  <a:srgbClr val="B5B5AD"/>
+                  <a:srgbClr val="AEAEAA"/>
                 </a:solidFill>
                 <a:latin typeface="Outfit 1"/>
               </a:rPr>
@@ -16296,7 +16296,7 @@
             </a:avLst>
           </a:prstGeom>
           <a:solidFill>
-            <a:srgbClr val="E5E4DF"/>
+            <a:srgbClr val="E3E3E1"/>
           </a:solidFill>
           <a:ln>
             <a:noFill/>
@@ -16342,7 +16342,7 @@
             </a:avLst>
           </a:prstGeom>
           <a:solidFill>
-            <a:srgbClr val="EDEDDD"/>
+            <a:srgbClr val="EFEFED"/>
           </a:solidFill>
           <a:ln>
             <a:noFill/>
@@ -16486,7 +16486,7 @@
             <a:r>
               <a:rPr sz="2500" b="0" i="0">
                 <a:solidFill>
-                  <a:srgbClr val="B5B5AD"/>
+                  <a:srgbClr val="AEAEAA"/>
                 </a:solidFill>
                 <a:latin typeface="Outfit 1"/>
               </a:rPr>
@@ -16512,7 +16512,7 @@
             </a:avLst>
           </a:prstGeom>
           <a:solidFill>
-            <a:srgbClr val="E5E4DF"/>
+            <a:srgbClr val="E3E3E1"/>
           </a:solidFill>
           <a:ln>
             <a:noFill/>
@@ -16558,7 +16558,7 @@
             </a:avLst>
           </a:prstGeom>
           <a:solidFill>
-            <a:srgbClr val="FFFFFF"/>
+            <a:srgbClr val="FAFAF9"/>
           </a:solidFill>
           <a:ln>
             <a:noFill/>
@@ -16702,7 +16702,7 @@
             <a:r>
               <a:rPr sz="2500" b="0" i="0">
                 <a:solidFill>
-                  <a:srgbClr val="B5B5AD"/>
+                  <a:srgbClr val="AEAEAA"/>
                 </a:solidFill>
                 <a:latin typeface="Outfit 1"/>
               </a:rPr>
@@ -16728,7 +16728,7 @@
             </a:avLst>
           </a:prstGeom>
           <a:solidFill>
-            <a:srgbClr val="E5E4DF"/>
+            <a:srgbClr val="E3E3E1"/>
           </a:solidFill>
           <a:ln>
             <a:noFill/>
@@ -16774,7 +16774,7 @@
             </a:avLst>
           </a:prstGeom>
           <a:solidFill>
-            <a:srgbClr val="EDEDDD"/>
+            <a:srgbClr val="EFEFED"/>
           </a:solidFill>
           <a:ln>
             <a:noFill/>
@@ -16918,7 +16918,7 @@
             <a:r>
               <a:rPr sz="2500" b="0" i="0">
                 <a:solidFill>
-                  <a:srgbClr val="B5B5AD"/>
+                  <a:srgbClr val="AEAEAA"/>
                 </a:solidFill>
                 <a:latin typeface="Outfit 1"/>
               </a:rPr>
@@ -17022,7 +17022,7 @@
     <p:bg>
       <p:bgPr>
         <a:solidFill>
-          <a:srgbClr val="F8F7F2"/>
+          <a:srgbClr val="FFFFFF"/>
         </a:solidFill>
         <a:effectLst/>
       </p:bgPr>
@@ -17064,7 +17064,7 @@
             <a:r>
               <a:rPr sz="1700" b="1" i="0" spc="120">
                 <a:solidFill>
-                  <a:srgbClr val="B5B5AD"/>
+                  <a:srgbClr val="AEAEAA"/>
                 </a:solidFill>
                 <a:latin typeface="Outfit 1 Bold"/>
               </a:rPr>
@@ -17287,7 +17287,7 @@
             </a:avLst>
           </a:prstGeom>
           <a:solidFill>
-            <a:srgbClr val="E5E4DF"/>
+            <a:srgbClr val="E3E3E1"/>
           </a:solidFill>
           <a:ln>
             <a:noFill/>
@@ -17333,7 +17333,7 @@
             </a:avLst>
           </a:prstGeom>
           <a:solidFill>
-            <a:srgbClr val="FFFFFF"/>
+            <a:srgbClr val="FAFAF9"/>
           </a:solidFill>
           <a:ln>
             <a:noFill/>
@@ -17516,7 +17516,7 @@
             <a:r>
               <a:rPr sz="2300" b="0" i="0">
                 <a:solidFill>
-                  <a:srgbClr val="B5B5AD"/>
+                  <a:srgbClr val="AEAEAA"/>
                 </a:solidFill>
                 <a:latin typeface="Outfit 1"/>
               </a:rPr>
@@ -17542,7 +17542,7 @@
             </a:avLst>
           </a:prstGeom>
           <a:solidFill>
-            <a:srgbClr val="E5E4DF"/>
+            <a:srgbClr val="E3E3E1"/>
           </a:solidFill>
           <a:ln>
             <a:noFill/>
@@ -17588,7 +17588,7 @@
             </a:avLst>
           </a:prstGeom>
           <a:solidFill>
-            <a:srgbClr val="EDEDDD"/>
+            <a:srgbClr val="EFEFED"/>
           </a:solidFill>
           <a:ln>
             <a:noFill/>
@@ -17771,7 +17771,7 @@
             <a:r>
               <a:rPr sz="2300" b="0" i="0">
                 <a:solidFill>
-                  <a:srgbClr val="B5B5AD"/>
+                  <a:srgbClr val="AEAEAA"/>
                 </a:solidFill>
                 <a:latin typeface="Outfit 1"/>
               </a:rPr>
@@ -17810,7 +17810,7 @@
             <a:r>
               <a:rPr sz="2100" b="0" i="1">
                 <a:solidFill>
-                  <a:srgbClr val="B5B5AD"/>
+                  <a:srgbClr val="AEAEAA"/>
                 </a:solidFill>
                 <a:latin typeface="Outfit 2"/>
               </a:rPr>
@@ -17914,7 +17914,7 @@
     <p:bg>
       <p:bgPr>
         <a:solidFill>
-          <a:srgbClr val="F8F7F2"/>
+          <a:srgbClr val="FFFFFF"/>
         </a:solidFill>
         <a:effectLst/>
       </p:bgPr>
@@ -18002,7 +18002,7 @@
             <a:r>
               <a:rPr sz="1700" b="1" i="0" spc="120">
                 <a:solidFill>
-                  <a:srgbClr val="B5B5AD"/>
+                  <a:srgbClr val="AEAEAA"/>
                 </a:solidFill>
                 <a:latin typeface="Outfit 1 Bold"/>
               </a:rPr>
@@ -18177,7 +18177,7 @@
     <p:bg>
       <p:bgPr>
         <a:solidFill>
-          <a:srgbClr val="F6F5F0"/>
+          <a:srgbClr val="FFFFFF"/>
         </a:solidFill>
         <a:effectLst/>
       </p:bgPr>
@@ -18386,7 +18386,7 @@
     <p:bg>
       <p:bgPr>
         <a:solidFill>
-          <a:srgbClr val="F8F7F2"/>
+          <a:srgbClr val="FFFFFF"/>
         </a:solidFill>
         <a:effectLst/>
       </p:bgPr>
@@ -18428,7 +18428,7 @@
             <a:r>
               <a:rPr sz="1700" b="1" i="0" spc="120">
                 <a:solidFill>
-                  <a:srgbClr val="B5B5AD"/>
+                  <a:srgbClr val="AEAEAA"/>
                 </a:solidFill>
                 <a:latin typeface="Outfit 1 Bold"/>
               </a:rPr>
@@ -18506,7 +18506,7 @@
             <a:r>
               <a:rPr sz="3000" b="0" i="0">
                 <a:solidFill>
-                  <a:srgbClr val="B5B5AD"/>
+                  <a:srgbClr val="AEAEAA"/>
                 </a:solidFill>
                 <a:latin typeface="Outfit 1"/>
               </a:rPr>
@@ -18532,7 +18532,7 @@
             </a:avLst>
           </a:prstGeom>
           <a:solidFill>
-            <a:srgbClr val="E5E4DF"/>
+            <a:srgbClr val="E3E3E1"/>
           </a:solidFill>
           <a:ln>
             <a:noFill/>
@@ -18578,7 +18578,7 @@
             </a:avLst>
           </a:prstGeom>
           <a:solidFill>
-            <a:srgbClr val="FFFFFF"/>
+            <a:srgbClr val="FAFAF9"/>
           </a:solidFill>
           <a:ln>
             <a:noFill/>
@@ -18683,7 +18683,7 @@
             <a:r>
               <a:rPr sz="3000" b="0" i="1">
                 <a:solidFill>
-                  <a:srgbClr val="B5B5AD"/>
+                  <a:srgbClr val="AEAEAA"/>
                 </a:solidFill>
                 <a:latin typeface="Outfit 1"/>
               </a:rPr>
@@ -18890,7 +18890,7 @@
     <p:bg>
       <p:bgPr>
         <a:solidFill>
-          <a:srgbClr val="F8F7F2"/>
+          <a:srgbClr val="FFFFFF"/>
         </a:solidFill>
         <a:effectLst/>
       </p:bgPr>
@@ -18932,7 +18932,7 @@
             <a:r>
               <a:rPr sz="1700" b="1" i="0" spc="120">
                 <a:solidFill>
-                  <a:srgbClr val="B5B5AD"/>
+                  <a:srgbClr val="AEAEAA"/>
                 </a:solidFill>
                 <a:latin typeface="Outfit 1 Bold"/>
               </a:rPr>
@@ -18997,7 +18997,7 @@
             </a:avLst>
           </a:prstGeom>
           <a:solidFill>
-            <a:srgbClr val="E5E4DF"/>
+            <a:srgbClr val="E3E3E1"/>
           </a:solidFill>
           <a:ln>
             <a:noFill/>
@@ -19043,7 +19043,7 @@
             </a:avLst>
           </a:prstGeom>
           <a:solidFill>
-            <a:srgbClr val="FFFFFF"/>
+            <a:srgbClr val="FAFAF9"/>
           </a:solidFill>
           <a:ln>
             <a:noFill/>
@@ -19226,7 +19226,7 @@
             <a:r>
               <a:rPr sz="2500" b="0" i="0">
                 <a:solidFill>
-                  <a:srgbClr val="B5B5AD"/>
+                  <a:srgbClr val="AEAEAA"/>
                 </a:solidFill>
                 <a:latin typeface="Outfit 1"/>
               </a:rPr>
@@ -19252,7 +19252,7 @@
             </a:avLst>
           </a:prstGeom>
           <a:solidFill>
-            <a:srgbClr val="E5E4DF"/>
+            <a:srgbClr val="E3E3E1"/>
           </a:solidFill>
           <a:ln>
             <a:noFill/>
@@ -19298,7 +19298,7 @@
             </a:avLst>
           </a:prstGeom>
           <a:solidFill>
-            <a:srgbClr val="EDEDDD"/>
+            <a:srgbClr val="EFEFED"/>
           </a:solidFill>
           <a:ln>
             <a:noFill/>
@@ -19481,7 +19481,7 @@
             <a:r>
               <a:rPr sz="2500" b="0" i="0">
                 <a:solidFill>
-                  <a:srgbClr val="B5B5AD"/>
+                  <a:srgbClr val="AEAEAA"/>
                 </a:solidFill>
                 <a:latin typeface="Outfit 1"/>
               </a:rPr>
@@ -19507,7 +19507,7 @@
             </a:avLst>
           </a:prstGeom>
           <a:solidFill>
-            <a:srgbClr val="E5E4DF"/>
+            <a:srgbClr val="E3E3E1"/>
           </a:solidFill>
           <a:ln>
             <a:noFill/>
@@ -19553,7 +19553,7 @@
             </a:avLst>
           </a:prstGeom>
           <a:solidFill>
-            <a:srgbClr val="FFFFFF"/>
+            <a:srgbClr val="FAFAF9"/>
           </a:solidFill>
           <a:ln>
             <a:noFill/>
@@ -19736,7 +19736,7 @@
             <a:r>
               <a:rPr sz="2500" b="0" i="0">
                 <a:solidFill>
-                  <a:srgbClr val="B5B5AD"/>
+                  <a:srgbClr val="AEAEAA"/>
                 </a:solidFill>
                 <a:latin typeface="Outfit 1"/>
               </a:rPr>
@@ -19762,7 +19762,7 @@
             </a:avLst>
           </a:prstGeom>
           <a:solidFill>
-            <a:srgbClr val="E5E4DF"/>
+            <a:srgbClr val="E3E3E1"/>
           </a:solidFill>
           <a:ln>
             <a:noFill/>
@@ -19808,7 +19808,7 @@
             </a:avLst>
           </a:prstGeom>
           <a:solidFill>
-            <a:srgbClr val="EDEDDD"/>
+            <a:srgbClr val="EFEFED"/>
           </a:solidFill>
           <a:ln>
             <a:noFill/>
@@ -19991,7 +19991,7 @@
             <a:r>
               <a:rPr sz="2500" b="0" i="0">
                 <a:solidFill>
-                  <a:srgbClr val="B5B5AD"/>
+                  <a:srgbClr val="AEAEAA"/>
                 </a:solidFill>
                 <a:latin typeface="Outfit 1"/>
               </a:rPr>
@@ -20237,7 +20237,7 @@
     <p:bg>
       <p:bgPr>
         <a:solidFill>
-          <a:srgbClr val="F8F7F2"/>
+          <a:srgbClr val="FFFFFF"/>
         </a:solidFill>
         <a:effectLst/>
       </p:bgPr>
@@ -20279,7 +20279,7 @@
             <a:r>
               <a:rPr sz="1700" b="1" i="0" spc="120">
                 <a:solidFill>
-                  <a:srgbClr val="B5B5AD"/>
+                  <a:srgbClr val="AEAEAA"/>
                 </a:solidFill>
                 <a:latin typeface="Outfit 1 Bold"/>
               </a:rPr>
@@ -20344,7 +20344,7 @@
             </a:avLst>
           </a:prstGeom>
           <a:solidFill>
-            <a:srgbClr val="E5E4DF"/>
+            <a:srgbClr val="E3E3E1"/>
           </a:solidFill>
           <a:ln>
             <a:noFill/>
@@ -20390,7 +20390,7 @@
             </a:avLst>
           </a:prstGeom>
           <a:solidFill>
-            <a:srgbClr val="FFFFFF"/>
+            <a:srgbClr val="FAFAF9"/>
           </a:solidFill>
           <a:ln>
             <a:noFill/>
@@ -20519,7 +20519,7 @@
             <a:avLst/>
           </a:prstGeom>
           <a:solidFill>
-            <a:srgbClr val="E5E4DF"/>
+            <a:srgbClr val="E3E3E1"/>
           </a:solidFill>
           <a:ln>
             <a:noFill/>
@@ -20604,7 +20604,7 @@
             </a:avLst>
           </a:prstGeom>
           <a:solidFill>
-            <a:srgbClr val="E5E4DF"/>
+            <a:srgbClr val="E3E3E1"/>
           </a:solidFill>
           <a:ln>
             <a:noFill/>
@@ -20650,7 +20650,7 @@
             </a:avLst>
           </a:prstGeom>
           <a:solidFill>
-            <a:srgbClr val="EDEDDD"/>
+            <a:srgbClr val="EFEFED"/>
           </a:solidFill>
           <a:ln>
             <a:noFill/>
@@ -20779,7 +20779,7 @@
             <a:avLst/>
           </a:prstGeom>
           <a:solidFill>
-            <a:srgbClr val="E5E4DF"/>
+            <a:srgbClr val="E3E3E1"/>
           </a:solidFill>
           <a:ln>
             <a:noFill/>
@@ -20864,7 +20864,7 @@
             </a:avLst>
           </a:prstGeom>
           <a:solidFill>
-            <a:srgbClr val="E5E4DF"/>
+            <a:srgbClr val="E3E3E1"/>
           </a:solidFill>
           <a:ln>
             <a:noFill/>
@@ -20910,7 +20910,7 @@
             </a:avLst>
           </a:prstGeom>
           <a:solidFill>
-            <a:srgbClr val="FFFFFF"/>
+            <a:srgbClr val="FAFAF9"/>
           </a:solidFill>
           <a:ln>
             <a:noFill/>
@@ -21055,7 +21055,7 @@
             <a:avLst/>
           </a:prstGeom>
           <a:solidFill>
-            <a:srgbClr val="E5E4DF"/>
+            <a:srgbClr val="E3E3E1"/>
           </a:solidFill>
           <a:ln>
             <a:noFill/>
@@ -21422,7 +21422,7 @@
     <p:bg>
       <p:bgPr>
         <a:solidFill>
-          <a:srgbClr val="F6F5F0"/>
+          <a:srgbClr val="FFFFFF"/>
         </a:solidFill>
         <a:effectLst/>
       </p:bgPr>
@@ -21631,7 +21631,7 @@
     <p:bg>
       <p:bgPr>
         <a:solidFill>
-          <a:srgbClr val="F8F7F2"/>
+          <a:srgbClr val="FFFFFF"/>
         </a:solidFill>
         <a:effectLst/>
       </p:bgPr>
@@ -21673,7 +21673,7 @@
             <a:r>
               <a:rPr sz="1700" b="1" i="0" spc="120">
                 <a:solidFill>
-                  <a:srgbClr val="B5B5AD"/>
+                  <a:srgbClr val="AEAEAA"/>
                 </a:solidFill>
                 <a:latin typeface="Outfit 1 Bold"/>
               </a:rPr>
@@ -21765,7 +21765,7 @@
             </a:avLst>
           </a:prstGeom>
           <a:solidFill>
-            <a:srgbClr val="E5E4DF"/>
+            <a:srgbClr val="E3E3E1"/>
           </a:solidFill>
           <a:ln>
             <a:noFill/>
@@ -21811,7 +21811,7 @@
             </a:avLst>
           </a:prstGeom>
           <a:solidFill>
-            <a:srgbClr val="FFFFFF"/>
+            <a:srgbClr val="FAFAF9"/>
           </a:solidFill>
           <a:ln>
             <a:noFill/>
@@ -21955,7 +21955,7 @@
             <a:r>
               <a:rPr sz="2400" b="0" i="0">
                 <a:solidFill>
-                  <a:srgbClr val="B5B5AD"/>
+                  <a:srgbClr val="AEAEAA"/>
                 </a:solidFill>
                 <a:latin typeface="Outfit 1"/>
               </a:rPr>
@@ -21981,7 +21981,7 @@
             </a:avLst>
           </a:prstGeom>
           <a:solidFill>
-            <a:srgbClr val="E5E4DF"/>
+            <a:srgbClr val="E3E3E1"/>
           </a:solidFill>
           <a:ln>
             <a:noFill/>
@@ -22027,7 +22027,7 @@
             </a:avLst>
           </a:prstGeom>
           <a:solidFill>
-            <a:srgbClr val="EDEDDD"/>
+            <a:srgbClr val="EFEFED"/>
           </a:solidFill>
           <a:ln>
             <a:noFill/>
@@ -22171,7 +22171,7 @@
             <a:r>
               <a:rPr sz="2400" b="0" i="0">
                 <a:solidFill>
-                  <a:srgbClr val="B5B5AD"/>
+                  <a:srgbClr val="AEAEAA"/>
                 </a:solidFill>
                 <a:latin typeface="Outfit 1"/>
               </a:rPr>
@@ -22197,7 +22197,7 @@
             </a:avLst>
           </a:prstGeom>
           <a:solidFill>
-            <a:srgbClr val="E5E4DF"/>
+            <a:srgbClr val="E3E3E1"/>
           </a:solidFill>
           <a:ln>
             <a:noFill/>
@@ -22243,7 +22243,7 @@
             </a:avLst>
           </a:prstGeom>
           <a:solidFill>
-            <a:srgbClr val="FFFFFF"/>
+            <a:srgbClr val="FAFAF9"/>
           </a:solidFill>
           <a:ln>
             <a:noFill/>
@@ -22387,7 +22387,7 @@
             <a:r>
               <a:rPr sz="2400" b="0" i="0">
                 <a:solidFill>
-                  <a:srgbClr val="B5B5AD"/>
+                  <a:srgbClr val="AEAEAA"/>
                 </a:solidFill>
                 <a:latin typeface="Outfit 1"/>
               </a:rPr>
